--- a/dais-2026-announcements-ppt/databricks-dais-2026-18-announcements-uk-enterprise-lens.pptx
+++ b/dais-2026-announcements-ppt/databricks-dais-2026-18-announcements-uk-enterprise-lens.pptx
@@ -3560,7 +3560,7 @@
         <p:spPr>
           <a:xfrm>
             <a:off x="685800" y="1828800"/>
-            <a:ext cx="2880360" cy="932688"/>
+            <a:ext cx="2880360" cy="841248"/>
           </a:xfrm>
           <a:prstGeom prst="roundRect">
             <a:avLst/>
@@ -3605,7 +3605,7 @@
         <p:spPr>
           <a:xfrm>
             <a:off x="685800" y="1828800"/>
-            <a:ext cx="91440" cy="932688"/>
+            <a:ext cx="91440" cy="841248"/>
           </a:xfrm>
           <a:prstGeom prst="rect">
             <a:avLst/>
@@ -3689,7 +3689,7 @@
         <p:spPr>
           <a:xfrm>
             <a:off x="886968" y="2212848"/>
-            <a:ext cx="2551176" cy="457200"/>
+            <a:ext cx="2551176" cy="365760"/>
           </a:xfrm>
           <a:prstGeom prst="rect">
             <a:avLst/>
@@ -3706,7 +3706,7 @@
               <a:lnSpc>
                 <a:spcPct val="95000"/>
               </a:lnSpc>
-              <a:defRPr sz="1120" b="0">
+              <a:defRPr sz="1090" b="0">
                 <a:solidFill>
                   <a:srgbClr val="121217"/>
                 </a:solidFill>
@@ -3728,7 +3728,7 @@
         <p:spPr>
           <a:xfrm>
             <a:off x="3730752" y="1828800"/>
-            <a:ext cx="2880360" cy="932688"/>
+            <a:ext cx="2880360" cy="841248"/>
           </a:xfrm>
           <a:prstGeom prst="roundRect">
             <a:avLst/>
@@ -3773,7 +3773,7 @@
         <p:spPr>
           <a:xfrm>
             <a:off x="3730752" y="1828800"/>
-            <a:ext cx="91440" cy="932688"/>
+            <a:ext cx="91440" cy="841248"/>
           </a:xfrm>
           <a:prstGeom prst="rect">
             <a:avLst/>
@@ -3843,7 +3843,7 @@
               </a:defRPr>
             </a:pPr>
             <a:r>
-              <a:t>WHAT CHANGED</a:t>
+              <a:t>PROBLEM IT SOLVES</a:t>
             </a:r>
           </a:p>
         </p:txBody>
@@ -3857,7 +3857,7 @@
         <p:spPr>
           <a:xfrm>
             <a:off x="3931920" y="2212848"/>
-            <a:ext cx="2551176" cy="457200"/>
+            <a:ext cx="2551176" cy="365760"/>
           </a:xfrm>
           <a:prstGeom prst="rect">
             <a:avLst/>
@@ -3874,7 +3874,7 @@
               <a:lnSpc>
                 <a:spcPct val="95000"/>
               </a:lnSpc>
-              <a:defRPr sz="1070" b="0">
+              <a:defRPr sz="990" b="0">
                 <a:solidFill>
                   <a:srgbClr val="121217"/>
                 </a:solidFill>
@@ -3882,7 +3882,7 @@
               </a:defRPr>
             </a:pPr>
             <a:r>
-              <a:t>New AI Gateway links, policy updates, better glossary and domain support, external lineage, file support and wider governance links.</a:t>
+              <a:t>AI teams cannot safely reuse data if nobody trusts the permissions, lineage or definitions. It solves the “which data is approved, who owns it, and can this AI workflow use it?” problem.</a:t>
             </a:r>
           </a:p>
         </p:txBody>
@@ -3895,8 +3895,8 @@
         </p:nvSpPr>
         <p:spPr>
           <a:xfrm>
-            <a:off x="685800" y="2944368"/>
-            <a:ext cx="5925312" cy="1572768"/>
+            <a:off x="685800" y="2834640"/>
+            <a:ext cx="5925312" cy="1353312"/>
           </a:xfrm>
           <a:prstGeom prst="roundRect">
             <a:avLst/>
@@ -3940,8 +3940,8 @@
         </p:nvSpPr>
         <p:spPr>
           <a:xfrm>
-            <a:off x="685800" y="2944368"/>
-            <a:ext cx="91440" cy="1572768"/>
+            <a:off x="685800" y="2834640"/>
+            <a:ext cx="91440" cy="1353312"/>
           </a:xfrm>
           <a:prstGeom prst="rect">
             <a:avLst/>
@@ -3985,7 +3985,7 @@
         </p:nvSpPr>
         <p:spPr>
           <a:xfrm>
-            <a:off x="886968" y="3063240"/>
+            <a:off x="886968" y="2953512"/>
             <a:ext cx="5596128" cy="228600"/>
           </a:xfrm>
           <a:prstGeom prst="rect">
@@ -4024,8 +4024,8 @@
         </p:nvSpPr>
         <p:spPr>
           <a:xfrm>
-            <a:off x="886968" y="3328416"/>
-            <a:ext cx="5596128" cy="1097280"/>
+            <a:off x="886968" y="3218688"/>
+            <a:ext cx="5596128" cy="877824"/>
           </a:xfrm>
           <a:prstGeom prst="rect">
             <a:avLst/>
@@ -4042,7 +4042,7 @@
               <a:lnSpc>
                 <a:spcPct val="95000"/>
               </a:lnSpc>
-              <a:defRPr sz="1090" b="0">
+              <a:defRPr sz="990" b="0">
                 <a:solidFill>
                   <a:srgbClr val="121217"/>
                 </a:solidFill>
@@ -4063,8 +4063,8 @@
         </p:nvSpPr>
         <p:spPr>
           <a:xfrm>
-            <a:off x="685800" y="4700016"/>
-            <a:ext cx="5925312" cy="1078992"/>
+            <a:off x="685800" y="4352544"/>
+            <a:ext cx="5925312" cy="987552"/>
           </a:xfrm>
           <a:prstGeom prst="roundRect">
             <a:avLst/>
@@ -4108,8 +4108,8 @@
         </p:nvSpPr>
         <p:spPr>
           <a:xfrm>
-            <a:off x="685800" y="4700016"/>
-            <a:ext cx="91440" cy="1078992"/>
+            <a:off x="685800" y="4352544"/>
+            <a:ext cx="91440" cy="987552"/>
           </a:xfrm>
           <a:prstGeom prst="rect">
             <a:avLst/>
@@ -4153,7 +4153,7 @@
         </p:nvSpPr>
         <p:spPr>
           <a:xfrm>
-            <a:off x="886968" y="4818888"/>
+            <a:off x="886968" y="4471416"/>
             <a:ext cx="5596128" cy="228600"/>
           </a:xfrm>
           <a:prstGeom prst="rect">
@@ -4179,7 +4179,7 @@
               </a:defRPr>
             </a:pPr>
             <a:r>
-              <a:t>WHAT IT MEANS TO CUSTOMERS</a:t>
+              <a:t>CUSTOMER IMPACT EXAMPLE</a:t>
             </a:r>
           </a:p>
         </p:txBody>
@@ -4192,8 +4192,8 @@
         </p:nvSpPr>
         <p:spPr>
           <a:xfrm>
-            <a:off x="886968" y="5084064"/>
-            <a:ext cx="5596128" cy="603503"/>
+            <a:off x="886968" y="4736592"/>
+            <a:ext cx="5596128" cy="512064"/>
           </a:xfrm>
           <a:prstGeom prst="rect">
             <a:avLst/>
@@ -4210,7 +4210,7 @@
               <a:lnSpc>
                 <a:spcPct val="95000"/>
               </a:lnSpc>
-              <a:defRPr sz="1110" b="0">
+              <a:defRPr sz="1030" b="0">
                 <a:solidFill>
                   <a:srgbClr val="121217"/>
                 </a:solidFill>
@@ -4226,6 +4226,174 @@
       <p:sp>
         <p:nvSpPr>
           <p:cNvPr id="29" name="Rounded Rectangle 28"/>
+          <p:cNvSpPr/>
+          <p:nvPr/>
+        </p:nvSpPr>
+        <p:spPr>
+          <a:xfrm>
+            <a:off x="685800" y="5504688"/>
+            <a:ext cx="5925312" cy="384048"/>
+          </a:xfrm>
+          <a:prstGeom prst="roundRect">
+            <a:avLst/>
+          </a:prstGeom>
+          <a:solidFill>
+            <a:srgbClr val="FFFFFF"/>
+          </a:solidFill>
+          <a:ln w="10160">
+            <a:solidFill>
+              <a:srgbClr val="E2DDD2"/>
+            </a:solidFill>
+          </a:ln>
+        </p:spPr>
+        <p:style>
+          <a:lnRef idx="1">
+            <a:schemeClr val="accent1"/>
+          </a:lnRef>
+          <a:fillRef idx="3">
+            <a:schemeClr val="accent1"/>
+          </a:fillRef>
+          <a:effectRef idx="2">
+            <a:schemeClr val="accent1"/>
+          </a:effectRef>
+          <a:fontRef idx="minor">
+            <a:schemeClr val="lt1"/>
+          </a:fontRef>
+        </p:style>
+        <p:txBody>
+          <a:bodyPr rtlCol="0" anchor="ctr"/>
+          <a:lstStyle/>
+          <a:p>
+            <a:pPr algn="ctr"/>
+          </a:p>
+        </p:txBody>
+      </p:sp>
+      <p:sp>
+        <p:nvSpPr>
+          <p:cNvPr id="30" name="Rectangle 29"/>
+          <p:cNvSpPr/>
+          <p:nvPr/>
+        </p:nvSpPr>
+        <p:spPr>
+          <a:xfrm>
+            <a:off x="685800" y="5504688"/>
+            <a:ext cx="91440" cy="384048"/>
+          </a:xfrm>
+          <a:prstGeom prst="rect">
+            <a:avLst/>
+          </a:prstGeom>
+          <a:solidFill>
+            <a:srgbClr val="AA2923"/>
+          </a:solidFill>
+          <a:ln w="10160">
+            <a:solidFill>
+              <a:srgbClr val="AA2923"/>
+            </a:solidFill>
+          </a:ln>
+        </p:spPr>
+        <p:style>
+          <a:lnRef idx="1">
+            <a:schemeClr val="accent1"/>
+          </a:lnRef>
+          <a:fillRef idx="3">
+            <a:schemeClr val="accent1"/>
+          </a:fillRef>
+          <a:effectRef idx="2">
+            <a:schemeClr val="accent1"/>
+          </a:effectRef>
+          <a:fontRef idx="minor">
+            <a:schemeClr val="lt1"/>
+          </a:fontRef>
+        </p:style>
+        <p:txBody>
+          <a:bodyPr rtlCol="0" anchor="ctr"/>
+          <a:lstStyle/>
+          <a:p>
+            <a:pPr algn="ctr"/>
+          </a:p>
+        </p:txBody>
+      </p:sp>
+      <p:sp>
+        <p:nvSpPr>
+          <p:cNvPr id="31" name="TextBox 30"/>
+          <p:cNvSpPr txBox="1"/>
+          <p:nvPr/>
+        </p:nvSpPr>
+        <p:spPr>
+          <a:xfrm>
+            <a:off x="886968" y="5623559"/>
+            <a:ext cx="5596128" cy="228600"/>
+          </a:xfrm>
+          <a:prstGeom prst="rect">
+            <a:avLst/>
+          </a:prstGeom>
+          <a:noFill/>
+        </p:spPr>
+        <p:txBody>
+          <a:bodyPr wrap="square" lIns="27432" rIns="27432" tIns="18288" bIns="18288">
+            <a:normAutofit/>
+          </a:bodyPr>
+          <a:lstStyle/>
+          <a:p>
+            <a:pPr>
+              <a:lnSpc>
+                <a:spcPct val="100000"/>
+              </a:lnSpc>
+              <a:defRPr sz="720" b="1">
+                <a:solidFill>
+                  <a:srgbClr val="5E5B54"/>
+                </a:solidFill>
+                <a:latin typeface="Aptos"/>
+              </a:defRPr>
+            </a:pPr>
+            <a:r>
+              <a:t>WHAT CHANGED</a:t>
+            </a:r>
+          </a:p>
+        </p:txBody>
+      </p:sp>
+      <p:sp>
+        <p:nvSpPr>
+          <p:cNvPr id="32" name="TextBox 31"/>
+          <p:cNvSpPr txBox="1"/>
+          <p:nvPr/>
+        </p:nvSpPr>
+        <p:spPr>
+          <a:xfrm>
+            <a:off x="886968" y="5888736"/>
+            <a:ext cx="5596128" cy="-91440"/>
+          </a:xfrm>
+          <a:prstGeom prst="rect">
+            <a:avLst/>
+          </a:prstGeom>
+          <a:noFill/>
+        </p:spPr>
+        <p:txBody>
+          <a:bodyPr wrap="square" lIns="27432" rIns="27432" tIns="18288" bIns="18288">
+            <a:normAutofit/>
+          </a:bodyPr>
+          <a:lstStyle/>
+          <a:p>
+            <a:pPr>
+              <a:lnSpc>
+                <a:spcPct val="95000"/>
+              </a:lnSpc>
+              <a:defRPr sz="780" b="0">
+                <a:solidFill>
+                  <a:srgbClr val="121217"/>
+                </a:solidFill>
+                <a:latin typeface="Aptos"/>
+              </a:defRPr>
+            </a:pPr>
+            <a:r>
+              <a:t>New AI Gateway links, policy updates, better glossary and domain support, external lineage, file support and wider governance links.</a:t>
+            </a:r>
+          </a:p>
+        </p:txBody>
+      </p:sp>
+      <p:sp>
+        <p:nvSpPr>
+          <p:cNvPr id="33" name="Rounded Rectangle 32"/>
           <p:cNvSpPr/>
           <p:nvPr/>
         </p:nvSpPr>
@@ -4270,7 +4438,7 @@
       </p:sp>
       <p:sp>
         <p:nvSpPr>
-          <p:cNvPr id="30" name="TextBox 29"/>
+          <p:cNvPr id="34" name="TextBox 33"/>
           <p:cNvSpPr txBox="1"/>
           <p:nvPr/>
         </p:nvSpPr>
@@ -4309,14 +4477,14 @@
       </p:sp>
       <p:sp>
         <p:nvSpPr>
-          <p:cNvPr id="31" name="TextBox 30"/>
+          <p:cNvPr id="35" name="TextBox 34"/>
           <p:cNvSpPr txBox="1"/>
           <p:nvPr/>
         </p:nvSpPr>
         <p:spPr>
           <a:xfrm>
             <a:off x="7187184" y="4151376"/>
-            <a:ext cx="4041648" cy="1078992"/>
+            <a:ext cx="4041648" cy="1024128"/>
           </a:xfrm>
           <a:prstGeom prst="rect">
             <a:avLst/>
@@ -4333,7 +4501,7 @@
               <a:lnSpc>
                 <a:spcPct val="95000"/>
               </a:lnSpc>
-              <a:defRPr sz="1230" b="1">
+              <a:defRPr sz="1160" b="1">
                 <a:solidFill>
                   <a:srgbClr val="FFFFFF"/>
                 </a:solidFill>
@@ -4348,14 +4516,14 @@
       </p:sp>
       <p:sp>
         <p:nvSpPr>
-          <p:cNvPr id="32" name="TextBox 31"/>
-          <p:cNvSpPr txBox="1"/>
-          <p:nvPr/>
-        </p:nvSpPr>
-        <p:spPr>
-          <a:xfrm>
-            <a:off x="7187184" y="5303520"/>
-            <a:ext cx="4041648" cy="274320"/>
+          <p:cNvPr id="36" name="TextBox 35"/>
+          <p:cNvSpPr txBox="1"/>
+          <p:nvPr/>
+        </p:nvSpPr>
+        <p:spPr>
+          <a:xfrm>
+            <a:off x="7187184" y="5257800"/>
+            <a:ext cx="4041648" cy="320040"/>
           </a:xfrm>
           <a:prstGeom prst="rect">
             <a:avLst/>
@@ -4372,7 +4540,7 @@
               <a:lnSpc>
                 <a:spcPct val="100000"/>
               </a:lnSpc>
-              <a:defRPr sz="1050" b="1">
+              <a:defRPr sz="960" b="1">
                 <a:solidFill>
                   <a:srgbClr val="FFE2DB"/>
                 </a:solidFill>
@@ -4387,7 +4555,7 @@
       </p:sp>
       <p:sp>
         <p:nvSpPr>
-          <p:cNvPr id="33" name="TextBox 32"/>
+          <p:cNvPr id="37" name="TextBox 36"/>
           <p:cNvSpPr txBox="1"/>
           <p:nvPr/>
         </p:nvSpPr>
@@ -4897,7 +5065,7 @@
         <p:spPr>
           <a:xfrm>
             <a:off x="685800" y="1828800"/>
-            <a:ext cx="2880360" cy="932688"/>
+            <a:ext cx="2880360" cy="841248"/>
           </a:xfrm>
           <a:prstGeom prst="roundRect">
             <a:avLst/>
@@ -4942,7 +5110,7 @@
         <p:spPr>
           <a:xfrm>
             <a:off x="685800" y="1828800"/>
-            <a:ext cx="91440" cy="932688"/>
+            <a:ext cx="91440" cy="841248"/>
           </a:xfrm>
           <a:prstGeom prst="rect">
             <a:avLst/>
@@ -5026,7 +5194,7 @@
         <p:spPr>
           <a:xfrm>
             <a:off x="886968" y="2212848"/>
-            <a:ext cx="2551176" cy="457200"/>
+            <a:ext cx="2551176" cy="365760"/>
           </a:xfrm>
           <a:prstGeom prst="rect">
             <a:avLst/>
@@ -5043,7 +5211,7 @@
               <a:lnSpc>
                 <a:spcPct val="95000"/>
               </a:lnSpc>
-              <a:defRPr sz="1120" b="0">
+              <a:defRPr sz="1090" b="0">
                 <a:solidFill>
                   <a:srgbClr val="121217"/>
                 </a:solidFill>
@@ -5065,7 +5233,7 @@
         <p:spPr>
           <a:xfrm>
             <a:off x="3730752" y="1828800"/>
-            <a:ext cx="2880360" cy="932688"/>
+            <a:ext cx="2880360" cy="841248"/>
           </a:xfrm>
           <a:prstGeom prst="roundRect">
             <a:avLst/>
@@ -5110,7 +5278,7 @@
         <p:spPr>
           <a:xfrm>
             <a:off x="3730752" y="1828800"/>
-            <a:ext cx="91440" cy="932688"/>
+            <a:ext cx="91440" cy="841248"/>
           </a:xfrm>
           <a:prstGeom prst="rect">
             <a:avLst/>
@@ -5180,7 +5348,7 @@
               </a:defRPr>
             </a:pPr>
             <a:r>
-              <a:t>WHAT CHANGED</a:t>
+              <a:t>PROBLEM IT SOLVES</a:t>
             </a:r>
           </a:p>
         </p:txBody>
@@ -5194,7 +5362,7 @@
         <p:spPr>
           <a:xfrm>
             <a:off x="3931920" y="2212848"/>
-            <a:ext cx="2551176" cy="457200"/>
+            <a:ext cx="2551176" cy="365760"/>
           </a:xfrm>
           <a:prstGeom prst="rect">
             <a:avLst/>
@@ -5211,7 +5379,7 @@
               <a:lnSpc>
                 <a:spcPct val="95000"/>
               </a:lnSpc>
-              <a:defRPr sz="1070" b="0">
+              <a:defRPr sz="990" b="0">
                 <a:solidFill>
                   <a:srgbClr val="121217"/>
                 </a:solidFill>
@@ -5219,7 +5387,7 @@
               </a:defRPr>
             </a:pPr>
             <a:r>
-              <a:t>Background checks, issue investigation, cloned data testing and suggested fixes.</a:t>
+              <a:t>Production data and AI systems break in ways humans spot too late. It solves the “how do we detect, diagnose and fix platform issues before users feel them?” problem.</a:t>
             </a:r>
           </a:p>
         </p:txBody>
@@ -5232,8 +5400,8 @@
         </p:nvSpPr>
         <p:spPr>
           <a:xfrm>
-            <a:off x="685800" y="2944368"/>
-            <a:ext cx="5925312" cy="1572768"/>
+            <a:off x="685800" y="2834640"/>
+            <a:ext cx="5925312" cy="1353312"/>
           </a:xfrm>
           <a:prstGeom prst="roundRect">
             <a:avLst/>
@@ -5277,8 +5445,8 @@
         </p:nvSpPr>
         <p:spPr>
           <a:xfrm>
-            <a:off x="685800" y="2944368"/>
-            <a:ext cx="91440" cy="1572768"/>
+            <a:off x="685800" y="2834640"/>
+            <a:ext cx="91440" cy="1353312"/>
           </a:xfrm>
           <a:prstGeom prst="rect">
             <a:avLst/>
@@ -5322,7 +5490,7 @@
         </p:nvSpPr>
         <p:spPr>
           <a:xfrm>
-            <a:off x="886968" y="3063240"/>
+            <a:off x="886968" y="2953512"/>
             <a:ext cx="5596128" cy="228600"/>
           </a:xfrm>
           <a:prstGeom prst="rect">
@@ -5361,8 +5529,8 @@
         </p:nvSpPr>
         <p:spPr>
           <a:xfrm>
-            <a:off x="886968" y="3328416"/>
-            <a:ext cx="5596128" cy="1097280"/>
+            <a:off x="886968" y="3218688"/>
+            <a:ext cx="5596128" cy="877824"/>
           </a:xfrm>
           <a:prstGeom prst="rect">
             <a:avLst/>
@@ -5379,7 +5547,7 @@
               <a:lnSpc>
                 <a:spcPct val="95000"/>
               </a:lnSpc>
-              <a:defRPr sz="1090" b="0">
+              <a:defRPr sz="990" b="0">
                 <a:solidFill>
                   <a:srgbClr val="121217"/>
                 </a:solidFill>
@@ -5400,8 +5568,8 @@
         </p:nvSpPr>
         <p:spPr>
           <a:xfrm>
-            <a:off x="685800" y="4700016"/>
-            <a:ext cx="5925312" cy="1078992"/>
+            <a:off x="685800" y="4352544"/>
+            <a:ext cx="5925312" cy="987552"/>
           </a:xfrm>
           <a:prstGeom prst="roundRect">
             <a:avLst/>
@@ -5445,8 +5613,8 @@
         </p:nvSpPr>
         <p:spPr>
           <a:xfrm>
-            <a:off x="685800" y="4700016"/>
-            <a:ext cx="91440" cy="1078992"/>
+            <a:off x="685800" y="4352544"/>
+            <a:ext cx="91440" cy="987552"/>
           </a:xfrm>
           <a:prstGeom prst="rect">
             <a:avLst/>
@@ -5490,7 +5658,7 @@
         </p:nvSpPr>
         <p:spPr>
           <a:xfrm>
-            <a:off x="886968" y="4818888"/>
+            <a:off x="886968" y="4471416"/>
             <a:ext cx="5596128" cy="228600"/>
           </a:xfrm>
           <a:prstGeom prst="rect">
@@ -5516,7 +5684,7 @@
               </a:defRPr>
             </a:pPr>
             <a:r>
-              <a:t>WHAT IT MEANS TO CUSTOMERS</a:t>
+              <a:t>CUSTOMER IMPACT EXAMPLE</a:t>
             </a:r>
           </a:p>
         </p:txBody>
@@ -5529,8 +5697,8 @@
         </p:nvSpPr>
         <p:spPr>
           <a:xfrm>
-            <a:off x="886968" y="5084064"/>
-            <a:ext cx="5596128" cy="603503"/>
+            <a:off x="886968" y="4736592"/>
+            <a:ext cx="5596128" cy="512064"/>
           </a:xfrm>
           <a:prstGeom prst="rect">
             <a:avLst/>
@@ -5547,7 +5715,7 @@
               <a:lnSpc>
                 <a:spcPct val="95000"/>
               </a:lnSpc>
-              <a:defRPr sz="1110" b="0">
+              <a:defRPr sz="1030" b="0">
                 <a:solidFill>
                   <a:srgbClr val="121217"/>
                 </a:solidFill>
@@ -5563,6 +5731,174 @@
       <p:sp>
         <p:nvSpPr>
           <p:cNvPr id="29" name="Rounded Rectangle 28"/>
+          <p:cNvSpPr/>
+          <p:nvPr/>
+        </p:nvSpPr>
+        <p:spPr>
+          <a:xfrm>
+            <a:off x="685800" y="5504688"/>
+            <a:ext cx="5925312" cy="384048"/>
+          </a:xfrm>
+          <a:prstGeom prst="roundRect">
+            <a:avLst/>
+          </a:prstGeom>
+          <a:solidFill>
+            <a:srgbClr val="FFFFFF"/>
+          </a:solidFill>
+          <a:ln w="10160">
+            <a:solidFill>
+              <a:srgbClr val="E2DDD2"/>
+            </a:solidFill>
+          </a:ln>
+        </p:spPr>
+        <p:style>
+          <a:lnRef idx="1">
+            <a:schemeClr val="accent1"/>
+          </a:lnRef>
+          <a:fillRef idx="3">
+            <a:schemeClr val="accent1"/>
+          </a:fillRef>
+          <a:effectRef idx="2">
+            <a:schemeClr val="accent1"/>
+          </a:effectRef>
+          <a:fontRef idx="minor">
+            <a:schemeClr val="lt1"/>
+          </a:fontRef>
+        </p:style>
+        <p:txBody>
+          <a:bodyPr rtlCol="0" anchor="ctr"/>
+          <a:lstStyle/>
+          <a:p>
+            <a:pPr algn="ctr"/>
+          </a:p>
+        </p:txBody>
+      </p:sp>
+      <p:sp>
+        <p:nvSpPr>
+          <p:cNvPr id="30" name="Rectangle 29"/>
+          <p:cNvSpPr/>
+          <p:nvPr/>
+        </p:nvSpPr>
+        <p:spPr>
+          <a:xfrm>
+            <a:off x="685800" y="5504688"/>
+            <a:ext cx="91440" cy="384048"/>
+          </a:xfrm>
+          <a:prstGeom prst="rect">
+            <a:avLst/>
+          </a:prstGeom>
+          <a:solidFill>
+            <a:srgbClr val="C9671E"/>
+          </a:solidFill>
+          <a:ln w="10160">
+            <a:solidFill>
+              <a:srgbClr val="C9671E"/>
+            </a:solidFill>
+          </a:ln>
+        </p:spPr>
+        <p:style>
+          <a:lnRef idx="1">
+            <a:schemeClr val="accent1"/>
+          </a:lnRef>
+          <a:fillRef idx="3">
+            <a:schemeClr val="accent1"/>
+          </a:fillRef>
+          <a:effectRef idx="2">
+            <a:schemeClr val="accent1"/>
+          </a:effectRef>
+          <a:fontRef idx="minor">
+            <a:schemeClr val="lt1"/>
+          </a:fontRef>
+        </p:style>
+        <p:txBody>
+          <a:bodyPr rtlCol="0" anchor="ctr"/>
+          <a:lstStyle/>
+          <a:p>
+            <a:pPr algn="ctr"/>
+          </a:p>
+        </p:txBody>
+      </p:sp>
+      <p:sp>
+        <p:nvSpPr>
+          <p:cNvPr id="31" name="TextBox 30"/>
+          <p:cNvSpPr txBox="1"/>
+          <p:nvPr/>
+        </p:nvSpPr>
+        <p:spPr>
+          <a:xfrm>
+            <a:off x="886968" y="5623559"/>
+            <a:ext cx="5596128" cy="228600"/>
+          </a:xfrm>
+          <a:prstGeom prst="rect">
+            <a:avLst/>
+          </a:prstGeom>
+          <a:noFill/>
+        </p:spPr>
+        <p:txBody>
+          <a:bodyPr wrap="square" lIns="27432" rIns="27432" tIns="18288" bIns="18288">
+            <a:normAutofit/>
+          </a:bodyPr>
+          <a:lstStyle/>
+          <a:p>
+            <a:pPr>
+              <a:lnSpc>
+                <a:spcPct val="100000"/>
+              </a:lnSpc>
+              <a:defRPr sz="720" b="1">
+                <a:solidFill>
+                  <a:srgbClr val="5E5B54"/>
+                </a:solidFill>
+                <a:latin typeface="Aptos"/>
+              </a:defRPr>
+            </a:pPr>
+            <a:r>
+              <a:t>WHAT CHANGED</a:t>
+            </a:r>
+          </a:p>
+        </p:txBody>
+      </p:sp>
+      <p:sp>
+        <p:nvSpPr>
+          <p:cNvPr id="32" name="TextBox 31"/>
+          <p:cNvSpPr txBox="1"/>
+          <p:nvPr/>
+        </p:nvSpPr>
+        <p:spPr>
+          <a:xfrm>
+            <a:off x="886968" y="5888736"/>
+            <a:ext cx="5596128" cy="-91440"/>
+          </a:xfrm>
+          <a:prstGeom prst="rect">
+            <a:avLst/>
+          </a:prstGeom>
+          <a:noFill/>
+        </p:spPr>
+        <p:txBody>
+          <a:bodyPr wrap="square" lIns="27432" rIns="27432" tIns="18288" bIns="18288">
+            <a:normAutofit/>
+          </a:bodyPr>
+          <a:lstStyle/>
+          <a:p>
+            <a:pPr>
+              <a:lnSpc>
+                <a:spcPct val="95000"/>
+              </a:lnSpc>
+              <a:defRPr sz="780" b="0">
+                <a:solidFill>
+                  <a:srgbClr val="121217"/>
+                </a:solidFill>
+                <a:latin typeface="Aptos"/>
+              </a:defRPr>
+            </a:pPr>
+            <a:r>
+              <a:t>Background checks, issue investigation, cloned data testing and suggested fixes.</a:t>
+            </a:r>
+          </a:p>
+        </p:txBody>
+      </p:sp>
+      <p:sp>
+        <p:nvSpPr>
+          <p:cNvPr id="33" name="Rounded Rectangle 32"/>
           <p:cNvSpPr/>
           <p:nvPr/>
         </p:nvSpPr>
@@ -5607,7 +5943,7 @@
       </p:sp>
       <p:sp>
         <p:nvSpPr>
-          <p:cNvPr id="30" name="TextBox 29"/>
+          <p:cNvPr id="34" name="TextBox 33"/>
           <p:cNvSpPr txBox="1"/>
           <p:nvPr/>
         </p:nvSpPr>
@@ -5646,14 +5982,14 @@
       </p:sp>
       <p:sp>
         <p:nvSpPr>
-          <p:cNvPr id="31" name="TextBox 30"/>
+          <p:cNvPr id="35" name="TextBox 34"/>
           <p:cNvSpPr txBox="1"/>
           <p:nvPr/>
         </p:nvSpPr>
         <p:spPr>
           <a:xfrm>
             <a:off x="7187184" y="4151376"/>
-            <a:ext cx="4041648" cy="1078992"/>
+            <a:ext cx="4041648" cy="1024128"/>
           </a:xfrm>
           <a:prstGeom prst="rect">
             <a:avLst/>
@@ -5670,7 +6006,7 @@
               <a:lnSpc>
                 <a:spcPct val="95000"/>
               </a:lnSpc>
-              <a:defRPr sz="1230" b="1">
+              <a:defRPr sz="1160" b="1">
                 <a:solidFill>
                   <a:srgbClr val="FFFFFF"/>
                 </a:solidFill>
@@ -5685,14 +6021,14 @@
       </p:sp>
       <p:sp>
         <p:nvSpPr>
-          <p:cNvPr id="32" name="TextBox 31"/>
-          <p:cNvSpPr txBox="1"/>
-          <p:nvPr/>
-        </p:nvSpPr>
-        <p:spPr>
-          <a:xfrm>
-            <a:off x="7187184" y="5303520"/>
-            <a:ext cx="4041648" cy="274320"/>
+          <p:cNvPr id="36" name="TextBox 35"/>
+          <p:cNvSpPr txBox="1"/>
+          <p:nvPr/>
+        </p:nvSpPr>
+        <p:spPr>
+          <a:xfrm>
+            <a:off x="7187184" y="5257800"/>
+            <a:ext cx="4041648" cy="320040"/>
           </a:xfrm>
           <a:prstGeom prst="rect">
             <a:avLst/>
@@ -5709,7 +6045,7 @@
               <a:lnSpc>
                 <a:spcPct val="100000"/>
               </a:lnSpc>
-              <a:defRPr sz="1050" b="1">
+              <a:defRPr sz="960" b="1">
                 <a:solidFill>
                   <a:srgbClr val="FFE2DB"/>
                 </a:solidFill>
@@ -5724,7 +6060,7 @@
       </p:sp>
       <p:sp>
         <p:nvSpPr>
-          <p:cNvPr id="33" name="TextBox 32"/>
+          <p:cNvPr id="37" name="TextBox 36"/>
           <p:cNvSpPr txBox="1"/>
           <p:nvPr/>
         </p:nvSpPr>
@@ -6234,7 +6570,7 @@
         <p:spPr>
           <a:xfrm>
             <a:off x="685800" y="1828800"/>
-            <a:ext cx="2880360" cy="932688"/>
+            <a:ext cx="2880360" cy="841248"/>
           </a:xfrm>
           <a:prstGeom prst="roundRect">
             <a:avLst/>
@@ -6279,7 +6615,7 @@
         <p:spPr>
           <a:xfrm>
             <a:off x="685800" y="1828800"/>
-            <a:ext cx="91440" cy="932688"/>
+            <a:ext cx="91440" cy="841248"/>
           </a:xfrm>
           <a:prstGeom prst="rect">
             <a:avLst/>
@@ -6363,7 +6699,7 @@
         <p:spPr>
           <a:xfrm>
             <a:off x="886968" y="2212848"/>
-            <a:ext cx="2551176" cy="457200"/>
+            <a:ext cx="2551176" cy="365760"/>
           </a:xfrm>
           <a:prstGeom prst="rect">
             <a:avLst/>
@@ -6380,7 +6716,7 @@
               <a:lnSpc>
                 <a:spcPct val="95000"/>
               </a:lnSpc>
-              <a:defRPr sz="1120" b="0">
+              <a:defRPr sz="1090" b="0">
                 <a:solidFill>
                   <a:srgbClr val="121217"/>
                 </a:solidFill>
@@ -6402,7 +6738,7 @@
         <p:spPr>
           <a:xfrm>
             <a:off x="3730752" y="1828800"/>
-            <a:ext cx="2880360" cy="932688"/>
+            <a:ext cx="2880360" cy="841248"/>
           </a:xfrm>
           <a:prstGeom prst="roundRect">
             <a:avLst/>
@@ -6447,7 +6783,7 @@
         <p:spPr>
           <a:xfrm>
             <a:off x="3730752" y="1828800"/>
-            <a:ext cx="91440" cy="932688"/>
+            <a:ext cx="91440" cy="841248"/>
           </a:xfrm>
           <a:prstGeom prst="rect">
             <a:avLst/>
@@ -6517,7 +6853,7 @@
               </a:defRPr>
             </a:pPr>
             <a:r>
-              <a:t>WHAT CHANGED</a:t>
+              <a:t>PROBLEM IT SOLVES</a:t>
             </a:r>
           </a:p>
         </p:txBody>
@@ -6531,7 +6867,7 @@
         <p:spPr>
           <a:xfrm>
             <a:off x="3931920" y="2212848"/>
-            <a:ext cx="2551176" cy="457200"/>
+            <a:ext cx="2551176" cy="365760"/>
           </a:xfrm>
           <a:prstGeom prst="rect">
             <a:avLst/>
@@ -6548,7 +6884,7 @@
               <a:lnSpc>
                 <a:spcPct val="95000"/>
               </a:lnSpc>
-              <a:defRPr sz="1070" b="0">
+              <a:defRPr sz="990" b="0">
                 <a:solidFill>
                   <a:srgbClr val="121217"/>
                 </a:solidFill>
@@ -6556,7 +6892,7 @@
               </a:defRPr>
             </a:pPr>
             <a:r>
-              <a:t>A full page workspace, MLflow context, endpoint checks, scheduled tasks and GPU runtime switching.</a:t>
+              <a:t>Data teams lose time on repetitive notebook, pipeline and ML code work. It solves the “how do engineers move faster inside the data platform without leaving governance behind?” problem.</a:t>
             </a:r>
           </a:p>
         </p:txBody>
@@ -6569,8 +6905,8 @@
         </p:nvSpPr>
         <p:spPr>
           <a:xfrm>
-            <a:off x="685800" y="2944368"/>
-            <a:ext cx="5925312" cy="1572768"/>
+            <a:off x="685800" y="2834640"/>
+            <a:ext cx="5925312" cy="1353312"/>
           </a:xfrm>
           <a:prstGeom prst="roundRect">
             <a:avLst/>
@@ -6614,8 +6950,8 @@
         </p:nvSpPr>
         <p:spPr>
           <a:xfrm>
-            <a:off x="685800" y="2944368"/>
-            <a:ext cx="91440" cy="1572768"/>
+            <a:off x="685800" y="2834640"/>
+            <a:ext cx="91440" cy="1353312"/>
           </a:xfrm>
           <a:prstGeom prst="rect">
             <a:avLst/>
@@ -6659,7 +6995,7 @@
         </p:nvSpPr>
         <p:spPr>
           <a:xfrm>
-            <a:off x="886968" y="3063240"/>
+            <a:off x="886968" y="2953512"/>
             <a:ext cx="5596128" cy="228600"/>
           </a:xfrm>
           <a:prstGeom prst="rect">
@@ -6698,8 +7034,8 @@
         </p:nvSpPr>
         <p:spPr>
           <a:xfrm>
-            <a:off x="886968" y="3328416"/>
-            <a:ext cx="5596128" cy="1097280"/>
+            <a:off x="886968" y="3218688"/>
+            <a:ext cx="5596128" cy="877824"/>
           </a:xfrm>
           <a:prstGeom prst="rect">
             <a:avLst/>
@@ -6716,7 +7052,7 @@
               <a:lnSpc>
                 <a:spcPct val="95000"/>
               </a:lnSpc>
-              <a:defRPr sz="1090" b="0">
+              <a:defRPr sz="990" b="0">
                 <a:solidFill>
                   <a:srgbClr val="121217"/>
                 </a:solidFill>
@@ -6737,8 +7073,8 @@
         </p:nvSpPr>
         <p:spPr>
           <a:xfrm>
-            <a:off x="685800" y="4700016"/>
-            <a:ext cx="5925312" cy="1078992"/>
+            <a:off x="685800" y="4352544"/>
+            <a:ext cx="5925312" cy="987552"/>
           </a:xfrm>
           <a:prstGeom prst="roundRect">
             <a:avLst/>
@@ -6782,8 +7118,8 @@
         </p:nvSpPr>
         <p:spPr>
           <a:xfrm>
-            <a:off x="685800" y="4700016"/>
-            <a:ext cx="91440" cy="1078992"/>
+            <a:off x="685800" y="4352544"/>
+            <a:ext cx="91440" cy="987552"/>
           </a:xfrm>
           <a:prstGeom prst="rect">
             <a:avLst/>
@@ -6827,7 +7163,7 @@
         </p:nvSpPr>
         <p:spPr>
           <a:xfrm>
-            <a:off x="886968" y="4818888"/>
+            <a:off x="886968" y="4471416"/>
             <a:ext cx="5596128" cy="228600"/>
           </a:xfrm>
           <a:prstGeom prst="rect">
@@ -6853,7 +7189,7 @@
               </a:defRPr>
             </a:pPr>
             <a:r>
-              <a:t>WHAT IT MEANS TO CUSTOMERS</a:t>
+              <a:t>CUSTOMER IMPACT EXAMPLE</a:t>
             </a:r>
           </a:p>
         </p:txBody>
@@ -6866,8 +7202,8 @@
         </p:nvSpPr>
         <p:spPr>
           <a:xfrm>
-            <a:off x="886968" y="5084064"/>
-            <a:ext cx="5596128" cy="603503"/>
+            <a:off x="886968" y="4736592"/>
+            <a:ext cx="5596128" cy="512064"/>
           </a:xfrm>
           <a:prstGeom prst="rect">
             <a:avLst/>
@@ -6884,7 +7220,7 @@
               <a:lnSpc>
                 <a:spcPct val="95000"/>
               </a:lnSpc>
-              <a:defRPr sz="1110" b="0">
+              <a:defRPr sz="1030" b="0">
                 <a:solidFill>
                   <a:srgbClr val="121217"/>
                 </a:solidFill>
@@ -6900,6 +7236,174 @@
       <p:sp>
         <p:nvSpPr>
           <p:cNvPr id="29" name="Rounded Rectangle 28"/>
+          <p:cNvSpPr/>
+          <p:nvPr/>
+        </p:nvSpPr>
+        <p:spPr>
+          <a:xfrm>
+            <a:off x="685800" y="5504688"/>
+            <a:ext cx="5925312" cy="384048"/>
+          </a:xfrm>
+          <a:prstGeom prst="roundRect">
+            <a:avLst/>
+          </a:prstGeom>
+          <a:solidFill>
+            <a:srgbClr val="FFFFFF"/>
+          </a:solidFill>
+          <a:ln w="10160">
+            <a:solidFill>
+              <a:srgbClr val="E2DDD2"/>
+            </a:solidFill>
+          </a:ln>
+        </p:spPr>
+        <p:style>
+          <a:lnRef idx="1">
+            <a:schemeClr val="accent1"/>
+          </a:lnRef>
+          <a:fillRef idx="3">
+            <a:schemeClr val="accent1"/>
+          </a:fillRef>
+          <a:effectRef idx="2">
+            <a:schemeClr val="accent1"/>
+          </a:effectRef>
+          <a:fontRef idx="minor">
+            <a:schemeClr val="lt1"/>
+          </a:fontRef>
+        </p:style>
+        <p:txBody>
+          <a:bodyPr rtlCol="0" anchor="ctr"/>
+          <a:lstStyle/>
+          <a:p>
+            <a:pPr algn="ctr"/>
+          </a:p>
+        </p:txBody>
+      </p:sp>
+      <p:sp>
+        <p:nvSpPr>
+          <p:cNvPr id="30" name="Rectangle 29"/>
+          <p:cNvSpPr/>
+          <p:nvPr/>
+        </p:nvSpPr>
+        <p:spPr>
+          <a:xfrm>
+            <a:off x="685800" y="5504688"/>
+            <a:ext cx="91440" cy="384048"/>
+          </a:xfrm>
+          <a:prstGeom prst="rect">
+            <a:avLst/>
+          </a:prstGeom>
+          <a:solidFill>
+            <a:srgbClr val="485473"/>
+          </a:solidFill>
+          <a:ln w="10160">
+            <a:solidFill>
+              <a:srgbClr val="485473"/>
+            </a:solidFill>
+          </a:ln>
+        </p:spPr>
+        <p:style>
+          <a:lnRef idx="1">
+            <a:schemeClr val="accent1"/>
+          </a:lnRef>
+          <a:fillRef idx="3">
+            <a:schemeClr val="accent1"/>
+          </a:fillRef>
+          <a:effectRef idx="2">
+            <a:schemeClr val="accent1"/>
+          </a:effectRef>
+          <a:fontRef idx="minor">
+            <a:schemeClr val="lt1"/>
+          </a:fontRef>
+        </p:style>
+        <p:txBody>
+          <a:bodyPr rtlCol="0" anchor="ctr"/>
+          <a:lstStyle/>
+          <a:p>
+            <a:pPr algn="ctr"/>
+          </a:p>
+        </p:txBody>
+      </p:sp>
+      <p:sp>
+        <p:nvSpPr>
+          <p:cNvPr id="31" name="TextBox 30"/>
+          <p:cNvSpPr txBox="1"/>
+          <p:nvPr/>
+        </p:nvSpPr>
+        <p:spPr>
+          <a:xfrm>
+            <a:off x="886968" y="5623559"/>
+            <a:ext cx="5596128" cy="228600"/>
+          </a:xfrm>
+          <a:prstGeom prst="rect">
+            <a:avLst/>
+          </a:prstGeom>
+          <a:noFill/>
+        </p:spPr>
+        <p:txBody>
+          <a:bodyPr wrap="square" lIns="27432" rIns="27432" tIns="18288" bIns="18288">
+            <a:normAutofit/>
+          </a:bodyPr>
+          <a:lstStyle/>
+          <a:p>
+            <a:pPr>
+              <a:lnSpc>
+                <a:spcPct val="100000"/>
+              </a:lnSpc>
+              <a:defRPr sz="720" b="1">
+                <a:solidFill>
+                  <a:srgbClr val="5E5B54"/>
+                </a:solidFill>
+                <a:latin typeface="Aptos"/>
+              </a:defRPr>
+            </a:pPr>
+            <a:r>
+              <a:t>WHAT CHANGED</a:t>
+            </a:r>
+          </a:p>
+        </p:txBody>
+      </p:sp>
+      <p:sp>
+        <p:nvSpPr>
+          <p:cNvPr id="32" name="TextBox 31"/>
+          <p:cNvSpPr txBox="1"/>
+          <p:nvPr/>
+        </p:nvSpPr>
+        <p:spPr>
+          <a:xfrm>
+            <a:off x="886968" y="5888736"/>
+            <a:ext cx="5596128" cy="-91440"/>
+          </a:xfrm>
+          <a:prstGeom prst="rect">
+            <a:avLst/>
+          </a:prstGeom>
+          <a:noFill/>
+        </p:spPr>
+        <p:txBody>
+          <a:bodyPr wrap="square" lIns="27432" rIns="27432" tIns="18288" bIns="18288">
+            <a:normAutofit/>
+          </a:bodyPr>
+          <a:lstStyle/>
+          <a:p>
+            <a:pPr>
+              <a:lnSpc>
+                <a:spcPct val="95000"/>
+              </a:lnSpc>
+              <a:defRPr sz="780" b="0">
+                <a:solidFill>
+                  <a:srgbClr val="121217"/>
+                </a:solidFill>
+                <a:latin typeface="Aptos"/>
+              </a:defRPr>
+            </a:pPr>
+            <a:r>
+              <a:t>A full page workspace, MLflow context, endpoint checks, scheduled tasks and GPU runtime switching.</a:t>
+            </a:r>
+          </a:p>
+        </p:txBody>
+      </p:sp>
+      <p:sp>
+        <p:nvSpPr>
+          <p:cNvPr id="33" name="Rounded Rectangle 32"/>
           <p:cNvSpPr/>
           <p:nvPr/>
         </p:nvSpPr>
@@ -6944,7 +7448,7 @@
       </p:sp>
       <p:sp>
         <p:nvSpPr>
-          <p:cNvPr id="30" name="TextBox 29"/>
+          <p:cNvPr id="34" name="TextBox 33"/>
           <p:cNvSpPr txBox="1"/>
           <p:nvPr/>
         </p:nvSpPr>
@@ -6983,14 +7487,14 @@
       </p:sp>
       <p:sp>
         <p:nvSpPr>
-          <p:cNvPr id="31" name="TextBox 30"/>
+          <p:cNvPr id="35" name="TextBox 34"/>
           <p:cNvSpPr txBox="1"/>
           <p:nvPr/>
         </p:nvSpPr>
         <p:spPr>
           <a:xfrm>
             <a:off x="7187184" y="4151376"/>
-            <a:ext cx="4041648" cy="1078992"/>
+            <a:ext cx="4041648" cy="1024128"/>
           </a:xfrm>
           <a:prstGeom prst="rect">
             <a:avLst/>
@@ -7007,7 +7511,7 @@
               <a:lnSpc>
                 <a:spcPct val="95000"/>
               </a:lnSpc>
-              <a:defRPr sz="1230" b="1">
+              <a:defRPr sz="1160" b="1">
                 <a:solidFill>
                   <a:srgbClr val="FFFFFF"/>
                 </a:solidFill>
@@ -7022,14 +7526,14 @@
       </p:sp>
       <p:sp>
         <p:nvSpPr>
-          <p:cNvPr id="32" name="TextBox 31"/>
-          <p:cNvSpPr txBox="1"/>
-          <p:nvPr/>
-        </p:nvSpPr>
-        <p:spPr>
-          <a:xfrm>
-            <a:off x="7187184" y="5303520"/>
-            <a:ext cx="4041648" cy="274320"/>
+          <p:cNvPr id="36" name="TextBox 35"/>
+          <p:cNvSpPr txBox="1"/>
+          <p:nvPr/>
+        </p:nvSpPr>
+        <p:spPr>
+          <a:xfrm>
+            <a:off x="7187184" y="5257800"/>
+            <a:ext cx="4041648" cy="320040"/>
           </a:xfrm>
           <a:prstGeom prst="rect">
             <a:avLst/>
@@ -7046,7 +7550,7 @@
               <a:lnSpc>
                 <a:spcPct val="100000"/>
               </a:lnSpc>
-              <a:defRPr sz="1050" b="1">
+              <a:defRPr sz="960" b="1">
                 <a:solidFill>
                   <a:srgbClr val="FFE2DB"/>
                 </a:solidFill>
@@ -7061,7 +7565,7 @@
       </p:sp>
       <p:sp>
         <p:nvSpPr>
-          <p:cNvPr id="33" name="TextBox 32"/>
+          <p:cNvPr id="37" name="TextBox 36"/>
           <p:cNvSpPr txBox="1"/>
           <p:nvPr/>
         </p:nvSpPr>
@@ -7571,7 +8075,7 @@
         <p:spPr>
           <a:xfrm>
             <a:off x="685800" y="1828800"/>
-            <a:ext cx="2880360" cy="932688"/>
+            <a:ext cx="2880360" cy="841248"/>
           </a:xfrm>
           <a:prstGeom prst="roundRect">
             <a:avLst/>
@@ -7616,7 +8120,7 @@
         <p:spPr>
           <a:xfrm>
             <a:off x="685800" y="1828800"/>
-            <a:ext cx="91440" cy="932688"/>
+            <a:ext cx="91440" cy="841248"/>
           </a:xfrm>
           <a:prstGeom prst="rect">
             <a:avLst/>
@@ -7700,7 +8204,7 @@
         <p:spPr>
           <a:xfrm>
             <a:off x="886968" y="2212848"/>
-            <a:ext cx="2551176" cy="457200"/>
+            <a:ext cx="2551176" cy="365760"/>
           </a:xfrm>
           <a:prstGeom prst="rect">
             <a:avLst/>
@@ -7717,7 +8221,7 @@
               <a:lnSpc>
                 <a:spcPct val="95000"/>
               </a:lnSpc>
-              <a:defRPr sz="1120" b="0">
+              <a:defRPr sz="1090" b="0">
                 <a:solidFill>
                   <a:srgbClr val="121217"/>
                 </a:solidFill>
@@ -7739,7 +8243,7 @@
         <p:spPr>
           <a:xfrm>
             <a:off x="3730752" y="1828800"/>
-            <a:ext cx="2880360" cy="932688"/>
+            <a:ext cx="2880360" cy="841248"/>
           </a:xfrm>
           <a:prstGeom prst="roundRect">
             <a:avLst/>
@@ -7784,7 +8288,7 @@
         <p:spPr>
           <a:xfrm>
             <a:off x="3730752" y="1828800"/>
-            <a:ext cx="91440" cy="932688"/>
+            <a:ext cx="91440" cy="841248"/>
           </a:xfrm>
           <a:prstGeom prst="rect">
             <a:avLst/>
@@ -7854,7 +8358,7 @@
               </a:defRPr>
             </a:pPr>
             <a:r>
-              <a:t>WHAT CHANGED</a:t>
+              <a:t>PROBLEM IT SOLVES</a:t>
             </a:r>
           </a:p>
         </p:txBody>
@@ -7868,7 +8372,7 @@
         <p:spPr>
           <a:xfrm>
             <a:off x="3931920" y="2212848"/>
-            <a:ext cx="2551176" cy="457200"/>
+            <a:ext cx="2551176" cy="365760"/>
           </a:xfrm>
           <a:prstGeom prst="rect">
             <a:avLst/>
@@ -7885,7 +8389,7 @@
               <a:lnSpc>
                 <a:spcPct val="95000"/>
               </a:lnSpc>
-              <a:defRPr sz="1070" b="0">
+              <a:defRPr sz="990" b="0">
                 <a:solidFill>
                   <a:srgbClr val="121217"/>
                 </a:solidFill>
@@ -7893,7 +8397,7 @@
               </a:defRPr>
             </a:pPr>
             <a:r>
-              <a:t>Genie Code for ML work, Genie ZeroOps for ML, online feature serving on Lakebase and model serving updates.</a:t>
+              <a:t>ML teams struggle with the handoff from experiment to production monitoring. It solves the “how do we operationalise models and keep them healthy?” problem.</a:t>
             </a:r>
           </a:p>
         </p:txBody>
@@ -7906,8 +8410,8 @@
         </p:nvSpPr>
         <p:spPr>
           <a:xfrm>
-            <a:off x="685800" y="2944368"/>
-            <a:ext cx="5925312" cy="1572768"/>
+            <a:off x="685800" y="2834640"/>
+            <a:ext cx="5925312" cy="1353312"/>
           </a:xfrm>
           <a:prstGeom prst="roundRect">
             <a:avLst/>
@@ -7951,8 +8455,8 @@
         </p:nvSpPr>
         <p:spPr>
           <a:xfrm>
-            <a:off x="685800" y="2944368"/>
-            <a:ext cx="91440" cy="1572768"/>
+            <a:off x="685800" y="2834640"/>
+            <a:ext cx="91440" cy="1353312"/>
           </a:xfrm>
           <a:prstGeom prst="rect">
             <a:avLst/>
@@ -7996,7 +8500,7 @@
         </p:nvSpPr>
         <p:spPr>
           <a:xfrm>
-            <a:off x="886968" y="3063240"/>
+            <a:off x="886968" y="2953512"/>
             <a:ext cx="5596128" cy="228600"/>
           </a:xfrm>
           <a:prstGeom prst="rect">
@@ -8035,8 +8539,8 @@
         </p:nvSpPr>
         <p:spPr>
           <a:xfrm>
-            <a:off x="886968" y="3328416"/>
-            <a:ext cx="5596128" cy="1097280"/>
+            <a:off x="886968" y="3218688"/>
+            <a:ext cx="5596128" cy="877824"/>
           </a:xfrm>
           <a:prstGeom prst="rect">
             <a:avLst/>
@@ -8053,7 +8557,7 @@
               <a:lnSpc>
                 <a:spcPct val="95000"/>
               </a:lnSpc>
-              <a:defRPr sz="1090" b="0">
+              <a:defRPr sz="990" b="0">
                 <a:solidFill>
                   <a:srgbClr val="121217"/>
                 </a:solidFill>
@@ -8074,8 +8578,8 @@
         </p:nvSpPr>
         <p:spPr>
           <a:xfrm>
-            <a:off x="685800" y="4700016"/>
-            <a:ext cx="5925312" cy="1078992"/>
+            <a:off x="685800" y="4352544"/>
+            <a:ext cx="5925312" cy="987552"/>
           </a:xfrm>
           <a:prstGeom prst="roundRect">
             <a:avLst/>
@@ -8119,8 +8623,8 @@
         </p:nvSpPr>
         <p:spPr>
           <a:xfrm>
-            <a:off x="685800" y="4700016"/>
-            <a:ext cx="91440" cy="1078992"/>
+            <a:off x="685800" y="4352544"/>
+            <a:ext cx="91440" cy="987552"/>
           </a:xfrm>
           <a:prstGeom prst="rect">
             <a:avLst/>
@@ -8164,7 +8668,7 @@
         </p:nvSpPr>
         <p:spPr>
           <a:xfrm>
-            <a:off x="886968" y="4818888"/>
+            <a:off x="886968" y="4471416"/>
             <a:ext cx="5596128" cy="228600"/>
           </a:xfrm>
           <a:prstGeom prst="rect">
@@ -8190,7 +8694,7 @@
               </a:defRPr>
             </a:pPr>
             <a:r>
-              <a:t>WHAT IT MEANS TO CUSTOMERS</a:t>
+              <a:t>CUSTOMER IMPACT EXAMPLE</a:t>
             </a:r>
           </a:p>
         </p:txBody>
@@ -8203,8 +8707,8 @@
         </p:nvSpPr>
         <p:spPr>
           <a:xfrm>
-            <a:off x="886968" y="5084064"/>
-            <a:ext cx="5596128" cy="603503"/>
+            <a:off x="886968" y="4736592"/>
+            <a:ext cx="5596128" cy="512064"/>
           </a:xfrm>
           <a:prstGeom prst="rect">
             <a:avLst/>
@@ -8221,7 +8725,7 @@
               <a:lnSpc>
                 <a:spcPct val="95000"/>
               </a:lnSpc>
-              <a:defRPr sz="1110" b="0">
+              <a:defRPr sz="1030" b="0">
                 <a:solidFill>
                   <a:srgbClr val="121217"/>
                 </a:solidFill>
@@ -8237,6 +8741,174 @@
       <p:sp>
         <p:nvSpPr>
           <p:cNvPr id="29" name="Rounded Rectangle 28"/>
+          <p:cNvSpPr/>
+          <p:nvPr/>
+        </p:nvSpPr>
+        <p:spPr>
+          <a:xfrm>
+            <a:off x="685800" y="5504688"/>
+            <a:ext cx="5925312" cy="384048"/>
+          </a:xfrm>
+          <a:prstGeom prst="roundRect">
+            <a:avLst/>
+          </a:prstGeom>
+          <a:solidFill>
+            <a:srgbClr val="FFFFFF"/>
+          </a:solidFill>
+          <a:ln w="10160">
+            <a:solidFill>
+              <a:srgbClr val="E2DDD2"/>
+            </a:solidFill>
+          </a:ln>
+        </p:spPr>
+        <p:style>
+          <a:lnRef idx="1">
+            <a:schemeClr val="accent1"/>
+          </a:lnRef>
+          <a:fillRef idx="3">
+            <a:schemeClr val="accent1"/>
+          </a:fillRef>
+          <a:effectRef idx="2">
+            <a:schemeClr val="accent1"/>
+          </a:effectRef>
+          <a:fontRef idx="minor">
+            <a:schemeClr val="lt1"/>
+          </a:fontRef>
+        </p:style>
+        <p:txBody>
+          <a:bodyPr rtlCol="0" anchor="ctr"/>
+          <a:lstStyle/>
+          <a:p>
+            <a:pPr algn="ctr"/>
+          </a:p>
+        </p:txBody>
+      </p:sp>
+      <p:sp>
+        <p:nvSpPr>
+          <p:cNvPr id="30" name="Rectangle 29"/>
+          <p:cNvSpPr/>
+          <p:nvPr/>
+        </p:nvSpPr>
+        <p:spPr>
+          <a:xfrm>
+            <a:off x="685800" y="5504688"/>
+            <a:ext cx="91440" cy="384048"/>
+          </a:xfrm>
+          <a:prstGeom prst="rect">
+            <a:avLst/>
+          </a:prstGeom>
+          <a:solidFill>
+            <a:srgbClr val="485473"/>
+          </a:solidFill>
+          <a:ln w="10160">
+            <a:solidFill>
+              <a:srgbClr val="485473"/>
+            </a:solidFill>
+          </a:ln>
+        </p:spPr>
+        <p:style>
+          <a:lnRef idx="1">
+            <a:schemeClr val="accent1"/>
+          </a:lnRef>
+          <a:fillRef idx="3">
+            <a:schemeClr val="accent1"/>
+          </a:fillRef>
+          <a:effectRef idx="2">
+            <a:schemeClr val="accent1"/>
+          </a:effectRef>
+          <a:fontRef idx="minor">
+            <a:schemeClr val="lt1"/>
+          </a:fontRef>
+        </p:style>
+        <p:txBody>
+          <a:bodyPr rtlCol="0" anchor="ctr"/>
+          <a:lstStyle/>
+          <a:p>
+            <a:pPr algn="ctr"/>
+          </a:p>
+        </p:txBody>
+      </p:sp>
+      <p:sp>
+        <p:nvSpPr>
+          <p:cNvPr id="31" name="TextBox 30"/>
+          <p:cNvSpPr txBox="1"/>
+          <p:nvPr/>
+        </p:nvSpPr>
+        <p:spPr>
+          <a:xfrm>
+            <a:off x="886968" y="5623559"/>
+            <a:ext cx="5596128" cy="228600"/>
+          </a:xfrm>
+          <a:prstGeom prst="rect">
+            <a:avLst/>
+          </a:prstGeom>
+          <a:noFill/>
+        </p:spPr>
+        <p:txBody>
+          <a:bodyPr wrap="square" lIns="27432" rIns="27432" tIns="18288" bIns="18288">
+            <a:normAutofit/>
+          </a:bodyPr>
+          <a:lstStyle/>
+          <a:p>
+            <a:pPr>
+              <a:lnSpc>
+                <a:spcPct val="100000"/>
+              </a:lnSpc>
+              <a:defRPr sz="720" b="1">
+                <a:solidFill>
+                  <a:srgbClr val="5E5B54"/>
+                </a:solidFill>
+                <a:latin typeface="Aptos"/>
+              </a:defRPr>
+            </a:pPr>
+            <a:r>
+              <a:t>WHAT CHANGED</a:t>
+            </a:r>
+          </a:p>
+        </p:txBody>
+      </p:sp>
+      <p:sp>
+        <p:nvSpPr>
+          <p:cNvPr id="32" name="TextBox 31"/>
+          <p:cNvSpPr txBox="1"/>
+          <p:nvPr/>
+        </p:nvSpPr>
+        <p:spPr>
+          <a:xfrm>
+            <a:off x="886968" y="5888736"/>
+            <a:ext cx="5596128" cy="-91440"/>
+          </a:xfrm>
+          <a:prstGeom prst="rect">
+            <a:avLst/>
+          </a:prstGeom>
+          <a:noFill/>
+        </p:spPr>
+        <p:txBody>
+          <a:bodyPr wrap="square" lIns="27432" rIns="27432" tIns="18288" bIns="18288">
+            <a:normAutofit/>
+          </a:bodyPr>
+          <a:lstStyle/>
+          <a:p>
+            <a:pPr>
+              <a:lnSpc>
+                <a:spcPct val="95000"/>
+              </a:lnSpc>
+              <a:defRPr sz="780" b="0">
+                <a:solidFill>
+                  <a:srgbClr val="121217"/>
+                </a:solidFill>
+                <a:latin typeface="Aptos"/>
+              </a:defRPr>
+            </a:pPr>
+            <a:r>
+              <a:t>Genie Code for ML work, Genie ZeroOps for ML, online feature serving on Lakebase and model serving updates.</a:t>
+            </a:r>
+          </a:p>
+        </p:txBody>
+      </p:sp>
+      <p:sp>
+        <p:nvSpPr>
+          <p:cNvPr id="33" name="Rounded Rectangle 32"/>
           <p:cNvSpPr/>
           <p:nvPr/>
         </p:nvSpPr>
@@ -8281,7 +8953,7 @@
       </p:sp>
       <p:sp>
         <p:nvSpPr>
-          <p:cNvPr id="30" name="TextBox 29"/>
+          <p:cNvPr id="34" name="TextBox 33"/>
           <p:cNvSpPr txBox="1"/>
           <p:nvPr/>
         </p:nvSpPr>
@@ -8320,14 +8992,14 @@
       </p:sp>
       <p:sp>
         <p:nvSpPr>
-          <p:cNvPr id="31" name="TextBox 30"/>
+          <p:cNvPr id="35" name="TextBox 34"/>
           <p:cNvSpPr txBox="1"/>
           <p:nvPr/>
         </p:nvSpPr>
         <p:spPr>
           <a:xfrm>
             <a:off x="7187184" y="4151376"/>
-            <a:ext cx="4041648" cy="1078992"/>
+            <a:ext cx="4041648" cy="1024128"/>
           </a:xfrm>
           <a:prstGeom prst="rect">
             <a:avLst/>
@@ -8344,7 +9016,7 @@
               <a:lnSpc>
                 <a:spcPct val="95000"/>
               </a:lnSpc>
-              <a:defRPr sz="1230" b="1">
+              <a:defRPr sz="1160" b="1">
                 <a:solidFill>
                   <a:srgbClr val="FFFFFF"/>
                 </a:solidFill>
@@ -8359,14 +9031,14 @@
       </p:sp>
       <p:sp>
         <p:nvSpPr>
-          <p:cNvPr id="32" name="TextBox 31"/>
-          <p:cNvSpPr txBox="1"/>
-          <p:nvPr/>
-        </p:nvSpPr>
-        <p:spPr>
-          <a:xfrm>
-            <a:off x="7187184" y="5303520"/>
-            <a:ext cx="4041648" cy="274320"/>
+          <p:cNvPr id="36" name="TextBox 35"/>
+          <p:cNvSpPr txBox="1"/>
+          <p:nvPr/>
+        </p:nvSpPr>
+        <p:spPr>
+          <a:xfrm>
+            <a:off x="7187184" y="5257800"/>
+            <a:ext cx="4041648" cy="320040"/>
           </a:xfrm>
           <a:prstGeom prst="rect">
             <a:avLst/>
@@ -8383,7 +9055,7 @@
               <a:lnSpc>
                 <a:spcPct val="100000"/>
               </a:lnSpc>
-              <a:defRPr sz="1050" b="1">
+              <a:defRPr sz="960" b="1">
                 <a:solidFill>
                   <a:srgbClr val="FFE2DB"/>
                 </a:solidFill>
@@ -8398,7 +9070,7 @@
       </p:sp>
       <p:sp>
         <p:nvSpPr>
-          <p:cNvPr id="33" name="TextBox 32"/>
+          <p:cNvPr id="37" name="TextBox 36"/>
           <p:cNvSpPr txBox="1"/>
           <p:nvPr/>
         </p:nvSpPr>
@@ -8908,7 +9580,7 @@
         <p:spPr>
           <a:xfrm>
             <a:off x="685800" y="1828800"/>
-            <a:ext cx="2880360" cy="932688"/>
+            <a:ext cx="2880360" cy="841248"/>
           </a:xfrm>
           <a:prstGeom prst="roundRect">
             <a:avLst/>
@@ -8953,7 +9625,7 @@
         <p:spPr>
           <a:xfrm>
             <a:off x="685800" y="1828800"/>
-            <a:ext cx="91440" cy="932688"/>
+            <a:ext cx="91440" cy="841248"/>
           </a:xfrm>
           <a:prstGeom prst="rect">
             <a:avLst/>
@@ -9037,7 +9709,7 @@
         <p:spPr>
           <a:xfrm>
             <a:off x="886968" y="2212848"/>
-            <a:ext cx="2551176" cy="457200"/>
+            <a:ext cx="2551176" cy="365760"/>
           </a:xfrm>
           <a:prstGeom prst="rect">
             <a:avLst/>
@@ -9054,7 +9726,7 @@
               <a:lnSpc>
                 <a:spcPct val="95000"/>
               </a:lnSpc>
-              <a:defRPr sz="1120" b="0">
+              <a:defRPr sz="1090" b="0">
                 <a:solidFill>
                   <a:srgbClr val="121217"/>
                 </a:solidFill>
@@ -9076,7 +9748,7 @@
         <p:spPr>
           <a:xfrm>
             <a:off x="3730752" y="1828800"/>
-            <a:ext cx="2880360" cy="932688"/>
+            <a:ext cx="2880360" cy="841248"/>
           </a:xfrm>
           <a:prstGeom prst="roundRect">
             <a:avLst/>
@@ -9121,7 +9793,7 @@
         <p:spPr>
           <a:xfrm>
             <a:off x="3730752" y="1828800"/>
-            <a:ext cx="91440" cy="932688"/>
+            <a:ext cx="91440" cy="841248"/>
           </a:xfrm>
           <a:prstGeom prst="rect">
             <a:avLst/>
@@ -9191,7 +9863,7 @@
               </a:defRPr>
             </a:pPr>
             <a:r>
-              <a:t>WHAT CHANGED</a:t>
+              <a:t>PROBLEM IT SOLVES</a:t>
             </a:r>
           </a:p>
         </p:txBody>
@@ -9205,7 +9877,7 @@
         <p:spPr>
           <a:xfrm>
             <a:off x="3931920" y="2212848"/>
-            <a:ext cx="2551176" cy="457200"/>
+            <a:ext cx="2551176" cy="365760"/>
           </a:xfrm>
           <a:prstGeom prst="rect">
             <a:avLst/>
@@ -9222,7 +9894,7 @@
               <a:lnSpc>
                 <a:spcPct val="95000"/>
               </a:lnSpc>
-              <a:defRPr sz="1070" b="0">
+              <a:defRPr sz="990" b="0">
                 <a:solidFill>
                   <a:srgbClr val="121217"/>
                 </a:solidFill>
@@ -9230,7 +9902,7 @@
               </a:defRPr>
             </a:pPr>
             <a:r>
-              <a:t>One click install, permission checks, serverless provisioning and app sandboxing.</a:t>
+              <a:t>Using specialist apps usually means copying sensitive data into another vendor environment. It solves the “how do we use third-party tools without exporting governed data everywhere?” problem.</a:t>
             </a:r>
           </a:p>
         </p:txBody>
@@ -9243,8 +9915,8 @@
         </p:nvSpPr>
         <p:spPr>
           <a:xfrm>
-            <a:off x="685800" y="2944368"/>
-            <a:ext cx="5925312" cy="1572768"/>
+            <a:off x="685800" y="2834640"/>
+            <a:ext cx="5925312" cy="1353312"/>
           </a:xfrm>
           <a:prstGeom prst="roundRect">
             <a:avLst/>
@@ -9288,8 +9960,8 @@
         </p:nvSpPr>
         <p:spPr>
           <a:xfrm>
-            <a:off x="685800" y="2944368"/>
-            <a:ext cx="91440" cy="1572768"/>
+            <a:off x="685800" y="2834640"/>
+            <a:ext cx="91440" cy="1353312"/>
           </a:xfrm>
           <a:prstGeom prst="rect">
             <a:avLst/>
@@ -9333,7 +10005,7 @@
         </p:nvSpPr>
         <p:spPr>
           <a:xfrm>
-            <a:off x="886968" y="3063240"/>
+            <a:off x="886968" y="2953512"/>
             <a:ext cx="5596128" cy="228600"/>
           </a:xfrm>
           <a:prstGeom prst="rect">
@@ -9372,8 +10044,8 @@
         </p:nvSpPr>
         <p:spPr>
           <a:xfrm>
-            <a:off x="886968" y="3328416"/>
-            <a:ext cx="5596128" cy="1097280"/>
+            <a:off x="886968" y="3218688"/>
+            <a:ext cx="5596128" cy="877824"/>
           </a:xfrm>
           <a:prstGeom prst="rect">
             <a:avLst/>
@@ -9390,7 +10062,7 @@
               <a:lnSpc>
                 <a:spcPct val="95000"/>
               </a:lnSpc>
-              <a:defRPr sz="1090" b="0">
+              <a:defRPr sz="990" b="0">
                 <a:solidFill>
                   <a:srgbClr val="121217"/>
                 </a:solidFill>
@@ -9411,8 +10083,8 @@
         </p:nvSpPr>
         <p:spPr>
           <a:xfrm>
-            <a:off x="685800" y="4700016"/>
-            <a:ext cx="5925312" cy="1078992"/>
+            <a:off x="685800" y="4352544"/>
+            <a:ext cx="5925312" cy="987552"/>
           </a:xfrm>
           <a:prstGeom prst="roundRect">
             <a:avLst/>
@@ -9456,8 +10128,8 @@
         </p:nvSpPr>
         <p:spPr>
           <a:xfrm>
-            <a:off x="685800" y="4700016"/>
-            <a:ext cx="91440" cy="1078992"/>
+            <a:off x="685800" y="4352544"/>
+            <a:ext cx="91440" cy="987552"/>
           </a:xfrm>
           <a:prstGeom prst="rect">
             <a:avLst/>
@@ -9501,7 +10173,7 @@
         </p:nvSpPr>
         <p:spPr>
           <a:xfrm>
-            <a:off x="886968" y="4818888"/>
+            <a:off x="886968" y="4471416"/>
             <a:ext cx="5596128" cy="228600"/>
           </a:xfrm>
           <a:prstGeom prst="rect">
@@ -9527,7 +10199,7 @@
               </a:defRPr>
             </a:pPr>
             <a:r>
-              <a:t>WHAT IT MEANS TO CUSTOMERS</a:t>
+              <a:t>CUSTOMER IMPACT EXAMPLE</a:t>
             </a:r>
           </a:p>
         </p:txBody>
@@ -9540,8 +10212,8 @@
         </p:nvSpPr>
         <p:spPr>
           <a:xfrm>
-            <a:off x="886968" y="5084064"/>
-            <a:ext cx="5596128" cy="603503"/>
+            <a:off x="886968" y="4736592"/>
+            <a:ext cx="5596128" cy="512064"/>
           </a:xfrm>
           <a:prstGeom prst="rect">
             <a:avLst/>
@@ -9558,7 +10230,7 @@
               <a:lnSpc>
                 <a:spcPct val="95000"/>
               </a:lnSpc>
-              <a:defRPr sz="1110" b="0">
+              <a:defRPr sz="1030" b="0">
                 <a:solidFill>
                   <a:srgbClr val="121217"/>
                 </a:solidFill>
@@ -9574,6 +10246,174 @@
       <p:sp>
         <p:nvSpPr>
           <p:cNvPr id="29" name="Rounded Rectangle 28"/>
+          <p:cNvSpPr/>
+          <p:nvPr/>
+        </p:nvSpPr>
+        <p:spPr>
+          <a:xfrm>
+            <a:off x="685800" y="5504688"/>
+            <a:ext cx="5925312" cy="384048"/>
+          </a:xfrm>
+          <a:prstGeom prst="roundRect">
+            <a:avLst/>
+          </a:prstGeom>
+          <a:solidFill>
+            <a:srgbClr val="FFFFFF"/>
+          </a:solidFill>
+          <a:ln w="10160">
+            <a:solidFill>
+              <a:srgbClr val="E2DDD2"/>
+            </a:solidFill>
+          </a:ln>
+        </p:spPr>
+        <p:style>
+          <a:lnRef idx="1">
+            <a:schemeClr val="accent1"/>
+          </a:lnRef>
+          <a:fillRef idx="3">
+            <a:schemeClr val="accent1"/>
+          </a:fillRef>
+          <a:effectRef idx="2">
+            <a:schemeClr val="accent1"/>
+          </a:effectRef>
+          <a:fontRef idx="minor">
+            <a:schemeClr val="lt1"/>
+          </a:fontRef>
+        </p:style>
+        <p:txBody>
+          <a:bodyPr rtlCol="0" anchor="ctr"/>
+          <a:lstStyle/>
+          <a:p>
+            <a:pPr algn="ctr"/>
+          </a:p>
+        </p:txBody>
+      </p:sp>
+      <p:sp>
+        <p:nvSpPr>
+          <p:cNvPr id="30" name="Rectangle 29"/>
+          <p:cNvSpPr/>
+          <p:nvPr/>
+        </p:nvSpPr>
+        <p:spPr>
+          <a:xfrm>
+            <a:off x="685800" y="5504688"/>
+            <a:ext cx="91440" cy="384048"/>
+          </a:xfrm>
+          <a:prstGeom prst="rect">
+            <a:avLst/>
+          </a:prstGeom>
+          <a:solidFill>
+            <a:srgbClr val="636F2C"/>
+          </a:solidFill>
+          <a:ln w="10160">
+            <a:solidFill>
+              <a:srgbClr val="636F2C"/>
+            </a:solidFill>
+          </a:ln>
+        </p:spPr>
+        <p:style>
+          <a:lnRef idx="1">
+            <a:schemeClr val="accent1"/>
+          </a:lnRef>
+          <a:fillRef idx="3">
+            <a:schemeClr val="accent1"/>
+          </a:fillRef>
+          <a:effectRef idx="2">
+            <a:schemeClr val="accent1"/>
+          </a:effectRef>
+          <a:fontRef idx="minor">
+            <a:schemeClr val="lt1"/>
+          </a:fontRef>
+        </p:style>
+        <p:txBody>
+          <a:bodyPr rtlCol="0" anchor="ctr"/>
+          <a:lstStyle/>
+          <a:p>
+            <a:pPr algn="ctr"/>
+          </a:p>
+        </p:txBody>
+      </p:sp>
+      <p:sp>
+        <p:nvSpPr>
+          <p:cNvPr id="31" name="TextBox 30"/>
+          <p:cNvSpPr txBox="1"/>
+          <p:nvPr/>
+        </p:nvSpPr>
+        <p:spPr>
+          <a:xfrm>
+            <a:off x="886968" y="5623559"/>
+            <a:ext cx="5596128" cy="228600"/>
+          </a:xfrm>
+          <a:prstGeom prst="rect">
+            <a:avLst/>
+          </a:prstGeom>
+          <a:noFill/>
+        </p:spPr>
+        <p:txBody>
+          <a:bodyPr wrap="square" lIns="27432" rIns="27432" tIns="18288" bIns="18288">
+            <a:normAutofit/>
+          </a:bodyPr>
+          <a:lstStyle/>
+          <a:p>
+            <a:pPr>
+              <a:lnSpc>
+                <a:spcPct val="100000"/>
+              </a:lnSpc>
+              <a:defRPr sz="720" b="1">
+                <a:solidFill>
+                  <a:srgbClr val="5E5B54"/>
+                </a:solidFill>
+                <a:latin typeface="Aptos"/>
+              </a:defRPr>
+            </a:pPr>
+            <a:r>
+              <a:t>WHAT CHANGED</a:t>
+            </a:r>
+          </a:p>
+        </p:txBody>
+      </p:sp>
+      <p:sp>
+        <p:nvSpPr>
+          <p:cNvPr id="32" name="TextBox 31"/>
+          <p:cNvSpPr txBox="1"/>
+          <p:nvPr/>
+        </p:nvSpPr>
+        <p:spPr>
+          <a:xfrm>
+            <a:off x="886968" y="5888736"/>
+            <a:ext cx="5596128" cy="-91440"/>
+          </a:xfrm>
+          <a:prstGeom prst="rect">
+            <a:avLst/>
+          </a:prstGeom>
+          <a:noFill/>
+        </p:spPr>
+        <p:txBody>
+          <a:bodyPr wrap="square" lIns="27432" rIns="27432" tIns="18288" bIns="18288">
+            <a:normAutofit/>
+          </a:bodyPr>
+          <a:lstStyle/>
+          <a:p>
+            <a:pPr>
+              <a:lnSpc>
+                <a:spcPct val="95000"/>
+              </a:lnSpc>
+              <a:defRPr sz="780" b="0">
+                <a:solidFill>
+                  <a:srgbClr val="121217"/>
+                </a:solidFill>
+                <a:latin typeface="Aptos"/>
+              </a:defRPr>
+            </a:pPr>
+            <a:r>
+              <a:t>One click install, permission checks, serverless provisioning and app sandboxing.</a:t>
+            </a:r>
+          </a:p>
+        </p:txBody>
+      </p:sp>
+      <p:sp>
+        <p:nvSpPr>
+          <p:cNvPr id="33" name="Rounded Rectangle 32"/>
           <p:cNvSpPr/>
           <p:nvPr/>
         </p:nvSpPr>
@@ -9618,7 +10458,7 @@
       </p:sp>
       <p:sp>
         <p:nvSpPr>
-          <p:cNvPr id="30" name="TextBox 29"/>
+          <p:cNvPr id="34" name="TextBox 33"/>
           <p:cNvSpPr txBox="1"/>
           <p:nvPr/>
         </p:nvSpPr>
@@ -9657,14 +10497,14 @@
       </p:sp>
       <p:sp>
         <p:nvSpPr>
-          <p:cNvPr id="31" name="TextBox 30"/>
+          <p:cNvPr id="35" name="TextBox 34"/>
           <p:cNvSpPr txBox="1"/>
           <p:nvPr/>
         </p:nvSpPr>
         <p:spPr>
           <a:xfrm>
             <a:off x="7187184" y="4151376"/>
-            <a:ext cx="4041648" cy="1078992"/>
+            <a:ext cx="4041648" cy="1024128"/>
           </a:xfrm>
           <a:prstGeom prst="rect">
             <a:avLst/>
@@ -9681,7 +10521,7 @@
               <a:lnSpc>
                 <a:spcPct val="95000"/>
               </a:lnSpc>
-              <a:defRPr sz="1230" b="1">
+              <a:defRPr sz="1160" b="1">
                 <a:solidFill>
                   <a:srgbClr val="FFFFFF"/>
                 </a:solidFill>
@@ -9696,14 +10536,14 @@
       </p:sp>
       <p:sp>
         <p:nvSpPr>
-          <p:cNvPr id="32" name="TextBox 31"/>
-          <p:cNvSpPr txBox="1"/>
-          <p:nvPr/>
-        </p:nvSpPr>
-        <p:spPr>
-          <a:xfrm>
-            <a:off x="7187184" y="5303520"/>
-            <a:ext cx="4041648" cy="274320"/>
+          <p:cNvPr id="36" name="TextBox 35"/>
+          <p:cNvSpPr txBox="1"/>
+          <p:nvPr/>
+        </p:nvSpPr>
+        <p:spPr>
+          <a:xfrm>
+            <a:off x="7187184" y="5257800"/>
+            <a:ext cx="4041648" cy="320040"/>
           </a:xfrm>
           <a:prstGeom prst="rect">
             <a:avLst/>
@@ -9720,7 +10560,7 @@
               <a:lnSpc>
                 <a:spcPct val="100000"/>
               </a:lnSpc>
-              <a:defRPr sz="1050" b="1">
+              <a:defRPr sz="960" b="1">
                 <a:solidFill>
                   <a:srgbClr val="FFE2DB"/>
                 </a:solidFill>
@@ -9735,7 +10575,7 @@
       </p:sp>
       <p:sp>
         <p:nvSpPr>
-          <p:cNvPr id="33" name="TextBox 32"/>
+          <p:cNvPr id="37" name="TextBox 36"/>
           <p:cNvSpPr txBox="1"/>
           <p:nvPr/>
         </p:nvSpPr>
@@ -10245,7 +11085,7 @@
         <p:spPr>
           <a:xfrm>
             <a:off x="685800" y="1828800"/>
-            <a:ext cx="2880360" cy="932688"/>
+            <a:ext cx="2880360" cy="841248"/>
           </a:xfrm>
           <a:prstGeom prst="roundRect">
             <a:avLst/>
@@ -10290,7 +11130,7 @@
         <p:spPr>
           <a:xfrm>
             <a:off x="685800" y="1828800"/>
-            <a:ext cx="91440" cy="932688"/>
+            <a:ext cx="91440" cy="841248"/>
           </a:xfrm>
           <a:prstGeom prst="rect">
             <a:avLst/>
@@ -10374,7 +11214,7 @@
         <p:spPr>
           <a:xfrm>
             <a:off x="886968" y="2212848"/>
-            <a:ext cx="2551176" cy="457200"/>
+            <a:ext cx="2551176" cy="365760"/>
           </a:xfrm>
           <a:prstGeom prst="rect">
             <a:avLst/>
@@ -10391,7 +11231,7 @@
               <a:lnSpc>
                 <a:spcPct val="95000"/>
               </a:lnSpc>
-              <a:defRPr sz="1120" b="0">
+              <a:defRPr sz="1090" b="0">
                 <a:solidFill>
                   <a:srgbClr val="121217"/>
                 </a:solidFill>
@@ -10413,7 +11253,7 @@
         <p:spPr>
           <a:xfrm>
             <a:off x="3730752" y="1828800"/>
-            <a:ext cx="2880360" cy="932688"/>
+            <a:ext cx="2880360" cy="841248"/>
           </a:xfrm>
           <a:prstGeom prst="roundRect">
             <a:avLst/>
@@ -10458,7 +11298,7 @@
         <p:spPr>
           <a:xfrm>
             <a:off x="3730752" y="1828800"/>
-            <a:ext cx="91440" cy="932688"/>
+            <a:ext cx="91440" cy="841248"/>
           </a:xfrm>
           <a:prstGeom prst="rect">
             <a:avLst/>
@@ -10528,7 +11368,7 @@
               </a:defRPr>
             </a:pPr>
             <a:r>
-              <a:t>WHAT CHANGED</a:t>
+              <a:t>PROBLEM IT SOLVES</a:t>
             </a:r>
           </a:p>
         </p:txBody>
@@ -10542,7 +11382,7 @@
         <p:spPr>
           <a:xfrm>
             <a:off x="3931920" y="2212848"/>
-            <a:ext cx="2551176" cy="457200"/>
+            <a:ext cx="2551176" cy="365760"/>
           </a:xfrm>
           <a:prstGeom prst="rect">
             <a:avLst/>
@@ -10559,7 +11399,7 @@
               <a:lnSpc>
                 <a:spcPct val="95000"/>
               </a:lnSpc>
-              <a:defRPr sz="1070" b="0">
+              <a:defRPr sz="990" b="0">
                 <a:solidFill>
                   <a:srgbClr val="121217"/>
                 </a:solidFill>
@@ -10567,7 +11407,7 @@
               </a:defRPr>
             </a:pPr>
             <a:r>
-              <a:t>App Spaces for governing groups of apps, Genie App Builder as the data-aware build agent, and a lightweight micro app runtime for cheaper scale-to-zero apps.</a:t>
+              <a:t>Small internal apps take too long or bypass IT when teams get desperate. It solves the “how do we build lightweight governed apps around business workflows?” problem.</a:t>
             </a:r>
           </a:p>
         </p:txBody>
@@ -10580,8 +11420,8 @@
         </p:nvSpPr>
         <p:spPr>
           <a:xfrm>
-            <a:off x="685800" y="2944368"/>
-            <a:ext cx="5925312" cy="1572768"/>
+            <a:off x="685800" y="2834640"/>
+            <a:ext cx="5925312" cy="1353312"/>
           </a:xfrm>
           <a:prstGeom prst="roundRect">
             <a:avLst/>
@@ -10625,8 +11465,8 @@
         </p:nvSpPr>
         <p:spPr>
           <a:xfrm>
-            <a:off x="685800" y="2944368"/>
-            <a:ext cx="91440" cy="1572768"/>
+            <a:off x="685800" y="2834640"/>
+            <a:ext cx="91440" cy="1353312"/>
           </a:xfrm>
           <a:prstGeom prst="rect">
             <a:avLst/>
@@ -10670,7 +11510,7 @@
         </p:nvSpPr>
         <p:spPr>
           <a:xfrm>
-            <a:off x="886968" y="3063240"/>
+            <a:off x="886968" y="2953512"/>
             <a:ext cx="5596128" cy="228600"/>
           </a:xfrm>
           <a:prstGeom prst="rect">
@@ -10709,8 +11549,8 @@
         </p:nvSpPr>
         <p:spPr>
           <a:xfrm>
-            <a:off x="886968" y="3328416"/>
-            <a:ext cx="5596128" cy="1097280"/>
+            <a:off x="886968" y="3218688"/>
+            <a:ext cx="5596128" cy="877824"/>
           </a:xfrm>
           <a:prstGeom prst="rect">
             <a:avLst/>
@@ -10727,7 +11567,7 @@
               <a:lnSpc>
                 <a:spcPct val="95000"/>
               </a:lnSpc>
-              <a:defRPr sz="1090" b="0">
+              <a:defRPr sz="990" b="0">
                 <a:solidFill>
                   <a:srgbClr val="121217"/>
                 </a:solidFill>
@@ -10748,8 +11588,8 @@
         </p:nvSpPr>
         <p:spPr>
           <a:xfrm>
-            <a:off x="685800" y="4700016"/>
-            <a:ext cx="5925312" cy="1078992"/>
+            <a:off x="685800" y="4352544"/>
+            <a:ext cx="5925312" cy="987552"/>
           </a:xfrm>
           <a:prstGeom prst="roundRect">
             <a:avLst/>
@@ -10793,8 +11633,8 @@
         </p:nvSpPr>
         <p:spPr>
           <a:xfrm>
-            <a:off x="685800" y="4700016"/>
-            <a:ext cx="91440" cy="1078992"/>
+            <a:off x="685800" y="4352544"/>
+            <a:ext cx="91440" cy="987552"/>
           </a:xfrm>
           <a:prstGeom prst="rect">
             <a:avLst/>
@@ -10838,7 +11678,7 @@
         </p:nvSpPr>
         <p:spPr>
           <a:xfrm>
-            <a:off x="886968" y="4818888"/>
+            <a:off x="886968" y="4471416"/>
             <a:ext cx="5596128" cy="228600"/>
           </a:xfrm>
           <a:prstGeom prst="rect">
@@ -10864,7 +11704,7 @@
               </a:defRPr>
             </a:pPr>
             <a:r>
-              <a:t>WHAT IT MEANS TO CUSTOMERS</a:t>
+              <a:t>CUSTOMER IMPACT EXAMPLE</a:t>
             </a:r>
           </a:p>
         </p:txBody>
@@ -10877,8 +11717,8 @@
         </p:nvSpPr>
         <p:spPr>
           <a:xfrm>
-            <a:off x="886968" y="5084064"/>
-            <a:ext cx="5596128" cy="603503"/>
+            <a:off x="886968" y="4736592"/>
+            <a:ext cx="5596128" cy="512064"/>
           </a:xfrm>
           <a:prstGeom prst="rect">
             <a:avLst/>
@@ -10895,7 +11735,7 @@
               <a:lnSpc>
                 <a:spcPct val="95000"/>
               </a:lnSpc>
-              <a:defRPr sz="1110" b="0">
+              <a:defRPr sz="1030" b="0">
                 <a:solidFill>
                   <a:srgbClr val="121217"/>
                 </a:solidFill>
@@ -10911,6 +11751,174 @@
       <p:sp>
         <p:nvSpPr>
           <p:cNvPr id="29" name="Rounded Rectangle 28"/>
+          <p:cNvSpPr/>
+          <p:nvPr/>
+        </p:nvSpPr>
+        <p:spPr>
+          <a:xfrm>
+            <a:off x="685800" y="5504688"/>
+            <a:ext cx="5925312" cy="384048"/>
+          </a:xfrm>
+          <a:prstGeom prst="roundRect">
+            <a:avLst/>
+          </a:prstGeom>
+          <a:solidFill>
+            <a:srgbClr val="FFFFFF"/>
+          </a:solidFill>
+          <a:ln w="10160">
+            <a:solidFill>
+              <a:srgbClr val="E2DDD2"/>
+            </a:solidFill>
+          </a:ln>
+        </p:spPr>
+        <p:style>
+          <a:lnRef idx="1">
+            <a:schemeClr val="accent1"/>
+          </a:lnRef>
+          <a:fillRef idx="3">
+            <a:schemeClr val="accent1"/>
+          </a:fillRef>
+          <a:effectRef idx="2">
+            <a:schemeClr val="accent1"/>
+          </a:effectRef>
+          <a:fontRef idx="minor">
+            <a:schemeClr val="lt1"/>
+          </a:fontRef>
+        </p:style>
+        <p:txBody>
+          <a:bodyPr rtlCol="0" anchor="ctr"/>
+          <a:lstStyle/>
+          <a:p>
+            <a:pPr algn="ctr"/>
+          </a:p>
+        </p:txBody>
+      </p:sp>
+      <p:sp>
+        <p:nvSpPr>
+          <p:cNvPr id="30" name="Rectangle 29"/>
+          <p:cNvSpPr/>
+          <p:nvPr/>
+        </p:nvSpPr>
+        <p:spPr>
+          <a:xfrm>
+            <a:off x="685800" y="5504688"/>
+            <a:ext cx="91440" cy="384048"/>
+          </a:xfrm>
+          <a:prstGeom prst="rect">
+            <a:avLst/>
+          </a:prstGeom>
+          <a:solidFill>
+            <a:srgbClr val="94492D"/>
+          </a:solidFill>
+          <a:ln w="10160">
+            <a:solidFill>
+              <a:srgbClr val="94492D"/>
+            </a:solidFill>
+          </a:ln>
+        </p:spPr>
+        <p:style>
+          <a:lnRef idx="1">
+            <a:schemeClr val="accent1"/>
+          </a:lnRef>
+          <a:fillRef idx="3">
+            <a:schemeClr val="accent1"/>
+          </a:fillRef>
+          <a:effectRef idx="2">
+            <a:schemeClr val="accent1"/>
+          </a:effectRef>
+          <a:fontRef idx="minor">
+            <a:schemeClr val="lt1"/>
+          </a:fontRef>
+        </p:style>
+        <p:txBody>
+          <a:bodyPr rtlCol="0" anchor="ctr"/>
+          <a:lstStyle/>
+          <a:p>
+            <a:pPr algn="ctr"/>
+          </a:p>
+        </p:txBody>
+      </p:sp>
+      <p:sp>
+        <p:nvSpPr>
+          <p:cNvPr id="31" name="TextBox 30"/>
+          <p:cNvSpPr txBox="1"/>
+          <p:nvPr/>
+        </p:nvSpPr>
+        <p:spPr>
+          <a:xfrm>
+            <a:off x="886968" y="5623559"/>
+            <a:ext cx="5596128" cy="228600"/>
+          </a:xfrm>
+          <a:prstGeom prst="rect">
+            <a:avLst/>
+          </a:prstGeom>
+          <a:noFill/>
+        </p:spPr>
+        <p:txBody>
+          <a:bodyPr wrap="square" lIns="27432" rIns="27432" tIns="18288" bIns="18288">
+            <a:normAutofit/>
+          </a:bodyPr>
+          <a:lstStyle/>
+          <a:p>
+            <a:pPr>
+              <a:lnSpc>
+                <a:spcPct val="100000"/>
+              </a:lnSpc>
+              <a:defRPr sz="720" b="1">
+                <a:solidFill>
+                  <a:srgbClr val="5E5B54"/>
+                </a:solidFill>
+                <a:latin typeface="Aptos"/>
+              </a:defRPr>
+            </a:pPr>
+            <a:r>
+              <a:t>WHAT CHANGED</a:t>
+            </a:r>
+          </a:p>
+        </p:txBody>
+      </p:sp>
+      <p:sp>
+        <p:nvSpPr>
+          <p:cNvPr id="32" name="TextBox 31"/>
+          <p:cNvSpPr txBox="1"/>
+          <p:nvPr/>
+        </p:nvSpPr>
+        <p:spPr>
+          <a:xfrm>
+            <a:off x="886968" y="5888736"/>
+            <a:ext cx="5596128" cy="-91440"/>
+          </a:xfrm>
+          <a:prstGeom prst="rect">
+            <a:avLst/>
+          </a:prstGeom>
+          <a:noFill/>
+        </p:spPr>
+        <p:txBody>
+          <a:bodyPr wrap="square" lIns="27432" rIns="27432" tIns="18288" bIns="18288">
+            <a:normAutofit/>
+          </a:bodyPr>
+          <a:lstStyle/>
+          <a:p>
+            <a:pPr>
+              <a:lnSpc>
+                <a:spcPct val="95000"/>
+              </a:lnSpc>
+              <a:defRPr sz="780" b="0">
+                <a:solidFill>
+                  <a:srgbClr val="121217"/>
+                </a:solidFill>
+                <a:latin typeface="Aptos"/>
+              </a:defRPr>
+            </a:pPr>
+            <a:r>
+              <a:t>App Spaces for governing groups of apps, Genie App Builder as the data-aware build agent, and a lightweight micro app runtime for cheaper scale-to-zero apps.</a:t>
+            </a:r>
+          </a:p>
+        </p:txBody>
+      </p:sp>
+      <p:sp>
+        <p:nvSpPr>
+          <p:cNvPr id="33" name="Rounded Rectangle 32"/>
           <p:cNvSpPr/>
           <p:nvPr/>
         </p:nvSpPr>
@@ -10955,7 +11963,7 @@
       </p:sp>
       <p:sp>
         <p:nvSpPr>
-          <p:cNvPr id="30" name="TextBox 29"/>
+          <p:cNvPr id="34" name="TextBox 33"/>
           <p:cNvSpPr txBox="1"/>
           <p:nvPr/>
         </p:nvSpPr>
@@ -10994,14 +12002,14 @@
       </p:sp>
       <p:sp>
         <p:nvSpPr>
-          <p:cNvPr id="31" name="TextBox 30"/>
+          <p:cNvPr id="35" name="TextBox 34"/>
           <p:cNvSpPr txBox="1"/>
           <p:nvPr/>
         </p:nvSpPr>
         <p:spPr>
           <a:xfrm>
             <a:off x="7187184" y="4151376"/>
-            <a:ext cx="4041648" cy="1078992"/>
+            <a:ext cx="4041648" cy="1024128"/>
           </a:xfrm>
           <a:prstGeom prst="rect">
             <a:avLst/>
@@ -11018,7 +12026,7 @@
               <a:lnSpc>
                 <a:spcPct val="95000"/>
               </a:lnSpc>
-              <a:defRPr sz="1230" b="1">
+              <a:defRPr sz="1160" b="1">
                 <a:solidFill>
                   <a:srgbClr val="FFFFFF"/>
                 </a:solidFill>
@@ -11033,14 +12041,14 @@
       </p:sp>
       <p:sp>
         <p:nvSpPr>
-          <p:cNvPr id="32" name="TextBox 31"/>
-          <p:cNvSpPr txBox="1"/>
-          <p:nvPr/>
-        </p:nvSpPr>
-        <p:spPr>
-          <a:xfrm>
-            <a:off x="7187184" y="5303520"/>
-            <a:ext cx="4041648" cy="274320"/>
+          <p:cNvPr id="36" name="TextBox 35"/>
+          <p:cNvSpPr txBox="1"/>
+          <p:nvPr/>
+        </p:nvSpPr>
+        <p:spPr>
+          <a:xfrm>
+            <a:off x="7187184" y="5257800"/>
+            <a:ext cx="4041648" cy="320040"/>
           </a:xfrm>
           <a:prstGeom prst="rect">
             <a:avLst/>
@@ -11057,7 +12065,7 @@
               <a:lnSpc>
                 <a:spcPct val="100000"/>
               </a:lnSpc>
-              <a:defRPr sz="1050" b="1">
+              <a:defRPr sz="960" b="1">
                 <a:solidFill>
                   <a:srgbClr val="FFE2DB"/>
                 </a:solidFill>
@@ -11072,7 +12080,7 @@
       </p:sp>
       <p:sp>
         <p:nvSpPr>
-          <p:cNvPr id="33" name="TextBox 32"/>
+          <p:cNvPr id="37" name="TextBox 36"/>
           <p:cNvSpPr txBox="1"/>
           <p:nvPr/>
         </p:nvSpPr>
@@ -11582,7 +12590,7 @@
         <p:spPr>
           <a:xfrm>
             <a:off x="685800" y="1828800"/>
-            <a:ext cx="2880360" cy="932688"/>
+            <a:ext cx="2880360" cy="841248"/>
           </a:xfrm>
           <a:prstGeom prst="roundRect">
             <a:avLst/>
@@ -11627,7 +12635,7 @@
         <p:spPr>
           <a:xfrm>
             <a:off x="685800" y="1828800"/>
-            <a:ext cx="91440" cy="932688"/>
+            <a:ext cx="91440" cy="841248"/>
           </a:xfrm>
           <a:prstGeom prst="rect">
             <a:avLst/>
@@ -11711,7 +12719,7 @@
         <p:spPr>
           <a:xfrm>
             <a:off x="886968" y="2212848"/>
-            <a:ext cx="2551176" cy="457200"/>
+            <a:ext cx="2551176" cy="365760"/>
           </a:xfrm>
           <a:prstGeom prst="rect">
             <a:avLst/>
@@ -11728,7 +12736,7 @@
               <a:lnSpc>
                 <a:spcPct val="95000"/>
               </a:lnSpc>
-              <a:defRPr sz="1120" b="0">
+              <a:defRPr sz="1090" b="0">
                 <a:solidFill>
                   <a:srgbClr val="121217"/>
                 </a:solidFill>
@@ -11750,7 +12758,7 @@
         <p:spPr>
           <a:xfrm>
             <a:off x="3730752" y="1828800"/>
-            <a:ext cx="2880360" cy="932688"/>
+            <a:ext cx="2880360" cy="841248"/>
           </a:xfrm>
           <a:prstGeom prst="roundRect">
             <a:avLst/>
@@ -11795,7 +12803,7 @@
         <p:spPr>
           <a:xfrm>
             <a:off x="3730752" y="1828800"/>
-            <a:ext cx="91440" cy="932688"/>
+            <a:ext cx="91440" cy="841248"/>
           </a:xfrm>
           <a:prstGeom prst="rect">
             <a:avLst/>
@@ -11865,7 +12873,7 @@
               </a:defRPr>
             </a:pPr>
             <a:r>
-              <a:t>WHAT CHANGED</a:t>
+              <a:t>PROBLEM IT SOLVES</a:t>
             </a:r>
           </a:p>
         </p:txBody>
@@ -11879,7 +12887,7 @@
         <p:spPr>
           <a:xfrm>
             <a:off x="3931920" y="2212848"/>
-            <a:ext cx="2551176" cy="457200"/>
+            <a:ext cx="2551176" cy="365760"/>
           </a:xfrm>
           <a:prstGeom prst="rect">
             <a:avLst/>
@@ -11896,7 +12904,7 @@
               <a:lnSpc>
                 <a:spcPct val="95000"/>
               </a:lnSpc>
-              <a:defRPr sz="1070" b="0">
+              <a:defRPr sz="990" b="0">
                 <a:solidFill>
                   <a:srgbClr val="121217"/>
                 </a:solidFill>
@@ -11904,7 +12912,7 @@
               </a:defRPr>
             </a:pPr>
             <a:r>
-              <a:t>CustomerLake, Golden Context, marketing agents and agentic CDP workflows inside Databricks.</a:t>
+              <a:t>Customer data is split across marketing, loyalty, service, ecommerce and consent systems. It solves the “how do we give AI a joined-up, permission-aware customer view?” problem.</a:t>
             </a:r>
           </a:p>
         </p:txBody>
@@ -11917,8 +12925,8 @@
         </p:nvSpPr>
         <p:spPr>
           <a:xfrm>
-            <a:off x="685800" y="2944368"/>
-            <a:ext cx="5925312" cy="1572768"/>
+            <a:off x="685800" y="2834640"/>
+            <a:ext cx="5925312" cy="1353312"/>
           </a:xfrm>
           <a:prstGeom prst="roundRect">
             <a:avLst/>
@@ -11962,8 +12970,8 @@
         </p:nvSpPr>
         <p:spPr>
           <a:xfrm>
-            <a:off x="685800" y="2944368"/>
-            <a:ext cx="91440" cy="1572768"/>
+            <a:off x="685800" y="2834640"/>
+            <a:ext cx="91440" cy="1353312"/>
           </a:xfrm>
           <a:prstGeom prst="rect">
             <a:avLst/>
@@ -12007,7 +13015,7 @@
         </p:nvSpPr>
         <p:spPr>
           <a:xfrm>
-            <a:off x="886968" y="3063240"/>
+            <a:off x="886968" y="2953512"/>
             <a:ext cx="5596128" cy="228600"/>
           </a:xfrm>
           <a:prstGeom prst="rect">
@@ -12046,8 +13054,8 @@
         </p:nvSpPr>
         <p:spPr>
           <a:xfrm>
-            <a:off x="886968" y="3328416"/>
-            <a:ext cx="5596128" cy="1097280"/>
+            <a:off x="886968" y="3218688"/>
+            <a:ext cx="5596128" cy="877824"/>
           </a:xfrm>
           <a:prstGeom prst="rect">
             <a:avLst/>
@@ -12064,7 +13072,7 @@
               <a:lnSpc>
                 <a:spcPct val="95000"/>
               </a:lnSpc>
-              <a:defRPr sz="1090" b="0">
+              <a:defRPr sz="990" b="0">
                 <a:solidFill>
                   <a:srgbClr val="121217"/>
                 </a:solidFill>
@@ -12085,8 +13093,8 @@
         </p:nvSpPr>
         <p:spPr>
           <a:xfrm>
-            <a:off x="685800" y="4700016"/>
-            <a:ext cx="5925312" cy="1078992"/>
+            <a:off x="685800" y="4352544"/>
+            <a:ext cx="5925312" cy="987552"/>
           </a:xfrm>
           <a:prstGeom prst="roundRect">
             <a:avLst/>
@@ -12130,8 +13138,8 @@
         </p:nvSpPr>
         <p:spPr>
           <a:xfrm>
-            <a:off x="685800" y="4700016"/>
-            <a:ext cx="91440" cy="1078992"/>
+            <a:off x="685800" y="4352544"/>
+            <a:ext cx="91440" cy="987552"/>
           </a:xfrm>
           <a:prstGeom prst="rect">
             <a:avLst/>
@@ -12175,7 +13183,7 @@
         </p:nvSpPr>
         <p:spPr>
           <a:xfrm>
-            <a:off x="886968" y="4818888"/>
+            <a:off x="886968" y="4471416"/>
             <a:ext cx="5596128" cy="228600"/>
           </a:xfrm>
           <a:prstGeom prst="rect">
@@ -12201,7 +13209,7 @@
               </a:defRPr>
             </a:pPr>
             <a:r>
-              <a:t>WHAT IT MEANS TO CUSTOMERS</a:t>
+              <a:t>CUSTOMER IMPACT EXAMPLE</a:t>
             </a:r>
           </a:p>
         </p:txBody>
@@ -12214,8 +13222,8 @@
         </p:nvSpPr>
         <p:spPr>
           <a:xfrm>
-            <a:off x="886968" y="5084064"/>
-            <a:ext cx="5596128" cy="603503"/>
+            <a:off x="886968" y="4736592"/>
+            <a:ext cx="5596128" cy="512064"/>
           </a:xfrm>
           <a:prstGeom prst="rect">
             <a:avLst/>
@@ -12232,7 +13240,7 @@
               <a:lnSpc>
                 <a:spcPct val="95000"/>
               </a:lnSpc>
-              <a:defRPr sz="1110" b="0">
+              <a:defRPr sz="1030" b="0">
                 <a:solidFill>
                   <a:srgbClr val="121217"/>
                 </a:solidFill>
@@ -12248,6 +13256,174 @@
       <p:sp>
         <p:nvSpPr>
           <p:cNvPr id="29" name="Rounded Rectangle 28"/>
+          <p:cNvSpPr/>
+          <p:nvPr/>
+        </p:nvSpPr>
+        <p:spPr>
+          <a:xfrm>
+            <a:off x="685800" y="5504688"/>
+            <a:ext cx="5925312" cy="384048"/>
+          </a:xfrm>
+          <a:prstGeom prst="roundRect">
+            <a:avLst/>
+          </a:prstGeom>
+          <a:solidFill>
+            <a:srgbClr val="FFFFFF"/>
+          </a:solidFill>
+          <a:ln w="10160">
+            <a:solidFill>
+              <a:srgbClr val="E2DDD2"/>
+            </a:solidFill>
+          </a:ln>
+        </p:spPr>
+        <p:style>
+          <a:lnRef idx="1">
+            <a:schemeClr val="accent1"/>
+          </a:lnRef>
+          <a:fillRef idx="3">
+            <a:schemeClr val="accent1"/>
+          </a:fillRef>
+          <a:effectRef idx="2">
+            <a:schemeClr val="accent1"/>
+          </a:effectRef>
+          <a:fontRef idx="minor">
+            <a:schemeClr val="lt1"/>
+          </a:fontRef>
+        </p:style>
+        <p:txBody>
+          <a:bodyPr rtlCol="0" anchor="ctr"/>
+          <a:lstStyle/>
+          <a:p>
+            <a:pPr algn="ctr"/>
+          </a:p>
+        </p:txBody>
+      </p:sp>
+      <p:sp>
+        <p:nvSpPr>
+          <p:cNvPr id="30" name="Rectangle 29"/>
+          <p:cNvSpPr/>
+          <p:nvPr/>
+        </p:nvSpPr>
+        <p:spPr>
+          <a:xfrm>
+            <a:off x="685800" y="5504688"/>
+            <a:ext cx="91440" cy="384048"/>
+          </a:xfrm>
+          <a:prstGeom prst="rect">
+            <a:avLst/>
+          </a:prstGeom>
+          <a:solidFill>
+            <a:srgbClr val="763957"/>
+          </a:solidFill>
+          <a:ln w="10160">
+            <a:solidFill>
+              <a:srgbClr val="763957"/>
+            </a:solidFill>
+          </a:ln>
+        </p:spPr>
+        <p:style>
+          <a:lnRef idx="1">
+            <a:schemeClr val="accent1"/>
+          </a:lnRef>
+          <a:fillRef idx="3">
+            <a:schemeClr val="accent1"/>
+          </a:fillRef>
+          <a:effectRef idx="2">
+            <a:schemeClr val="accent1"/>
+          </a:effectRef>
+          <a:fontRef idx="minor">
+            <a:schemeClr val="lt1"/>
+          </a:fontRef>
+        </p:style>
+        <p:txBody>
+          <a:bodyPr rtlCol="0" anchor="ctr"/>
+          <a:lstStyle/>
+          <a:p>
+            <a:pPr algn="ctr"/>
+          </a:p>
+        </p:txBody>
+      </p:sp>
+      <p:sp>
+        <p:nvSpPr>
+          <p:cNvPr id="31" name="TextBox 30"/>
+          <p:cNvSpPr txBox="1"/>
+          <p:nvPr/>
+        </p:nvSpPr>
+        <p:spPr>
+          <a:xfrm>
+            <a:off x="886968" y="5623559"/>
+            <a:ext cx="5596128" cy="228600"/>
+          </a:xfrm>
+          <a:prstGeom prst="rect">
+            <a:avLst/>
+          </a:prstGeom>
+          <a:noFill/>
+        </p:spPr>
+        <p:txBody>
+          <a:bodyPr wrap="square" lIns="27432" rIns="27432" tIns="18288" bIns="18288">
+            <a:normAutofit/>
+          </a:bodyPr>
+          <a:lstStyle/>
+          <a:p>
+            <a:pPr>
+              <a:lnSpc>
+                <a:spcPct val="100000"/>
+              </a:lnSpc>
+              <a:defRPr sz="720" b="1">
+                <a:solidFill>
+                  <a:srgbClr val="5E5B54"/>
+                </a:solidFill>
+                <a:latin typeface="Aptos"/>
+              </a:defRPr>
+            </a:pPr>
+            <a:r>
+              <a:t>WHAT CHANGED</a:t>
+            </a:r>
+          </a:p>
+        </p:txBody>
+      </p:sp>
+      <p:sp>
+        <p:nvSpPr>
+          <p:cNvPr id="32" name="TextBox 31"/>
+          <p:cNvSpPr txBox="1"/>
+          <p:nvPr/>
+        </p:nvSpPr>
+        <p:spPr>
+          <a:xfrm>
+            <a:off x="886968" y="5888736"/>
+            <a:ext cx="5596128" cy="-91440"/>
+          </a:xfrm>
+          <a:prstGeom prst="rect">
+            <a:avLst/>
+          </a:prstGeom>
+          <a:noFill/>
+        </p:spPr>
+        <p:txBody>
+          <a:bodyPr wrap="square" lIns="27432" rIns="27432" tIns="18288" bIns="18288">
+            <a:normAutofit/>
+          </a:bodyPr>
+          <a:lstStyle/>
+          <a:p>
+            <a:pPr>
+              <a:lnSpc>
+                <a:spcPct val="95000"/>
+              </a:lnSpc>
+              <a:defRPr sz="780" b="0">
+                <a:solidFill>
+                  <a:srgbClr val="121217"/>
+                </a:solidFill>
+                <a:latin typeface="Aptos"/>
+              </a:defRPr>
+            </a:pPr>
+            <a:r>
+              <a:t>CustomerLake, Golden Context, marketing agents and agentic CDP workflows inside Databricks.</a:t>
+            </a:r>
+          </a:p>
+        </p:txBody>
+      </p:sp>
+      <p:sp>
+        <p:nvSpPr>
+          <p:cNvPr id="33" name="Rounded Rectangle 32"/>
           <p:cNvSpPr/>
           <p:nvPr/>
         </p:nvSpPr>
@@ -12292,7 +13468,7 @@
       </p:sp>
       <p:sp>
         <p:nvSpPr>
-          <p:cNvPr id="30" name="TextBox 29"/>
+          <p:cNvPr id="34" name="TextBox 33"/>
           <p:cNvSpPr txBox="1"/>
           <p:nvPr/>
         </p:nvSpPr>
@@ -12331,14 +13507,14 @@
       </p:sp>
       <p:sp>
         <p:nvSpPr>
-          <p:cNvPr id="31" name="TextBox 30"/>
+          <p:cNvPr id="35" name="TextBox 34"/>
           <p:cNvSpPr txBox="1"/>
           <p:nvPr/>
         </p:nvSpPr>
         <p:spPr>
           <a:xfrm>
             <a:off x="7187184" y="4151376"/>
-            <a:ext cx="4041648" cy="1078992"/>
+            <a:ext cx="4041648" cy="1024128"/>
           </a:xfrm>
           <a:prstGeom prst="rect">
             <a:avLst/>
@@ -12355,7 +13531,7 @@
               <a:lnSpc>
                 <a:spcPct val="95000"/>
               </a:lnSpc>
-              <a:defRPr sz="1230" b="1">
+              <a:defRPr sz="1160" b="1">
                 <a:solidFill>
                   <a:srgbClr val="FFFFFF"/>
                 </a:solidFill>
@@ -12370,14 +13546,14 @@
       </p:sp>
       <p:sp>
         <p:nvSpPr>
-          <p:cNvPr id="32" name="TextBox 31"/>
-          <p:cNvSpPr txBox="1"/>
-          <p:nvPr/>
-        </p:nvSpPr>
-        <p:spPr>
-          <a:xfrm>
-            <a:off x="7187184" y="5303520"/>
-            <a:ext cx="4041648" cy="274320"/>
+          <p:cNvPr id="36" name="TextBox 35"/>
+          <p:cNvSpPr txBox="1"/>
+          <p:nvPr/>
+        </p:nvSpPr>
+        <p:spPr>
+          <a:xfrm>
+            <a:off x="7187184" y="5257800"/>
+            <a:ext cx="4041648" cy="320040"/>
           </a:xfrm>
           <a:prstGeom prst="rect">
             <a:avLst/>
@@ -12394,7 +13570,7 @@
               <a:lnSpc>
                 <a:spcPct val="100000"/>
               </a:lnSpc>
-              <a:defRPr sz="1050" b="1">
+              <a:defRPr sz="960" b="1">
                 <a:solidFill>
                   <a:srgbClr val="FFE2DB"/>
                 </a:solidFill>
@@ -12409,7 +13585,7 @@
       </p:sp>
       <p:sp>
         <p:nvSpPr>
-          <p:cNvPr id="33" name="TextBox 32"/>
+          <p:cNvPr id="37" name="TextBox 36"/>
           <p:cNvSpPr txBox="1"/>
           <p:nvPr/>
         </p:nvSpPr>
@@ -12919,7 +14095,7 @@
         <p:spPr>
           <a:xfrm>
             <a:off x="685800" y="1828800"/>
-            <a:ext cx="2880360" cy="932688"/>
+            <a:ext cx="2880360" cy="841248"/>
           </a:xfrm>
           <a:prstGeom prst="roundRect">
             <a:avLst/>
@@ -12964,7 +14140,7 @@
         <p:spPr>
           <a:xfrm>
             <a:off x="685800" y="1828800"/>
-            <a:ext cx="91440" cy="932688"/>
+            <a:ext cx="91440" cy="841248"/>
           </a:xfrm>
           <a:prstGeom prst="rect">
             <a:avLst/>
@@ -13048,7 +14224,7 @@
         <p:spPr>
           <a:xfrm>
             <a:off x="886968" y="2212848"/>
-            <a:ext cx="2551176" cy="457200"/>
+            <a:ext cx="2551176" cy="365760"/>
           </a:xfrm>
           <a:prstGeom prst="rect">
             <a:avLst/>
@@ -13065,7 +14241,7 @@
               <a:lnSpc>
                 <a:spcPct val="95000"/>
               </a:lnSpc>
-              <a:defRPr sz="1120" b="0">
+              <a:defRPr sz="1090" b="0">
                 <a:solidFill>
                   <a:srgbClr val="121217"/>
                 </a:solidFill>
@@ -13087,7 +14263,7 @@
         <p:spPr>
           <a:xfrm>
             <a:off x="3730752" y="1828800"/>
-            <a:ext cx="2880360" cy="932688"/>
+            <a:ext cx="2880360" cy="841248"/>
           </a:xfrm>
           <a:prstGeom prst="roundRect">
             <a:avLst/>
@@ -13132,7 +14308,7 @@
         <p:spPr>
           <a:xfrm>
             <a:off x="3730752" y="1828800"/>
-            <a:ext cx="91440" cy="932688"/>
+            <a:ext cx="91440" cy="841248"/>
           </a:xfrm>
           <a:prstGeom prst="rect">
             <a:avLst/>
@@ -13202,7 +14378,7 @@
               </a:defRPr>
             </a:pPr>
             <a:r>
-              <a:t>WHAT CHANGED</a:t>
+              <a:t>PROBLEM IT SOLVES</a:t>
             </a:r>
           </a:p>
         </p:txBody>
@@ -13216,7 +14392,7 @@
         <p:spPr>
           <a:xfrm>
             <a:off x="3931920" y="2212848"/>
-            <a:ext cx="2551176" cy="457200"/>
+            <a:ext cx="2551176" cy="365760"/>
           </a:xfrm>
           <a:prstGeom prst="rect">
             <a:avLst/>
@@ -13233,7 +14409,7 @@
               <a:lnSpc>
                 <a:spcPct val="95000"/>
               </a:lnSpc>
-              <a:defRPr sz="1070" b="0">
+              <a:defRPr sz="990" b="0">
                 <a:solidFill>
                   <a:srgbClr val="121217"/>
                 </a:solidFill>
@@ -13241,7 +14417,7 @@
               </a:defRPr>
             </a:pPr>
             <a:r>
-              <a:t>Lakewatch, Panther ecosystem links, security data connectors, AI assisted investigation and open security lakehouse positioning.</a:t>
+              <a:t>Security telemetry is expensive, fragmented and hard to investigate quickly. It solves the “how do we store more security history and investigate incidents faster?” problem.</a:t>
             </a:r>
           </a:p>
         </p:txBody>
@@ -13254,8 +14430,8 @@
         </p:nvSpPr>
         <p:spPr>
           <a:xfrm>
-            <a:off x="685800" y="2944368"/>
-            <a:ext cx="5925312" cy="1572768"/>
+            <a:off x="685800" y="2834640"/>
+            <a:ext cx="5925312" cy="1353312"/>
           </a:xfrm>
           <a:prstGeom prst="roundRect">
             <a:avLst/>
@@ -13299,8 +14475,8 @@
         </p:nvSpPr>
         <p:spPr>
           <a:xfrm>
-            <a:off x="685800" y="2944368"/>
-            <a:ext cx="91440" cy="1572768"/>
+            <a:off x="685800" y="2834640"/>
+            <a:ext cx="91440" cy="1353312"/>
           </a:xfrm>
           <a:prstGeom prst="rect">
             <a:avLst/>
@@ -13344,7 +14520,7 @@
         </p:nvSpPr>
         <p:spPr>
           <a:xfrm>
-            <a:off x="886968" y="3063240"/>
+            <a:off x="886968" y="2953512"/>
             <a:ext cx="5596128" cy="228600"/>
           </a:xfrm>
           <a:prstGeom prst="rect">
@@ -13383,8 +14559,8 @@
         </p:nvSpPr>
         <p:spPr>
           <a:xfrm>
-            <a:off x="886968" y="3328416"/>
-            <a:ext cx="5596128" cy="1097280"/>
+            <a:off x="886968" y="3218688"/>
+            <a:ext cx="5596128" cy="877824"/>
           </a:xfrm>
           <a:prstGeom prst="rect">
             <a:avLst/>
@@ -13401,7 +14577,7 @@
               <a:lnSpc>
                 <a:spcPct val="95000"/>
               </a:lnSpc>
-              <a:defRPr sz="1090" b="0">
+              <a:defRPr sz="990" b="0">
                 <a:solidFill>
                   <a:srgbClr val="121217"/>
                 </a:solidFill>
@@ -13422,8 +14598,8 @@
         </p:nvSpPr>
         <p:spPr>
           <a:xfrm>
-            <a:off x="685800" y="4700016"/>
-            <a:ext cx="5925312" cy="1078992"/>
+            <a:off x="685800" y="4352544"/>
+            <a:ext cx="5925312" cy="987552"/>
           </a:xfrm>
           <a:prstGeom prst="roundRect">
             <a:avLst/>
@@ -13467,8 +14643,8 @@
         </p:nvSpPr>
         <p:spPr>
           <a:xfrm>
-            <a:off x="685800" y="4700016"/>
-            <a:ext cx="91440" cy="1078992"/>
+            <a:off x="685800" y="4352544"/>
+            <a:ext cx="91440" cy="987552"/>
           </a:xfrm>
           <a:prstGeom prst="rect">
             <a:avLst/>
@@ -13512,7 +14688,7 @@
         </p:nvSpPr>
         <p:spPr>
           <a:xfrm>
-            <a:off x="886968" y="4818888"/>
+            <a:off x="886968" y="4471416"/>
             <a:ext cx="5596128" cy="228600"/>
           </a:xfrm>
           <a:prstGeom prst="rect">
@@ -13538,7 +14714,7 @@
               </a:defRPr>
             </a:pPr>
             <a:r>
-              <a:t>WHAT IT MEANS TO CUSTOMERS</a:t>
+              <a:t>CUSTOMER IMPACT EXAMPLE</a:t>
             </a:r>
           </a:p>
         </p:txBody>
@@ -13551,8 +14727,8 @@
         </p:nvSpPr>
         <p:spPr>
           <a:xfrm>
-            <a:off x="886968" y="5084064"/>
-            <a:ext cx="5596128" cy="603503"/>
+            <a:off x="886968" y="4736592"/>
+            <a:ext cx="5596128" cy="512064"/>
           </a:xfrm>
           <a:prstGeom prst="rect">
             <a:avLst/>
@@ -13569,7 +14745,7 @@
               <a:lnSpc>
                 <a:spcPct val="95000"/>
               </a:lnSpc>
-              <a:defRPr sz="1110" b="0">
+              <a:defRPr sz="1030" b="0">
                 <a:solidFill>
                   <a:srgbClr val="121217"/>
                 </a:solidFill>
@@ -13585,6 +14761,174 @@
       <p:sp>
         <p:nvSpPr>
           <p:cNvPr id="29" name="Rounded Rectangle 28"/>
+          <p:cNvSpPr/>
+          <p:nvPr/>
+        </p:nvSpPr>
+        <p:spPr>
+          <a:xfrm>
+            <a:off x="685800" y="5504688"/>
+            <a:ext cx="5925312" cy="384048"/>
+          </a:xfrm>
+          <a:prstGeom prst="roundRect">
+            <a:avLst/>
+          </a:prstGeom>
+          <a:solidFill>
+            <a:srgbClr val="FFFFFF"/>
+          </a:solidFill>
+          <a:ln w="10160">
+            <a:solidFill>
+              <a:srgbClr val="E2DDD2"/>
+            </a:solidFill>
+          </a:ln>
+        </p:spPr>
+        <p:style>
+          <a:lnRef idx="1">
+            <a:schemeClr val="accent1"/>
+          </a:lnRef>
+          <a:fillRef idx="3">
+            <a:schemeClr val="accent1"/>
+          </a:fillRef>
+          <a:effectRef idx="2">
+            <a:schemeClr val="accent1"/>
+          </a:effectRef>
+          <a:fontRef idx="minor">
+            <a:schemeClr val="lt1"/>
+          </a:fontRef>
+        </p:style>
+        <p:txBody>
+          <a:bodyPr rtlCol="0" anchor="ctr"/>
+          <a:lstStyle/>
+          <a:p>
+            <a:pPr algn="ctr"/>
+          </a:p>
+        </p:txBody>
+      </p:sp>
+      <p:sp>
+        <p:nvSpPr>
+          <p:cNvPr id="30" name="Rectangle 29"/>
+          <p:cNvSpPr/>
+          <p:nvPr/>
+        </p:nvSpPr>
+        <p:spPr>
+          <a:xfrm>
+            <a:off x="685800" y="5504688"/>
+            <a:ext cx="91440" cy="384048"/>
+          </a:xfrm>
+          <a:prstGeom prst="rect">
+            <a:avLst/>
+          </a:prstGeom>
+          <a:solidFill>
+            <a:srgbClr val="2B495B"/>
+          </a:solidFill>
+          <a:ln w="10160">
+            <a:solidFill>
+              <a:srgbClr val="2B495B"/>
+            </a:solidFill>
+          </a:ln>
+        </p:spPr>
+        <p:style>
+          <a:lnRef idx="1">
+            <a:schemeClr val="accent1"/>
+          </a:lnRef>
+          <a:fillRef idx="3">
+            <a:schemeClr val="accent1"/>
+          </a:fillRef>
+          <a:effectRef idx="2">
+            <a:schemeClr val="accent1"/>
+          </a:effectRef>
+          <a:fontRef idx="minor">
+            <a:schemeClr val="lt1"/>
+          </a:fontRef>
+        </p:style>
+        <p:txBody>
+          <a:bodyPr rtlCol="0" anchor="ctr"/>
+          <a:lstStyle/>
+          <a:p>
+            <a:pPr algn="ctr"/>
+          </a:p>
+        </p:txBody>
+      </p:sp>
+      <p:sp>
+        <p:nvSpPr>
+          <p:cNvPr id="31" name="TextBox 30"/>
+          <p:cNvSpPr txBox="1"/>
+          <p:nvPr/>
+        </p:nvSpPr>
+        <p:spPr>
+          <a:xfrm>
+            <a:off x="886968" y="5623559"/>
+            <a:ext cx="5596128" cy="228600"/>
+          </a:xfrm>
+          <a:prstGeom prst="rect">
+            <a:avLst/>
+          </a:prstGeom>
+          <a:noFill/>
+        </p:spPr>
+        <p:txBody>
+          <a:bodyPr wrap="square" lIns="27432" rIns="27432" tIns="18288" bIns="18288">
+            <a:normAutofit/>
+          </a:bodyPr>
+          <a:lstStyle/>
+          <a:p>
+            <a:pPr>
+              <a:lnSpc>
+                <a:spcPct val="100000"/>
+              </a:lnSpc>
+              <a:defRPr sz="720" b="1">
+                <a:solidFill>
+                  <a:srgbClr val="5E5B54"/>
+                </a:solidFill>
+                <a:latin typeface="Aptos"/>
+              </a:defRPr>
+            </a:pPr>
+            <a:r>
+              <a:t>WHAT CHANGED</a:t>
+            </a:r>
+          </a:p>
+        </p:txBody>
+      </p:sp>
+      <p:sp>
+        <p:nvSpPr>
+          <p:cNvPr id="32" name="TextBox 31"/>
+          <p:cNvSpPr txBox="1"/>
+          <p:nvPr/>
+        </p:nvSpPr>
+        <p:spPr>
+          <a:xfrm>
+            <a:off x="886968" y="5888736"/>
+            <a:ext cx="5596128" cy="-91440"/>
+          </a:xfrm>
+          <a:prstGeom prst="rect">
+            <a:avLst/>
+          </a:prstGeom>
+          <a:noFill/>
+        </p:spPr>
+        <p:txBody>
+          <a:bodyPr wrap="square" lIns="27432" rIns="27432" tIns="18288" bIns="18288">
+            <a:normAutofit/>
+          </a:bodyPr>
+          <a:lstStyle/>
+          <a:p>
+            <a:pPr>
+              <a:lnSpc>
+                <a:spcPct val="95000"/>
+              </a:lnSpc>
+              <a:defRPr sz="780" b="0">
+                <a:solidFill>
+                  <a:srgbClr val="121217"/>
+                </a:solidFill>
+                <a:latin typeface="Aptos"/>
+              </a:defRPr>
+            </a:pPr>
+            <a:r>
+              <a:t>Lakewatch, Panther ecosystem links, security data connectors, AI assisted investigation and open security lakehouse positioning.</a:t>
+            </a:r>
+          </a:p>
+        </p:txBody>
+      </p:sp>
+      <p:sp>
+        <p:nvSpPr>
+          <p:cNvPr id="33" name="Rounded Rectangle 32"/>
           <p:cNvSpPr/>
           <p:nvPr/>
         </p:nvSpPr>
@@ -13629,7 +14973,7 @@
       </p:sp>
       <p:sp>
         <p:nvSpPr>
-          <p:cNvPr id="30" name="TextBox 29"/>
+          <p:cNvPr id="34" name="TextBox 33"/>
           <p:cNvSpPr txBox="1"/>
           <p:nvPr/>
         </p:nvSpPr>
@@ -13668,14 +15012,14 @@
       </p:sp>
       <p:sp>
         <p:nvSpPr>
-          <p:cNvPr id="31" name="TextBox 30"/>
+          <p:cNvPr id="35" name="TextBox 34"/>
           <p:cNvSpPr txBox="1"/>
           <p:nvPr/>
         </p:nvSpPr>
         <p:spPr>
           <a:xfrm>
             <a:off x="7187184" y="4151376"/>
-            <a:ext cx="4041648" cy="1078992"/>
+            <a:ext cx="4041648" cy="1024128"/>
           </a:xfrm>
           <a:prstGeom prst="rect">
             <a:avLst/>
@@ -13692,7 +15036,7 @@
               <a:lnSpc>
                 <a:spcPct val="95000"/>
               </a:lnSpc>
-              <a:defRPr sz="1230" b="1">
+              <a:defRPr sz="1160" b="1">
                 <a:solidFill>
                   <a:srgbClr val="FFFFFF"/>
                 </a:solidFill>
@@ -13707,14 +15051,14 @@
       </p:sp>
       <p:sp>
         <p:nvSpPr>
-          <p:cNvPr id="32" name="TextBox 31"/>
-          <p:cNvSpPr txBox="1"/>
-          <p:nvPr/>
-        </p:nvSpPr>
-        <p:spPr>
-          <a:xfrm>
-            <a:off x="7187184" y="5303520"/>
-            <a:ext cx="4041648" cy="274320"/>
+          <p:cNvPr id="36" name="TextBox 35"/>
+          <p:cNvSpPr txBox="1"/>
+          <p:nvPr/>
+        </p:nvSpPr>
+        <p:spPr>
+          <a:xfrm>
+            <a:off x="7187184" y="5257800"/>
+            <a:ext cx="4041648" cy="320040"/>
           </a:xfrm>
           <a:prstGeom prst="rect">
             <a:avLst/>
@@ -13731,7 +15075,7 @@
               <a:lnSpc>
                 <a:spcPct val="100000"/>
               </a:lnSpc>
-              <a:defRPr sz="1050" b="1">
+              <a:defRPr sz="960" b="1">
                 <a:solidFill>
                   <a:srgbClr val="FFE2DB"/>
                 </a:solidFill>
@@ -13746,7 +15090,7 @@
       </p:sp>
       <p:sp>
         <p:nvSpPr>
-          <p:cNvPr id="33" name="TextBox 32"/>
+          <p:cNvPr id="37" name="TextBox 36"/>
           <p:cNvSpPr txBox="1"/>
           <p:nvPr/>
         </p:nvSpPr>
@@ -14256,7 +15600,7 @@
         <p:spPr>
           <a:xfrm>
             <a:off x="685800" y="1828800"/>
-            <a:ext cx="2880360" cy="932688"/>
+            <a:ext cx="2880360" cy="841248"/>
           </a:xfrm>
           <a:prstGeom prst="roundRect">
             <a:avLst/>
@@ -14301,7 +15645,7 @@
         <p:spPr>
           <a:xfrm>
             <a:off x="685800" y="1828800"/>
-            <a:ext cx="91440" cy="932688"/>
+            <a:ext cx="91440" cy="841248"/>
           </a:xfrm>
           <a:prstGeom prst="rect">
             <a:avLst/>
@@ -14385,7 +15729,7 @@
         <p:spPr>
           <a:xfrm>
             <a:off x="886968" y="2212848"/>
-            <a:ext cx="2551176" cy="457200"/>
+            <a:ext cx="2551176" cy="365760"/>
           </a:xfrm>
           <a:prstGeom prst="rect">
             <a:avLst/>
@@ -14402,7 +15746,7 @@
               <a:lnSpc>
                 <a:spcPct val="95000"/>
               </a:lnSpc>
-              <a:defRPr sz="1120" b="0">
+              <a:defRPr sz="1090" b="0">
                 <a:solidFill>
                   <a:srgbClr val="121217"/>
                 </a:solidFill>
@@ -14424,7 +15768,7 @@
         <p:spPr>
           <a:xfrm>
             <a:off x="3730752" y="1828800"/>
-            <a:ext cx="2880360" cy="932688"/>
+            <a:ext cx="2880360" cy="841248"/>
           </a:xfrm>
           <a:prstGeom prst="roundRect">
             <a:avLst/>
@@ -14469,7 +15813,7 @@
         <p:spPr>
           <a:xfrm>
             <a:off x="3730752" y="1828800"/>
-            <a:ext cx="91440" cy="932688"/>
+            <a:ext cx="91440" cy="841248"/>
           </a:xfrm>
           <a:prstGeom prst="rect">
             <a:avLst/>
@@ -14539,7 +15883,7 @@
               </a:defRPr>
             </a:pPr>
             <a:r>
-              <a:t>WHAT CHANGED</a:t>
+              <a:t>PROBLEM IT SOLVES</a:t>
             </a:r>
           </a:p>
         </p:txBody>
@@ -14553,7 +15897,7 @@
         <p:spPr>
           <a:xfrm>
             <a:off x="3931920" y="2212848"/>
-            <a:ext cx="2551176" cy="457200"/>
+            <a:ext cx="2551176" cy="365760"/>
           </a:xfrm>
           <a:prstGeom prst="rect">
             <a:avLst/>
@@ -14570,7 +15914,7 @@
               <a:lnSpc>
                 <a:spcPct val="95000"/>
               </a:lnSpc>
-              <a:defRPr sz="1070" b="0">
+              <a:defRPr sz="990" b="0">
                 <a:solidFill>
                   <a:srgbClr val="121217"/>
                 </a:solidFill>
@@ -14578,7 +15922,7 @@
               </a:defRPr>
             </a:pPr>
             <a:r>
-              <a:t>A shared harness for composing, controlling and sharing agents with sandbox patterns.</a:t>
+              <a:t>Organisations will have many disconnected agents with no common harness. It solves the “how do we compare, combine, sandbox and govern different agents?” problem.</a:t>
             </a:r>
           </a:p>
         </p:txBody>
@@ -14591,8 +15935,8 @@
         </p:nvSpPr>
         <p:spPr>
           <a:xfrm>
-            <a:off x="685800" y="2944368"/>
-            <a:ext cx="5925312" cy="1572768"/>
+            <a:off x="685800" y="2834640"/>
+            <a:ext cx="5925312" cy="1353312"/>
           </a:xfrm>
           <a:prstGeom prst="roundRect">
             <a:avLst/>
@@ -14636,8 +15980,8 @@
         </p:nvSpPr>
         <p:spPr>
           <a:xfrm>
-            <a:off x="685800" y="2944368"/>
-            <a:ext cx="91440" cy="1572768"/>
+            <a:off x="685800" y="2834640"/>
+            <a:ext cx="91440" cy="1353312"/>
           </a:xfrm>
           <a:prstGeom prst="rect">
             <a:avLst/>
@@ -14681,7 +16025,7 @@
         </p:nvSpPr>
         <p:spPr>
           <a:xfrm>
-            <a:off x="886968" y="3063240"/>
+            <a:off x="886968" y="2953512"/>
             <a:ext cx="5596128" cy="228600"/>
           </a:xfrm>
           <a:prstGeom prst="rect">
@@ -14720,8 +16064,8 @@
         </p:nvSpPr>
         <p:spPr>
           <a:xfrm>
-            <a:off x="886968" y="3328416"/>
-            <a:ext cx="5596128" cy="1097280"/>
+            <a:off x="886968" y="3218688"/>
+            <a:ext cx="5596128" cy="877824"/>
           </a:xfrm>
           <a:prstGeom prst="rect">
             <a:avLst/>
@@ -14738,7 +16082,7 @@
               <a:lnSpc>
                 <a:spcPct val="95000"/>
               </a:lnSpc>
-              <a:defRPr sz="1090" b="0">
+              <a:defRPr sz="990" b="0">
                 <a:solidFill>
                   <a:srgbClr val="121217"/>
                 </a:solidFill>
@@ -14759,8 +16103,8 @@
         </p:nvSpPr>
         <p:spPr>
           <a:xfrm>
-            <a:off x="685800" y="4700016"/>
-            <a:ext cx="5925312" cy="1078992"/>
+            <a:off x="685800" y="4352544"/>
+            <a:ext cx="5925312" cy="987552"/>
           </a:xfrm>
           <a:prstGeom prst="roundRect">
             <a:avLst/>
@@ -14804,8 +16148,8 @@
         </p:nvSpPr>
         <p:spPr>
           <a:xfrm>
-            <a:off x="685800" y="4700016"/>
-            <a:ext cx="91440" cy="1078992"/>
+            <a:off x="685800" y="4352544"/>
+            <a:ext cx="91440" cy="987552"/>
           </a:xfrm>
           <a:prstGeom prst="rect">
             <a:avLst/>
@@ -14849,7 +16193,7 @@
         </p:nvSpPr>
         <p:spPr>
           <a:xfrm>
-            <a:off x="886968" y="4818888"/>
+            <a:off x="886968" y="4471416"/>
             <a:ext cx="5596128" cy="228600"/>
           </a:xfrm>
           <a:prstGeom prst="rect">
@@ -14875,7 +16219,7 @@
               </a:defRPr>
             </a:pPr>
             <a:r>
-              <a:t>WHAT IT MEANS TO CUSTOMERS</a:t>
+              <a:t>CUSTOMER IMPACT EXAMPLE</a:t>
             </a:r>
           </a:p>
         </p:txBody>
@@ -14888,8 +16232,8 @@
         </p:nvSpPr>
         <p:spPr>
           <a:xfrm>
-            <a:off x="886968" y="5084064"/>
-            <a:ext cx="5596128" cy="603503"/>
+            <a:off x="886968" y="4736592"/>
+            <a:ext cx="5596128" cy="512064"/>
           </a:xfrm>
           <a:prstGeom prst="rect">
             <a:avLst/>
@@ -14906,7 +16250,7 @@
               <a:lnSpc>
                 <a:spcPct val="95000"/>
               </a:lnSpc>
-              <a:defRPr sz="1110" b="0">
+              <a:defRPr sz="1030" b="0">
                 <a:solidFill>
                   <a:srgbClr val="121217"/>
                 </a:solidFill>
@@ -14922,6 +16266,174 @@
       <p:sp>
         <p:nvSpPr>
           <p:cNvPr id="29" name="Rounded Rectangle 28"/>
+          <p:cNvSpPr/>
+          <p:nvPr/>
+        </p:nvSpPr>
+        <p:spPr>
+          <a:xfrm>
+            <a:off x="685800" y="5504688"/>
+            <a:ext cx="5925312" cy="384048"/>
+          </a:xfrm>
+          <a:prstGeom prst="roundRect">
+            <a:avLst/>
+          </a:prstGeom>
+          <a:solidFill>
+            <a:srgbClr val="FFFFFF"/>
+          </a:solidFill>
+          <a:ln w="10160">
+            <a:solidFill>
+              <a:srgbClr val="E2DDD2"/>
+            </a:solidFill>
+          </a:ln>
+        </p:spPr>
+        <p:style>
+          <a:lnRef idx="1">
+            <a:schemeClr val="accent1"/>
+          </a:lnRef>
+          <a:fillRef idx="3">
+            <a:schemeClr val="accent1"/>
+          </a:fillRef>
+          <a:effectRef idx="2">
+            <a:schemeClr val="accent1"/>
+          </a:effectRef>
+          <a:fontRef idx="minor">
+            <a:schemeClr val="lt1"/>
+          </a:fontRef>
+        </p:style>
+        <p:txBody>
+          <a:bodyPr rtlCol="0" anchor="ctr"/>
+          <a:lstStyle/>
+          <a:p>
+            <a:pPr algn="ctr"/>
+          </a:p>
+        </p:txBody>
+      </p:sp>
+      <p:sp>
+        <p:nvSpPr>
+          <p:cNvPr id="30" name="Rectangle 29"/>
+          <p:cNvSpPr/>
+          <p:nvPr/>
+        </p:nvSpPr>
+        <p:spPr>
+          <a:xfrm>
+            <a:off x="685800" y="5504688"/>
+            <a:ext cx="91440" cy="384048"/>
+          </a:xfrm>
+          <a:prstGeom prst="rect">
+            <a:avLst/>
+          </a:prstGeom>
+          <a:solidFill>
+            <a:srgbClr val="67409D"/>
+          </a:solidFill>
+          <a:ln w="10160">
+            <a:solidFill>
+              <a:srgbClr val="67409D"/>
+            </a:solidFill>
+          </a:ln>
+        </p:spPr>
+        <p:style>
+          <a:lnRef idx="1">
+            <a:schemeClr val="accent1"/>
+          </a:lnRef>
+          <a:fillRef idx="3">
+            <a:schemeClr val="accent1"/>
+          </a:fillRef>
+          <a:effectRef idx="2">
+            <a:schemeClr val="accent1"/>
+          </a:effectRef>
+          <a:fontRef idx="minor">
+            <a:schemeClr val="lt1"/>
+          </a:fontRef>
+        </p:style>
+        <p:txBody>
+          <a:bodyPr rtlCol="0" anchor="ctr"/>
+          <a:lstStyle/>
+          <a:p>
+            <a:pPr algn="ctr"/>
+          </a:p>
+        </p:txBody>
+      </p:sp>
+      <p:sp>
+        <p:nvSpPr>
+          <p:cNvPr id="31" name="TextBox 30"/>
+          <p:cNvSpPr txBox="1"/>
+          <p:nvPr/>
+        </p:nvSpPr>
+        <p:spPr>
+          <a:xfrm>
+            <a:off x="886968" y="5623559"/>
+            <a:ext cx="5596128" cy="228600"/>
+          </a:xfrm>
+          <a:prstGeom prst="rect">
+            <a:avLst/>
+          </a:prstGeom>
+          <a:noFill/>
+        </p:spPr>
+        <p:txBody>
+          <a:bodyPr wrap="square" lIns="27432" rIns="27432" tIns="18288" bIns="18288">
+            <a:normAutofit/>
+          </a:bodyPr>
+          <a:lstStyle/>
+          <a:p>
+            <a:pPr>
+              <a:lnSpc>
+                <a:spcPct val="100000"/>
+              </a:lnSpc>
+              <a:defRPr sz="720" b="1">
+                <a:solidFill>
+                  <a:srgbClr val="5E5B54"/>
+                </a:solidFill>
+                <a:latin typeface="Aptos"/>
+              </a:defRPr>
+            </a:pPr>
+            <a:r>
+              <a:t>WHAT CHANGED</a:t>
+            </a:r>
+          </a:p>
+        </p:txBody>
+      </p:sp>
+      <p:sp>
+        <p:nvSpPr>
+          <p:cNvPr id="32" name="TextBox 31"/>
+          <p:cNvSpPr txBox="1"/>
+          <p:nvPr/>
+        </p:nvSpPr>
+        <p:spPr>
+          <a:xfrm>
+            <a:off x="886968" y="5888736"/>
+            <a:ext cx="5596128" cy="-91440"/>
+          </a:xfrm>
+          <a:prstGeom prst="rect">
+            <a:avLst/>
+          </a:prstGeom>
+          <a:noFill/>
+        </p:spPr>
+        <p:txBody>
+          <a:bodyPr wrap="square" lIns="27432" rIns="27432" tIns="18288" bIns="18288">
+            <a:normAutofit/>
+          </a:bodyPr>
+          <a:lstStyle/>
+          <a:p>
+            <a:pPr>
+              <a:lnSpc>
+                <a:spcPct val="95000"/>
+              </a:lnSpc>
+              <a:defRPr sz="780" b="0">
+                <a:solidFill>
+                  <a:srgbClr val="121217"/>
+                </a:solidFill>
+                <a:latin typeface="Aptos"/>
+              </a:defRPr>
+            </a:pPr>
+            <a:r>
+              <a:t>A shared harness for composing, controlling and sharing agents with sandbox patterns.</a:t>
+            </a:r>
+          </a:p>
+        </p:txBody>
+      </p:sp>
+      <p:sp>
+        <p:nvSpPr>
+          <p:cNvPr id="33" name="Rounded Rectangle 32"/>
           <p:cNvSpPr/>
           <p:nvPr/>
         </p:nvSpPr>
@@ -14966,7 +16478,7 @@
       </p:sp>
       <p:sp>
         <p:nvSpPr>
-          <p:cNvPr id="30" name="TextBox 29"/>
+          <p:cNvPr id="34" name="TextBox 33"/>
           <p:cNvSpPr txBox="1"/>
           <p:nvPr/>
         </p:nvSpPr>
@@ -15005,14 +16517,14 @@
       </p:sp>
       <p:sp>
         <p:nvSpPr>
-          <p:cNvPr id="31" name="TextBox 30"/>
+          <p:cNvPr id="35" name="TextBox 34"/>
           <p:cNvSpPr txBox="1"/>
           <p:nvPr/>
         </p:nvSpPr>
         <p:spPr>
           <a:xfrm>
             <a:off x="7187184" y="4151376"/>
-            <a:ext cx="4041648" cy="1078992"/>
+            <a:ext cx="4041648" cy="1024128"/>
           </a:xfrm>
           <a:prstGeom prst="rect">
             <a:avLst/>
@@ -15029,7 +16541,7 @@
               <a:lnSpc>
                 <a:spcPct val="95000"/>
               </a:lnSpc>
-              <a:defRPr sz="1230" b="1">
+              <a:defRPr sz="1160" b="1">
                 <a:solidFill>
                   <a:srgbClr val="FFFFFF"/>
                 </a:solidFill>
@@ -15044,14 +16556,14 @@
       </p:sp>
       <p:sp>
         <p:nvSpPr>
-          <p:cNvPr id="32" name="TextBox 31"/>
-          <p:cNvSpPr txBox="1"/>
-          <p:nvPr/>
-        </p:nvSpPr>
-        <p:spPr>
-          <a:xfrm>
-            <a:off x="7187184" y="5303520"/>
-            <a:ext cx="4041648" cy="274320"/>
+          <p:cNvPr id="36" name="TextBox 35"/>
+          <p:cNvSpPr txBox="1"/>
+          <p:nvPr/>
+        </p:nvSpPr>
+        <p:spPr>
+          <a:xfrm>
+            <a:off x="7187184" y="5257800"/>
+            <a:ext cx="4041648" cy="320040"/>
           </a:xfrm>
           <a:prstGeom prst="rect">
             <a:avLst/>
@@ -15068,7 +16580,7 @@
               <a:lnSpc>
                 <a:spcPct val="100000"/>
               </a:lnSpc>
-              <a:defRPr sz="1050" b="1">
+              <a:defRPr sz="960" b="1">
                 <a:solidFill>
                   <a:srgbClr val="FFE2DB"/>
                 </a:solidFill>
@@ -15083,7 +16595,7 @@
       </p:sp>
       <p:sp>
         <p:nvSpPr>
-          <p:cNvPr id="33" name="TextBox 32"/>
+          <p:cNvPr id="37" name="TextBox 36"/>
           <p:cNvSpPr txBox="1"/>
           <p:nvPr/>
         </p:nvSpPr>
@@ -15593,7 +17105,7 @@
         <p:spPr>
           <a:xfrm>
             <a:off x="685800" y="1828800"/>
-            <a:ext cx="2880360" cy="932688"/>
+            <a:ext cx="2880360" cy="841248"/>
           </a:xfrm>
           <a:prstGeom prst="roundRect">
             <a:avLst/>
@@ -15638,7 +17150,7 @@
         <p:spPr>
           <a:xfrm>
             <a:off x="685800" y="1828800"/>
-            <a:ext cx="91440" cy="932688"/>
+            <a:ext cx="91440" cy="841248"/>
           </a:xfrm>
           <a:prstGeom prst="rect">
             <a:avLst/>
@@ -15722,7 +17234,7 @@
         <p:spPr>
           <a:xfrm>
             <a:off x="886968" y="2212848"/>
-            <a:ext cx="2551176" cy="457200"/>
+            <a:ext cx="2551176" cy="365760"/>
           </a:xfrm>
           <a:prstGeom prst="rect">
             <a:avLst/>
@@ -15739,7 +17251,7 @@
               <a:lnSpc>
                 <a:spcPct val="95000"/>
               </a:lnSpc>
-              <a:defRPr sz="1120" b="0">
+              <a:defRPr sz="1090" b="0">
                 <a:solidFill>
                   <a:srgbClr val="121217"/>
                 </a:solidFill>
@@ -15761,7 +17273,7 @@
         <p:spPr>
           <a:xfrm>
             <a:off x="3730752" y="1828800"/>
-            <a:ext cx="2880360" cy="932688"/>
+            <a:ext cx="2880360" cy="841248"/>
           </a:xfrm>
           <a:prstGeom prst="roundRect">
             <a:avLst/>
@@ -15806,7 +17318,7 @@
         <p:spPr>
           <a:xfrm>
             <a:off x="3730752" y="1828800"/>
-            <a:ext cx="91440" cy="932688"/>
+            <a:ext cx="91440" cy="841248"/>
           </a:xfrm>
           <a:prstGeom prst="rect">
             <a:avLst/>
@@ -15876,7 +17388,7 @@
               </a:defRPr>
             </a:pPr>
             <a:r>
-              <a:t>WHAT CHANGED</a:t>
+              <a:t>PROBLEM IT SOLVES</a:t>
             </a:r>
           </a:p>
         </p:txBody>
@@ -15890,7 +17402,7 @@
         <p:spPr>
           <a:xfrm>
             <a:off x="3931920" y="2212848"/>
-            <a:ext cx="2551176" cy="457200"/>
+            <a:ext cx="2551176" cy="365760"/>
           </a:xfrm>
           <a:prstGeom prst="rect">
             <a:avLst/>
@@ -15907,7 +17419,7 @@
               <a:lnSpc>
                 <a:spcPct val="95000"/>
               </a:lnSpc>
-              <a:defRPr sz="1070" b="0">
+              <a:defRPr sz="990" b="0">
                 <a:solidFill>
                   <a:srgbClr val="121217"/>
                 </a:solidFill>
@@ -15915,7 +17427,7 @@
               </a:defRPr>
             </a:pPr>
             <a:r>
-              <a:t>Identity, zero trust ingress, private networking and compliance coverage updates.</a:t>
+              <a:t>AI cannot scale if security, identity, networking and compliance are bolted on afterwards. It solves the “what must be true before risk and procurement approve production AI?” problem.</a:t>
             </a:r>
           </a:p>
         </p:txBody>
@@ -15928,8 +17440,8 @@
         </p:nvSpPr>
         <p:spPr>
           <a:xfrm>
-            <a:off x="685800" y="2944368"/>
-            <a:ext cx="5925312" cy="1572768"/>
+            <a:off x="685800" y="2834640"/>
+            <a:ext cx="5925312" cy="1353312"/>
           </a:xfrm>
           <a:prstGeom prst="roundRect">
             <a:avLst/>
@@ -15973,8 +17485,8 @@
         </p:nvSpPr>
         <p:spPr>
           <a:xfrm>
-            <a:off x="685800" y="2944368"/>
-            <a:ext cx="91440" cy="1572768"/>
+            <a:off x="685800" y="2834640"/>
+            <a:ext cx="91440" cy="1353312"/>
           </a:xfrm>
           <a:prstGeom prst="rect">
             <a:avLst/>
@@ -16018,7 +17530,7 @@
         </p:nvSpPr>
         <p:spPr>
           <a:xfrm>
-            <a:off x="886968" y="3063240"/>
+            <a:off x="886968" y="2953512"/>
             <a:ext cx="5596128" cy="228600"/>
           </a:xfrm>
           <a:prstGeom prst="rect">
@@ -16057,8 +17569,8 @@
         </p:nvSpPr>
         <p:spPr>
           <a:xfrm>
-            <a:off x="886968" y="3328416"/>
-            <a:ext cx="5596128" cy="1097280"/>
+            <a:off x="886968" y="3218688"/>
+            <a:ext cx="5596128" cy="877824"/>
           </a:xfrm>
           <a:prstGeom prst="rect">
             <a:avLst/>
@@ -16075,7 +17587,7 @@
               <a:lnSpc>
                 <a:spcPct val="95000"/>
               </a:lnSpc>
-              <a:defRPr sz="1090" b="0">
+              <a:defRPr sz="990" b="0">
                 <a:solidFill>
                   <a:srgbClr val="121217"/>
                 </a:solidFill>
@@ -16096,8 +17608,8 @@
         </p:nvSpPr>
         <p:spPr>
           <a:xfrm>
-            <a:off x="685800" y="4700016"/>
-            <a:ext cx="5925312" cy="1078992"/>
+            <a:off x="685800" y="4352544"/>
+            <a:ext cx="5925312" cy="987552"/>
           </a:xfrm>
           <a:prstGeom prst="roundRect">
             <a:avLst/>
@@ -16141,8 +17653,8 @@
         </p:nvSpPr>
         <p:spPr>
           <a:xfrm>
-            <a:off x="685800" y="4700016"/>
-            <a:ext cx="91440" cy="1078992"/>
+            <a:off x="685800" y="4352544"/>
+            <a:ext cx="91440" cy="987552"/>
           </a:xfrm>
           <a:prstGeom prst="rect">
             <a:avLst/>
@@ -16186,7 +17698,7 @@
         </p:nvSpPr>
         <p:spPr>
           <a:xfrm>
-            <a:off x="886968" y="4818888"/>
+            <a:off x="886968" y="4471416"/>
             <a:ext cx="5596128" cy="228600"/>
           </a:xfrm>
           <a:prstGeom prst="rect">
@@ -16212,7 +17724,7 @@
               </a:defRPr>
             </a:pPr>
             <a:r>
-              <a:t>WHAT IT MEANS TO CUSTOMERS</a:t>
+              <a:t>CUSTOMER IMPACT EXAMPLE</a:t>
             </a:r>
           </a:p>
         </p:txBody>
@@ -16225,8 +17737,8 @@
         </p:nvSpPr>
         <p:spPr>
           <a:xfrm>
-            <a:off x="886968" y="5084064"/>
-            <a:ext cx="5596128" cy="603503"/>
+            <a:off x="886968" y="4736592"/>
+            <a:ext cx="5596128" cy="512064"/>
           </a:xfrm>
           <a:prstGeom prst="rect">
             <a:avLst/>
@@ -16243,7 +17755,7 @@
               <a:lnSpc>
                 <a:spcPct val="95000"/>
               </a:lnSpc>
-              <a:defRPr sz="1110" b="0">
+              <a:defRPr sz="1030" b="0">
                 <a:solidFill>
                   <a:srgbClr val="121217"/>
                 </a:solidFill>
@@ -16259,6 +17771,174 @@
       <p:sp>
         <p:nvSpPr>
           <p:cNvPr id="29" name="Rounded Rectangle 28"/>
+          <p:cNvSpPr/>
+          <p:nvPr/>
+        </p:nvSpPr>
+        <p:spPr>
+          <a:xfrm>
+            <a:off x="685800" y="5504688"/>
+            <a:ext cx="5925312" cy="384048"/>
+          </a:xfrm>
+          <a:prstGeom prst="roundRect">
+            <a:avLst/>
+          </a:prstGeom>
+          <a:solidFill>
+            <a:srgbClr val="FFFFFF"/>
+          </a:solidFill>
+          <a:ln w="10160">
+            <a:solidFill>
+              <a:srgbClr val="E2DDD2"/>
+            </a:solidFill>
+          </a:ln>
+        </p:spPr>
+        <p:style>
+          <a:lnRef idx="1">
+            <a:schemeClr val="accent1"/>
+          </a:lnRef>
+          <a:fillRef idx="3">
+            <a:schemeClr val="accent1"/>
+          </a:fillRef>
+          <a:effectRef idx="2">
+            <a:schemeClr val="accent1"/>
+          </a:effectRef>
+          <a:fontRef idx="minor">
+            <a:schemeClr val="lt1"/>
+          </a:fontRef>
+        </p:style>
+        <p:txBody>
+          <a:bodyPr rtlCol="0" anchor="ctr"/>
+          <a:lstStyle/>
+          <a:p>
+            <a:pPr algn="ctr"/>
+          </a:p>
+        </p:txBody>
+      </p:sp>
+      <p:sp>
+        <p:nvSpPr>
+          <p:cNvPr id="30" name="Rectangle 29"/>
+          <p:cNvSpPr/>
+          <p:nvPr/>
+        </p:nvSpPr>
+        <p:spPr>
+          <a:xfrm>
+            <a:off x="685800" y="5504688"/>
+            <a:ext cx="91440" cy="384048"/>
+          </a:xfrm>
+          <a:prstGeom prst="rect">
+            <a:avLst/>
+          </a:prstGeom>
+          <a:solidFill>
+            <a:srgbClr val="AA2923"/>
+          </a:solidFill>
+          <a:ln w="10160">
+            <a:solidFill>
+              <a:srgbClr val="AA2923"/>
+            </a:solidFill>
+          </a:ln>
+        </p:spPr>
+        <p:style>
+          <a:lnRef idx="1">
+            <a:schemeClr val="accent1"/>
+          </a:lnRef>
+          <a:fillRef idx="3">
+            <a:schemeClr val="accent1"/>
+          </a:fillRef>
+          <a:effectRef idx="2">
+            <a:schemeClr val="accent1"/>
+          </a:effectRef>
+          <a:fontRef idx="minor">
+            <a:schemeClr val="lt1"/>
+          </a:fontRef>
+        </p:style>
+        <p:txBody>
+          <a:bodyPr rtlCol="0" anchor="ctr"/>
+          <a:lstStyle/>
+          <a:p>
+            <a:pPr algn="ctr"/>
+          </a:p>
+        </p:txBody>
+      </p:sp>
+      <p:sp>
+        <p:nvSpPr>
+          <p:cNvPr id="31" name="TextBox 30"/>
+          <p:cNvSpPr txBox="1"/>
+          <p:nvPr/>
+        </p:nvSpPr>
+        <p:spPr>
+          <a:xfrm>
+            <a:off x="886968" y="5623559"/>
+            <a:ext cx="5596128" cy="228600"/>
+          </a:xfrm>
+          <a:prstGeom prst="rect">
+            <a:avLst/>
+          </a:prstGeom>
+          <a:noFill/>
+        </p:spPr>
+        <p:txBody>
+          <a:bodyPr wrap="square" lIns="27432" rIns="27432" tIns="18288" bIns="18288">
+            <a:normAutofit/>
+          </a:bodyPr>
+          <a:lstStyle/>
+          <a:p>
+            <a:pPr>
+              <a:lnSpc>
+                <a:spcPct val="100000"/>
+              </a:lnSpc>
+              <a:defRPr sz="720" b="1">
+                <a:solidFill>
+                  <a:srgbClr val="5E5B54"/>
+                </a:solidFill>
+                <a:latin typeface="Aptos"/>
+              </a:defRPr>
+            </a:pPr>
+            <a:r>
+              <a:t>WHAT CHANGED</a:t>
+            </a:r>
+          </a:p>
+        </p:txBody>
+      </p:sp>
+      <p:sp>
+        <p:nvSpPr>
+          <p:cNvPr id="32" name="TextBox 31"/>
+          <p:cNvSpPr txBox="1"/>
+          <p:nvPr/>
+        </p:nvSpPr>
+        <p:spPr>
+          <a:xfrm>
+            <a:off x="886968" y="5888736"/>
+            <a:ext cx="5596128" cy="-91440"/>
+          </a:xfrm>
+          <a:prstGeom prst="rect">
+            <a:avLst/>
+          </a:prstGeom>
+          <a:noFill/>
+        </p:spPr>
+        <p:txBody>
+          <a:bodyPr wrap="square" lIns="27432" rIns="27432" tIns="18288" bIns="18288">
+            <a:normAutofit/>
+          </a:bodyPr>
+          <a:lstStyle/>
+          <a:p>
+            <a:pPr>
+              <a:lnSpc>
+                <a:spcPct val="95000"/>
+              </a:lnSpc>
+              <a:defRPr sz="780" b="0">
+                <a:solidFill>
+                  <a:srgbClr val="121217"/>
+                </a:solidFill>
+                <a:latin typeface="Aptos"/>
+              </a:defRPr>
+            </a:pPr>
+            <a:r>
+              <a:t>Identity, zero trust ingress, private networking and compliance coverage updates.</a:t>
+            </a:r>
+          </a:p>
+        </p:txBody>
+      </p:sp>
+      <p:sp>
+        <p:nvSpPr>
+          <p:cNvPr id="33" name="Rounded Rectangle 32"/>
           <p:cNvSpPr/>
           <p:nvPr/>
         </p:nvSpPr>
@@ -16303,7 +17983,7 @@
       </p:sp>
       <p:sp>
         <p:nvSpPr>
-          <p:cNvPr id="30" name="TextBox 29"/>
+          <p:cNvPr id="34" name="TextBox 33"/>
           <p:cNvSpPr txBox="1"/>
           <p:nvPr/>
         </p:nvSpPr>
@@ -16342,14 +18022,14 @@
       </p:sp>
       <p:sp>
         <p:nvSpPr>
-          <p:cNvPr id="31" name="TextBox 30"/>
+          <p:cNvPr id="35" name="TextBox 34"/>
           <p:cNvSpPr txBox="1"/>
           <p:nvPr/>
         </p:nvSpPr>
         <p:spPr>
           <a:xfrm>
             <a:off x="7187184" y="4151376"/>
-            <a:ext cx="4041648" cy="1078992"/>
+            <a:ext cx="4041648" cy="1024128"/>
           </a:xfrm>
           <a:prstGeom prst="rect">
             <a:avLst/>
@@ -16366,7 +18046,7 @@
               <a:lnSpc>
                 <a:spcPct val="95000"/>
               </a:lnSpc>
-              <a:defRPr sz="1230" b="1">
+              <a:defRPr sz="1160" b="1">
                 <a:solidFill>
                   <a:srgbClr val="FFFFFF"/>
                 </a:solidFill>
@@ -16381,14 +18061,14 @@
       </p:sp>
       <p:sp>
         <p:nvSpPr>
-          <p:cNvPr id="32" name="TextBox 31"/>
-          <p:cNvSpPr txBox="1"/>
-          <p:nvPr/>
-        </p:nvSpPr>
-        <p:spPr>
-          <a:xfrm>
-            <a:off x="7187184" y="5303520"/>
-            <a:ext cx="4041648" cy="274320"/>
+          <p:cNvPr id="36" name="TextBox 35"/>
+          <p:cNvSpPr txBox="1"/>
+          <p:nvPr/>
+        </p:nvSpPr>
+        <p:spPr>
+          <a:xfrm>
+            <a:off x="7187184" y="5257800"/>
+            <a:ext cx="4041648" cy="320040"/>
           </a:xfrm>
           <a:prstGeom prst="rect">
             <a:avLst/>
@@ -16405,7 +18085,7 @@
               <a:lnSpc>
                 <a:spcPct val="100000"/>
               </a:lnSpc>
-              <a:defRPr sz="1050" b="1">
+              <a:defRPr sz="960" b="1">
                 <a:solidFill>
                   <a:srgbClr val="FFE2DB"/>
                 </a:solidFill>
@@ -16420,7 +18100,7 @@
       </p:sp>
       <p:sp>
         <p:nvSpPr>
-          <p:cNvPr id="33" name="TextBox 32"/>
+          <p:cNvPr id="37" name="TextBox 36"/>
           <p:cNvSpPr txBox="1"/>
           <p:nvPr/>
         </p:nvSpPr>
@@ -16930,7 +18610,7 @@
         <p:spPr>
           <a:xfrm>
             <a:off x="685800" y="1828800"/>
-            <a:ext cx="2880360" cy="932688"/>
+            <a:ext cx="2880360" cy="841248"/>
           </a:xfrm>
           <a:prstGeom prst="roundRect">
             <a:avLst/>
@@ -16975,7 +18655,7 @@
         <p:spPr>
           <a:xfrm>
             <a:off x="685800" y="1828800"/>
-            <a:ext cx="91440" cy="932688"/>
+            <a:ext cx="91440" cy="841248"/>
           </a:xfrm>
           <a:prstGeom prst="rect">
             <a:avLst/>
@@ -17059,7 +18739,7 @@
         <p:spPr>
           <a:xfrm>
             <a:off x="886968" y="2212848"/>
-            <a:ext cx="2551176" cy="457200"/>
+            <a:ext cx="2551176" cy="365760"/>
           </a:xfrm>
           <a:prstGeom prst="rect">
             <a:avLst/>
@@ -17076,7 +18756,7 @@
               <a:lnSpc>
                 <a:spcPct val="95000"/>
               </a:lnSpc>
-              <a:defRPr sz="1120" b="0">
+              <a:defRPr sz="1090" b="0">
                 <a:solidFill>
                   <a:srgbClr val="121217"/>
                 </a:solidFill>
@@ -17098,7 +18778,7 @@
         <p:spPr>
           <a:xfrm>
             <a:off x="3730752" y="1828800"/>
-            <a:ext cx="2880360" cy="932688"/>
+            <a:ext cx="2880360" cy="841248"/>
           </a:xfrm>
           <a:prstGeom prst="roundRect">
             <a:avLst/>
@@ -17143,7 +18823,7 @@
         <p:spPr>
           <a:xfrm>
             <a:off x="3730752" y="1828800"/>
-            <a:ext cx="91440" cy="932688"/>
+            <a:ext cx="91440" cy="841248"/>
           </a:xfrm>
           <a:prstGeom prst="rect">
             <a:avLst/>
@@ -17213,7 +18893,7 @@
               </a:defRPr>
             </a:pPr>
             <a:r>
-              <a:t>WHAT CHANGED</a:t>
+              <a:t>PROBLEM IT SOLVES</a:t>
             </a:r>
           </a:p>
         </p:txBody>
@@ -17227,7 +18907,7 @@
         <p:spPr>
           <a:xfrm>
             <a:off x="3931920" y="2212848"/>
-            <a:ext cx="2551176" cy="457200"/>
+            <a:ext cx="2551176" cy="365760"/>
           </a:xfrm>
           <a:prstGeom prst="rect">
             <a:avLst/>
@@ -17244,7 +18924,7 @@
               <a:lnSpc>
                 <a:spcPct val="95000"/>
               </a:lnSpc>
-              <a:defRPr sz="1070" b="0">
+              <a:defRPr sz="990" b="0">
                 <a:solidFill>
                   <a:srgbClr val="121217"/>
                 </a:solidFill>
@@ -17252,7 +18932,7 @@
               </a:defRPr>
             </a:pPr>
             <a:r>
-              <a:t>Runtime controls for models and agents, spend caps, smart routing, MCP controls and traces.</a:t>
+              <a:t>Enterprises are about to have model and agent sprawl: different tools, different costs, different risks. It solves the “how do we route, monitor and control AI usage centrally?” problem.</a:t>
             </a:r>
           </a:p>
         </p:txBody>
@@ -17265,8 +18945,8 @@
         </p:nvSpPr>
         <p:spPr>
           <a:xfrm>
-            <a:off x="685800" y="2944368"/>
-            <a:ext cx="5925312" cy="1572768"/>
+            <a:off x="685800" y="2834640"/>
+            <a:ext cx="5925312" cy="1353312"/>
           </a:xfrm>
           <a:prstGeom prst="roundRect">
             <a:avLst/>
@@ -17310,8 +18990,8 @@
         </p:nvSpPr>
         <p:spPr>
           <a:xfrm>
-            <a:off x="685800" y="2944368"/>
-            <a:ext cx="91440" cy="1572768"/>
+            <a:off x="685800" y="2834640"/>
+            <a:ext cx="91440" cy="1353312"/>
           </a:xfrm>
           <a:prstGeom prst="rect">
             <a:avLst/>
@@ -17355,7 +19035,7 @@
         </p:nvSpPr>
         <p:spPr>
           <a:xfrm>
-            <a:off x="886968" y="3063240"/>
+            <a:off x="886968" y="2953512"/>
             <a:ext cx="5596128" cy="228600"/>
           </a:xfrm>
           <a:prstGeom prst="rect">
@@ -17394,8 +19074,8 @@
         </p:nvSpPr>
         <p:spPr>
           <a:xfrm>
-            <a:off x="886968" y="3328416"/>
-            <a:ext cx="5596128" cy="1097280"/>
+            <a:off x="886968" y="3218688"/>
+            <a:ext cx="5596128" cy="877824"/>
           </a:xfrm>
           <a:prstGeom prst="rect">
             <a:avLst/>
@@ -17412,7 +19092,7 @@
               <a:lnSpc>
                 <a:spcPct val="95000"/>
               </a:lnSpc>
-              <a:defRPr sz="1090" b="0">
+              <a:defRPr sz="990" b="0">
                 <a:solidFill>
                   <a:srgbClr val="121217"/>
                 </a:solidFill>
@@ -17433,8 +19113,8 @@
         </p:nvSpPr>
         <p:spPr>
           <a:xfrm>
-            <a:off x="685800" y="4700016"/>
-            <a:ext cx="5925312" cy="1078992"/>
+            <a:off x="685800" y="4352544"/>
+            <a:ext cx="5925312" cy="987552"/>
           </a:xfrm>
           <a:prstGeom prst="roundRect">
             <a:avLst/>
@@ -17478,8 +19158,8 @@
         </p:nvSpPr>
         <p:spPr>
           <a:xfrm>
-            <a:off x="685800" y="4700016"/>
-            <a:ext cx="91440" cy="1078992"/>
+            <a:off x="685800" y="4352544"/>
+            <a:ext cx="91440" cy="987552"/>
           </a:xfrm>
           <a:prstGeom prst="rect">
             <a:avLst/>
@@ -17523,7 +19203,7 @@
         </p:nvSpPr>
         <p:spPr>
           <a:xfrm>
-            <a:off x="886968" y="4818888"/>
+            <a:off x="886968" y="4471416"/>
             <a:ext cx="5596128" cy="228600"/>
           </a:xfrm>
           <a:prstGeom prst="rect">
@@ -17549,7 +19229,7 @@
               </a:defRPr>
             </a:pPr>
             <a:r>
-              <a:t>WHAT IT MEANS TO CUSTOMERS</a:t>
+              <a:t>CUSTOMER IMPACT EXAMPLE</a:t>
             </a:r>
           </a:p>
         </p:txBody>
@@ -17562,8 +19242,8 @@
         </p:nvSpPr>
         <p:spPr>
           <a:xfrm>
-            <a:off x="886968" y="5084064"/>
-            <a:ext cx="5596128" cy="603503"/>
+            <a:off x="886968" y="4736592"/>
+            <a:ext cx="5596128" cy="512064"/>
           </a:xfrm>
           <a:prstGeom prst="rect">
             <a:avLst/>
@@ -17580,7 +19260,7 @@
               <a:lnSpc>
                 <a:spcPct val="95000"/>
               </a:lnSpc>
-              <a:defRPr sz="1110" b="0">
+              <a:defRPr sz="1030" b="0">
                 <a:solidFill>
                   <a:srgbClr val="121217"/>
                 </a:solidFill>
@@ -17596,6 +19276,174 @@
       <p:sp>
         <p:nvSpPr>
           <p:cNvPr id="29" name="Rounded Rectangle 28"/>
+          <p:cNvSpPr/>
+          <p:nvPr/>
+        </p:nvSpPr>
+        <p:spPr>
+          <a:xfrm>
+            <a:off x="685800" y="5504688"/>
+            <a:ext cx="5925312" cy="384048"/>
+          </a:xfrm>
+          <a:prstGeom prst="roundRect">
+            <a:avLst/>
+          </a:prstGeom>
+          <a:solidFill>
+            <a:srgbClr val="FFFFFF"/>
+          </a:solidFill>
+          <a:ln w="10160">
+            <a:solidFill>
+              <a:srgbClr val="E2DDD2"/>
+            </a:solidFill>
+          </a:ln>
+        </p:spPr>
+        <p:style>
+          <a:lnRef idx="1">
+            <a:schemeClr val="accent1"/>
+          </a:lnRef>
+          <a:fillRef idx="3">
+            <a:schemeClr val="accent1"/>
+          </a:fillRef>
+          <a:effectRef idx="2">
+            <a:schemeClr val="accent1"/>
+          </a:effectRef>
+          <a:fontRef idx="minor">
+            <a:schemeClr val="lt1"/>
+          </a:fontRef>
+        </p:style>
+        <p:txBody>
+          <a:bodyPr rtlCol="0" anchor="ctr"/>
+          <a:lstStyle/>
+          <a:p>
+            <a:pPr algn="ctr"/>
+          </a:p>
+        </p:txBody>
+      </p:sp>
+      <p:sp>
+        <p:nvSpPr>
+          <p:cNvPr id="30" name="Rectangle 29"/>
+          <p:cNvSpPr/>
+          <p:nvPr/>
+        </p:nvSpPr>
+        <p:spPr>
+          <a:xfrm>
+            <a:off x="685800" y="5504688"/>
+            <a:ext cx="91440" cy="384048"/>
+          </a:xfrm>
+          <a:prstGeom prst="rect">
+            <a:avLst/>
+          </a:prstGeom>
+          <a:solidFill>
+            <a:srgbClr val="AA2923"/>
+          </a:solidFill>
+          <a:ln w="10160">
+            <a:solidFill>
+              <a:srgbClr val="AA2923"/>
+            </a:solidFill>
+          </a:ln>
+        </p:spPr>
+        <p:style>
+          <a:lnRef idx="1">
+            <a:schemeClr val="accent1"/>
+          </a:lnRef>
+          <a:fillRef idx="3">
+            <a:schemeClr val="accent1"/>
+          </a:fillRef>
+          <a:effectRef idx="2">
+            <a:schemeClr val="accent1"/>
+          </a:effectRef>
+          <a:fontRef idx="minor">
+            <a:schemeClr val="lt1"/>
+          </a:fontRef>
+        </p:style>
+        <p:txBody>
+          <a:bodyPr rtlCol="0" anchor="ctr"/>
+          <a:lstStyle/>
+          <a:p>
+            <a:pPr algn="ctr"/>
+          </a:p>
+        </p:txBody>
+      </p:sp>
+      <p:sp>
+        <p:nvSpPr>
+          <p:cNvPr id="31" name="TextBox 30"/>
+          <p:cNvSpPr txBox="1"/>
+          <p:nvPr/>
+        </p:nvSpPr>
+        <p:spPr>
+          <a:xfrm>
+            <a:off x="886968" y="5623559"/>
+            <a:ext cx="5596128" cy="228600"/>
+          </a:xfrm>
+          <a:prstGeom prst="rect">
+            <a:avLst/>
+          </a:prstGeom>
+          <a:noFill/>
+        </p:spPr>
+        <p:txBody>
+          <a:bodyPr wrap="square" lIns="27432" rIns="27432" tIns="18288" bIns="18288">
+            <a:normAutofit/>
+          </a:bodyPr>
+          <a:lstStyle/>
+          <a:p>
+            <a:pPr>
+              <a:lnSpc>
+                <a:spcPct val="100000"/>
+              </a:lnSpc>
+              <a:defRPr sz="720" b="1">
+                <a:solidFill>
+                  <a:srgbClr val="5E5B54"/>
+                </a:solidFill>
+                <a:latin typeface="Aptos"/>
+              </a:defRPr>
+            </a:pPr>
+            <a:r>
+              <a:t>WHAT CHANGED</a:t>
+            </a:r>
+          </a:p>
+        </p:txBody>
+      </p:sp>
+      <p:sp>
+        <p:nvSpPr>
+          <p:cNvPr id="32" name="TextBox 31"/>
+          <p:cNvSpPr txBox="1"/>
+          <p:nvPr/>
+        </p:nvSpPr>
+        <p:spPr>
+          <a:xfrm>
+            <a:off x="886968" y="5888736"/>
+            <a:ext cx="5596128" cy="-91440"/>
+          </a:xfrm>
+          <a:prstGeom prst="rect">
+            <a:avLst/>
+          </a:prstGeom>
+          <a:noFill/>
+        </p:spPr>
+        <p:txBody>
+          <a:bodyPr wrap="square" lIns="27432" rIns="27432" tIns="18288" bIns="18288">
+            <a:normAutofit/>
+          </a:bodyPr>
+          <a:lstStyle/>
+          <a:p>
+            <a:pPr>
+              <a:lnSpc>
+                <a:spcPct val="95000"/>
+              </a:lnSpc>
+              <a:defRPr sz="780" b="0">
+                <a:solidFill>
+                  <a:srgbClr val="121217"/>
+                </a:solidFill>
+                <a:latin typeface="Aptos"/>
+              </a:defRPr>
+            </a:pPr>
+            <a:r>
+              <a:t>Runtime controls for models and agents, spend caps, smart routing, MCP controls and traces.</a:t>
+            </a:r>
+          </a:p>
+        </p:txBody>
+      </p:sp>
+      <p:sp>
+        <p:nvSpPr>
+          <p:cNvPr id="33" name="Rounded Rectangle 32"/>
           <p:cNvSpPr/>
           <p:nvPr/>
         </p:nvSpPr>
@@ -17640,7 +19488,7 @@
       </p:sp>
       <p:sp>
         <p:nvSpPr>
-          <p:cNvPr id="30" name="TextBox 29"/>
+          <p:cNvPr id="34" name="TextBox 33"/>
           <p:cNvSpPr txBox="1"/>
           <p:nvPr/>
         </p:nvSpPr>
@@ -17679,14 +19527,14 @@
       </p:sp>
       <p:sp>
         <p:nvSpPr>
-          <p:cNvPr id="31" name="TextBox 30"/>
+          <p:cNvPr id="35" name="TextBox 34"/>
           <p:cNvSpPr txBox="1"/>
           <p:nvPr/>
         </p:nvSpPr>
         <p:spPr>
           <a:xfrm>
             <a:off x="7187184" y="4151376"/>
-            <a:ext cx="4041648" cy="1078992"/>
+            <a:ext cx="4041648" cy="1024128"/>
           </a:xfrm>
           <a:prstGeom prst="rect">
             <a:avLst/>
@@ -17703,7 +19551,7 @@
               <a:lnSpc>
                 <a:spcPct val="95000"/>
               </a:lnSpc>
-              <a:defRPr sz="1230" b="1">
+              <a:defRPr sz="1160" b="1">
                 <a:solidFill>
                   <a:srgbClr val="FFFFFF"/>
                 </a:solidFill>
@@ -17718,14 +19566,14 @@
       </p:sp>
       <p:sp>
         <p:nvSpPr>
-          <p:cNvPr id="32" name="TextBox 31"/>
-          <p:cNvSpPr txBox="1"/>
-          <p:nvPr/>
-        </p:nvSpPr>
-        <p:spPr>
-          <a:xfrm>
-            <a:off x="7187184" y="5303520"/>
-            <a:ext cx="4041648" cy="274320"/>
+          <p:cNvPr id="36" name="TextBox 35"/>
+          <p:cNvSpPr txBox="1"/>
+          <p:nvPr/>
+        </p:nvSpPr>
+        <p:spPr>
+          <a:xfrm>
+            <a:off x="7187184" y="5257800"/>
+            <a:ext cx="4041648" cy="320040"/>
           </a:xfrm>
           <a:prstGeom prst="rect">
             <a:avLst/>
@@ -17742,7 +19590,7 @@
               <a:lnSpc>
                 <a:spcPct val="100000"/>
               </a:lnSpc>
-              <a:defRPr sz="1050" b="1">
+              <a:defRPr sz="960" b="1">
                 <a:solidFill>
                   <a:srgbClr val="FFE2DB"/>
                 </a:solidFill>
@@ -17757,7 +19605,7 @@
       </p:sp>
       <p:sp>
         <p:nvSpPr>
-          <p:cNvPr id="33" name="TextBox 32"/>
+          <p:cNvPr id="37" name="TextBox 36"/>
           <p:cNvSpPr txBox="1"/>
           <p:nvPr/>
         </p:nvSpPr>
@@ -18267,7 +20115,7 @@
         <p:spPr>
           <a:xfrm>
             <a:off x="685800" y="1828800"/>
-            <a:ext cx="2880360" cy="932688"/>
+            <a:ext cx="2880360" cy="841248"/>
           </a:xfrm>
           <a:prstGeom prst="roundRect">
             <a:avLst/>
@@ -18312,7 +20160,7 @@
         <p:spPr>
           <a:xfrm>
             <a:off x="685800" y="1828800"/>
-            <a:ext cx="91440" cy="932688"/>
+            <a:ext cx="91440" cy="841248"/>
           </a:xfrm>
           <a:prstGeom prst="rect">
             <a:avLst/>
@@ -18396,7 +20244,7 @@
         <p:spPr>
           <a:xfrm>
             <a:off x="886968" y="2212848"/>
-            <a:ext cx="2551176" cy="457200"/>
+            <a:ext cx="2551176" cy="365760"/>
           </a:xfrm>
           <a:prstGeom prst="rect">
             <a:avLst/>
@@ -18413,7 +20261,7 @@
               <a:lnSpc>
                 <a:spcPct val="95000"/>
               </a:lnSpc>
-              <a:defRPr sz="1120" b="0">
+              <a:defRPr sz="1090" b="0">
                 <a:solidFill>
                   <a:srgbClr val="121217"/>
                 </a:solidFill>
@@ -18435,7 +20283,7 @@
         <p:spPr>
           <a:xfrm>
             <a:off x="3730752" y="1828800"/>
-            <a:ext cx="2880360" cy="932688"/>
+            <a:ext cx="2880360" cy="841248"/>
           </a:xfrm>
           <a:prstGeom prst="roundRect">
             <a:avLst/>
@@ -18480,7 +20328,7 @@
         <p:spPr>
           <a:xfrm>
             <a:off x="3730752" y="1828800"/>
-            <a:ext cx="91440" cy="932688"/>
+            <a:ext cx="91440" cy="841248"/>
           </a:xfrm>
           <a:prstGeom prst="rect">
             <a:avLst/>
@@ -18550,7 +20398,7 @@
               </a:defRPr>
             </a:pPr>
             <a:r>
-              <a:t>WHAT CHANGED</a:t>
+              <a:t>PROBLEM IT SOLVES</a:t>
             </a:r>
           </a:p>
         </p:txBody>
@@ -18564,7 +20412,7 @@
         <p:spPr>
           <a:xfrm>
             <a:off x="3931920" y="2212848"/>
-            <a:ext cx="2551176" cy="457200"/>
+            <a:ext cx="2551176" cy="365760"/>
           </a:xfrm>
           <a:prstGeom prst="rect">
             <a:avLst/>
@@ -18581,7 +20429,7 @@
               <a:lnSpc>
                 <a:spcPct val="95000"/>
               </a:lnSpc>
-              <a:defRPr sz="1070" b="0">
+              <a:defRPr sz="990" b="0">
                 <a:solidFill>
                   <a:srgbClr val="121217"/>
                 </a:solidFill>
@@ -18589,7 +20437,7 @@
               </a:defRPr>
             </a:pPr>
             <a:r>
-              <a:t>More model choice, more context connectors, Lakebase memory, Unity AI Gateway control and agent tracing.</a:t>
+              <a:t>Agent pilots often die because every team rebuilds retrieval, tools, memory, evaluation and monitoring from scratch. It solves the “how do we industrialise agent development?” problem.</a:t>
             </a:r>
           </a:p>
         </p:txBody>
@@ -18602,8 +20450,8 @@
         </p:nvSpPr>
         <p:spPr>
           <a:xfrm>
-            <a:off x="685800" y="2944368"/>
-            <a:ext cx="5925312" cy="1572768"/>
+            <a:off x="685800" y="2834640"/>
+            <a:ext cx="5925312" cy="1353312"/>
           </a:xfrm>
           <a:prstGeom prst="roundRect">
             <a:avLst/>
@@ -18647,8 +20495,8 @@
         </p:nvSpPr>
         <p:spPr>
           <a:xfrm>
-            <a:off x="685800" y="2944368"/>
-            <a:ext cx="91440" cy="1572768"/>
+            <a:off x="685800" y="2834640"/>
+            <a:ext cx="91440" cy="1353312"/>
           </a:xfrm>
           <a:prstGeom prst="rect">
             <a:avLst/>
@@ -18692,7 +20540,7 @@
         </p:nvSpPr>
         <p:spPr>
           <a:xfrm>
-            <a:off x="886968" y="3063240"/>
+            <a:off x="886968" y="2953512"/>
             <a:ext cx="5596128" cy="228600"/>
           </a:xfrm>
           <a:prstGeom prst="rect">
@@ -18731,8 +20579,8 @@
         </p:nvSpPr>
         <p:spPr>
           <a:xfrm>
-            <a:off x="886968" y="3328416"/>
-            <a:ext cx="5596128" cy="1097280"/>
+            <a:off x="886968" y="3218688"/>
+            <a:ext cx="5596128" cy="877824"/>
           </a:xfrm>
           <a:prstGeom prst="rect">
             <a:avLst/>
@@ -18749,7 +20597,7 @@
               <a:lnSpc>
                 <a:spcPct val="95000"/>
               </a:lnSpc>
-              <a:defRPr sz="1090" b="0">
+              <a:defRPr sz="990" b="0">
                 <a:solidFill>
                   <a:srgbClr val="121217"/>
                 </a:solidFill>
@@ -18770,8 +20618,8 @@
         </p:nvSpPr>
         <p:spPr>
           <a:xfrm>
-            <a:off x="685800" y="4700016"/>
-            <a:ext cx="5925312" cy="1078992"/>
+            <a:off x="685800" y="4352544"/>
+            <a:ext cx="5925312" cy="987552"/>
           </a:xfrm>
           <a:prstGeom prst="roundRect">
             <a:avLst/>
@@ -18815,8 +20663,8 @@
         </p:nvSpPr>
         <p:spPr>
           <a:xfrm>
-            <a:off x="685800" y="4700016"/>
-            <a:ext cx="91440" cy="1078992"/>
+            <a:off x="685800" y="4352544"/>
+            <a:ext cx="91440" cy="987552"/>
           </a:xfrm>
           <a:prstGeom prst="rect">
             <a:avLst/>
@@ -18860,7 +20708,7 @@
         </p:nvSpPr>
         <p:spPr>
           <a:xfrm>
-            <a:off x="886968" y="4818888"/>
+            <a:off x="886968" y="4471416"/>
             <a:ext cx="5596128" cy="228600"/>
           </a:xfrm>
           <a:prstGeom prst="rect">
@@ -18886,7 +20734,7 @@
               </a:defRPr>
             </a:pPr>
             <a:r>
-              <a:t>WHAT IT MEANS TO CUSTOMERS</a:t>
+              <a:t>CUSTOMER IMPACT EXAMPLE</a:t>
             </a:r>
           </a:p>
         </p:txBody>
@@ -18899,8 +20747,8 @@
         </p:nvSpPr>
         <p:spPr>
           <a:xfrm>
-            <a:off x="886968" y="5084064"/>
-            <a:ext cx="5596128" cy="603503"/>
+            <a:off x="886968" y="4736592"/>
+            <a:ext cx="5596128" cy="512064"/>
           </a:xfrm>
           <a:prstGeom prst="rect">
             <a:avLst/>
@@ -18917,7 +20765,7 @@
               <a:lnSpc>
                 <a:spcPct val="95000"/>
               </a:lnSpc>
-              <a:defRPr sz="1110" b="0">
+              <a:defRPr sz="1030" b="0">
                 <a:solidFill>
                   <a:srgbClr val="121217"/>
                 </a:solidFill>
@@ -18933,6 +20781,174 @@
       <p:sp>
         <p:nvSpPr>
           <p:cNvPr id="29" name="Rounded Rectangle 28"/>
+          <p:cNvSpPr/>
+          <p:nvPr/>
+        </p:nvSpPr>
+        <p:spPr>
+          <a:xfrm>
+            <a:off x="685800" y="5504688"/>
+            <a:ext cx="5925312" cy="384048"/>
+          </a:xfrm>
+          <a:prstGeom prst="roundRect">
+            <a:avLst/>
+          </a:prstGeom>
+          <a:solidFill>
+            <a:srgbClr val="FFFFFF"/>
+          </a:solidFill>
+          <a:ln w="10160">
+            <a:solidFill>
+              <a:srgbClr val="E2DDD2"/>
+            </a:solidFill>
+          </a:ln>
+        </p:spPr>
+        <p:style>
+          <a:lnRef idx="1">
+            <a:schemeClr val="accent1"/>
+          </a:lnRef>
+          <a:fillRef idx="3">
+            <a:schemeClr val="accent1"/>
+          </a:fillRef>
+          <a:effectRef idx="2">
+            <a:schemeClr val="accent1"/>
+          </a:effectRef>
+          <a:fontRef idx="minor">
+            <a:schemeClr val="lt1"/>
+          </a:fontRef>
+        </p:style>
+        <p:txBody>
+          <a:bodyPr rtlCol="0" anchor="ctr"/>
+          <a:lstStyle/>
+          <a:p>
+            <a:pPr algn="ctr"/>
+          </a:p>
+        </p:txBody>
+      </p:sp>
+      <p:sp>
+        <p:nvSpPr>
+          <p:cNvPr id="30" name="Rectangle 29"/>
+          <p:cNvSpPr/>
+          <p:nvPr/>
+        </p:nvSpPr>
+        <p:spPr>
+          <a:xfrm>
+            <a:off x="685800" y="5504688"/>
+            <a:ext cx="91440" cy="384048"/>
+          </a:xfrm>
+          <a:prstGeom prst="rect">
+            <a:avLst/>
+          </a:prstGeom>
+          <a:solidFill>
+            <a:srgbClr val="4B64FF"/>
+          </a:solidFill>
+          <a:ln w="10160">
+            <a:solidFill>
+              <a:srgbClr val="4B64FF"/>
+            </a:solidFill>
+          </a:ln>
+        </p:spPr>
+        <p:style>
+          <a:lnRef idx="1">
+            <a:schemeClr val="accent1"/>
+          </a:lnRef>
+          <a:fillRef idx="3">
+            <a:schemeClr val="accent1"/>
+          </a:fillRef>
+          <a:effectRef idx="2">
+            <a:schemeClr val="accent1"/>
+          </a:effectRef>
+          <a:fontRef idx="minor">
+            <a:schemeClr val="lt1"/>
+          </a:fontRef>
+        </p:style>
+        <p:txBody>
+          <a:bodyPr rtlCol="0" anchor="ctr"/>
+          <a:lstStyle/>
+          <a:p>
+            <a:pPr algn="ctr"/>
+          </a:p>
+        </p:txBody>
+      </p:sp>
+      <p:sp>
+        <p:nvSpPr>
+          <p:cNvPr id="31" name="TextBox 30"/>
+          <p:cNvSpPr txBox="1"/>
+          <p:nvPr/>
+        </p:nvSpPr>
+        <p:spPr>
+          <a:xfrm>
+            <a:off x="886968" y="5623559"/>
+            <a:ext cx="5596128" cy="228600"/>
+          </a:xfrm>
+          <a:prstGeom prst="rect">
+            <a:avLst/>
+          </a:prstGeom>
+          <a:noFill/>
+        </p:spPr>
+        <p:txBody>
+          <a:bodyPr wrap="square" lIns="27432" rIns="27432" tIns="18288" bIns="18288">
+            <a:normAutofit/>
+          </a:bodyPr>
+          <a:lstStyle/>
+          <a:p>
+            <a:pPr>
+              <a:lnSpc>
+                <a:spcPct val="100000"/>
+              </a:lnSpc>
+              <a:defRPr sz="720" b="1">
+                <a:solidFill>
+                  <a:srgbClr val="5E5B54"/>
+                </a:solidFill>
+                <a:latin typeface="Aptos"/>
+              </a:defRPr>
+            </a:pPr>
+            <a:r>
+              <a:t>WHAT CHANGED</a:t>
+            </a:r>
+          </a:p>
+        </p:txBody>
+      </p:sp>
+      <p:sp>
+        <p:nvSpPr>
+          <p:cNvPr id="32" name="TextBox 31"/>
+          <p:cNvSpPr txBox="1"/>
+          <p:nvPr/>
+        </p:nvSpPr>
+        <p:spPr>
+          <a:xfrm>
+            <a:off x="886968" y="5888736"/>
+            <a:ext cx="5596128" cy="-91440"/>
+          </a:xfrm>
+          <a:prstGeom prst="rect">
+            <a:avLst/>
+          </a:prstGeom>
+          <a:noFill/>
+        </p:spPr>
+        <p:txBody>
+          <a:bodyPr wrap="square" lIns="27432" rIns="27432" tIns="18288" bIns="18288">
+            <a:normAutofit/>
+          </a:bodyPr>
+          <a:lstStyle/>
+          <a:p>
+            <a:pPr>
+              <a:lnSpc>
+                <a:spcPct val="95000"/>
+              </a:lnSpc>
+              <a:defRPr sz="780" b="0">
+                <a:solidFill>
+                  <a:srgbClr val="121217"/>
+                </a:solidFill>
+                <a:latin typeface="Aptos"/>
+              </a:defRPr>
+            </a:pPr>
+            <a:r>
+              <a:t>More model choice, more context connectors, Lakebase memory, Unity AI Gateway control and agent tracing.</a:t>
+            </a:r>
+          </a:p>
+        </p:txBody>
+      </p:sp>
+      <p:sp>
+        <p:nvSpPr>
+          <p:cNvPr id="33" name="Rounded Rectangle 32"/>
           <p:cNvSpPr/>
           <p:nvPr/>
         </p:nvSpPr>
@@ -18977,7 +20993,7 @@
       </p:sp>
       <p:sp>
         <p:nvSpPr>
-          <p:cNvPr id="30" name="TextBox 29"/>
+          <p:cNvPr id="34" name="TextBox 33"/>
           <p:cNvSpPr txBox="1"/>
           <p:nvPr/>
         </p:nvSpPr>
@@ -19016,14 +21032,14 @@
       </p:sp>
       <p:sp>
         <p:nvSpPr>
-          <p:cNvPr id="31" name="TextBox 30"/>
+          <p:cNvPr id="35" name="TextBox 34"/>
           <p:cNvSpPr txBox="1"/>
           <p:nvPr/>
         </p:nvSpPr>
         <p:spPr>
           <a:xfrm>
             <a:off x="7187184" y="4151376"/>
-            <a:ext cx="4041648" cy="1078992"/>
+            <a:ext cx="4041648" cy="1024128"/>
           </a:xfrm>
           <a:prstGeom prst="rect">
             <a:avLst/>
@@ -19040,7 +21056,7 @@
               <a:lnSpc>
                 <a:spcPct val="95000"/>
               </a:lnSpc>
-              <a:defRPr sz="1230" b="1">
+              <a:defRPr sz="1160" b="1">
                 <a:solidFill>
                   <a:srgbClr val="FFFFFF"/>
                 </a:solidFill>
@@ -19055,14 +21071,14 @@
       </p:sp>
       <p:sp>
         <p:nvSpPr>
-          <p:cNvPr id="32" name="TextBox 31"/>
-          <p:cNvSpPr txBox="1"/>
-          <p:nvPr/>
-        </p:nvSpPr>
-        <p:spPr>
-          <a:xfrm>
-            <a:off x="7187184" y="5303520"/>
-            <a:ext cx="4041648" cy="274320"/>
+          <p:cNvPr id="36" name="TextBox 35"/>
+          <p:cNvSpPr txBox="1"/>
+          <p:nvPr/>
+        </p:nvSpPr>
+        <p:spPr>
+          <a:xfrm>
+            <a:off x="7187184" y="5257800"/>
+            <a:ext cx="4041648" cy="320040"/>
           </a:xfrm>
           <a:prstGeom prst="rect">
             <a:avLst/>
@@ -19079,7 +21095,7 @@
               <a:lnSpc>
                 <a:spcPct val="100000"/>
               </a:lnSpc>
-              <a:defRPr sz="1050" b="1">
+              <a:defRPr sz="960" b="1">
                 <a:solidFill>
                   <a:srgbClr val="FFE2DB"/>
                 </a:solidFill>
@@ -19094,7 +21110,7 @@
       </p:sp>
       <p:sp>
         <p:nvSpPr>
-          <p:cNvPr id="33" name="TextBox 32"/>
+          <p:cNvPr id="37" name="TextBox 36"/>
           <p:cNvSpPr txBox="1"/>
           <p:nvPr/>
         </p:nvSpPr>
@@ -19604,7 +21620,7 @@
         <p:spPr>
           <a:xfrm>
             <a:off x="685800" y="1828800"/>
-            <a:ext cx="2880360" cy="932688"/>
+            <a:ext cx="2880360" cy="841248"/>
           </a:xfrm>
           <a:prstGeom prst="roundRect">
             <a:avLst/>
@@ -19649,7 +21665,7 @@
         <p:spPr>
           <a:xfrm>
             <a:off x="685800" y="1828800"/>
-            <a:ext cx="91440" cy="932688"/>
+            <a:ext cx="91440" cy="841248"/>
           </a:xfrm>
           <a:prstGeom prst="rect">
             <a:avLst/>
@@ -19733,7 +21749,7 @@
         <p:spPr>
           <a:xfrm>
             <a:off x="886968" y="2212848"/>
-            <a:ext cx="2551176" cy="457200"/>
+            <a:ext cx="2551176" cy="365760"/>
           </a:xfrm>
           <a:prstGeom prst="rect">
             <a:avLst/>
@@ -19750,7 +21766,7 @@
               <a:lnSpc>
                 <a:spcPct val="95000"/>
               </a:lnSpc>
-              <a:defRPr sz="1120" b="0">
+              <a:defRPr sz="1090" b="0">
                 <a:solidFill>
                   <a:srgbClr val="121217"/>
                 </a:solidFill>
@@ -19772,7 +21788,7 @@
         <p:spPr>
           <a:xfrm>
             <a:off x="3730752" y="1828800"/>
-            <a:ext cx="2880360" cy="932688"/>
+            <a:ext cx="2880360" cy="841248"/>
           </a:xfrm>
           <a:prstGeom prst="roundRect">
             <a:avLst/>
@@ -19817,7 +21833,7 @@
         <p:spPr>
           <a:xfrm>
             <a:off x="3730752" y="1828800"/>
-            <a:ext cx="91440" cy="932688"/>
+            <a:ext cx="91440" cy="841248"/>
           </a:xfrm>
           <a:prstGeom prst="rect">
             <a:avLst/>
@@ -19887,7 +21903,7 @@
               </a:defRPr>
             </a:pPr>
             <a:r>
-              <a:t>WHAT CHANGED</a:t>
+              <a:t>PROBLEM IT SOLVES</a:t>
             </a:r>
           </a:p>
         </p:txBody>
@@ -19901,7 +21917,7 @@
         <p:spPr>
           <a:xfrm>
             <a:off x="3931920" y="2212848"/>
-            <a:ext cx="2551176" cy="457200"/>
+            <a:ext cx="2551176" cy="365760"/>
           </a:xfrm>
           <a:prstGeom prst="rect">
             <a:avLst/>
@@ -19918,7 +21934,7 @@
               <a:lnSpc>
                 <a:spcPct val="95000"/>
               </a:lnSpc>
-              <a:defRPr sz="1070" b="0">
+              <a:defRPr sz="990" b="0">
                 <a:solidFill>
                   <a:srgbClr val="121217"/>
                 </a:solidFill>
@@ -19926,7 +21942,7 @@
               </a:defRPr>
             </a:pPr>
             <a:r>
-              <a:t>A business user agent, tool actions, enterprise context and workflow support through Genie Ontology.</a:t>
+              <a:t>Business users still depend on analysts for too many everyday questions and follow-up actions. It solves the “how do non-technical teams get trusted answers and take action faster?” problem.</a:t>
             </a:r>
           </a:p>
         </p:txBody>
@@ -19939,8 +21955,8 @@
         </p:nvSpPr>
         <p:spPr>
           <a:xfrm>
-            <a:off x="685800" y="2944368"/>
-            <a:ext cx="5925312" cy="1572768"/>
+            <a:off x="685800" y="2834640"/>
+            <a:ext cx="5925312" cy="1353312"/>
           </a:xfrm>
           <a:prstGeom prst="roundRect">
             <a:avLst/>
@@ -19984,8 +22000,8 @@
         </p:nvSpPr>
         <p:spPr>
           <a:xfrm>
-            <a:off x="685800" y="2944368"/>
-            <a:ext cx="91440" cy="1572768"/>
+            <a:off x="685800" y="2834640"/>
+            <a:ext cx="91440" cy="1353312"/>
           </a:xfrm>
           <a:prstGeom prst="rect">
             <a:avLst/>
@@ -20029,7 +22045,7 @@
         </p:nvSpPr>
         <p:spPr>
           <a:xfrm>
-            <a:off x="886968" y="3063240"/>
+            <a:off x="886968" y="2953512"/>
             <a:ext cx="5596128" cy="228600"/>
           </a:xfrm>
           <a:prstGeom prst="rect">
@@ -20068,8 +22084,8 @@
         </p:nvSpPr>
         <p:spPr>
           <a:xfrm>
-            <a:off x="886968" y="3328416"/>
-            <a:ext cx="5596128" cy="1097280"/>
+            <a:off x="886968" y="3218688"/>
+            <a:ext cx="5596128" cy="877824"/>
           </a:xfrm>
           <a:prstGeom prst="rect">
             <a:avLst/>
@@ -20086,7 +22102,7 @@
               <a:lnSpc>
                 <a:spcPct val="95000"/>
               </a:lnSpc>
-              <a:defRPr sz="1090" b="0">
+              <a:defRPr sz="990" b="0">
                 <a:solidFill>
                   <a:srgbClr val="121217"/>
                 </a:solidFill>
@@ -20107,8 +22123,8 @@
         </p:nvSpPr>
         <p:spPr>
           <a:xfrm>
-            <a:off x="685800" y="4700016"/>
-            <a:ext cx="5925312" cy="1078992"/>
+            <a:off x="685800" y="4352544"/>
+            <a:ext cx="5925312" cy="987552"/>
           </a:xfrm>
           <a:prstGeom prst="roundRect">
             <a:avLst/>
@@ -20152,8 +22168,8 @@
         </p:nvSpPr>
         <p:spPr>
           <a:xfrm>
-            <a:off x="685800" y="4700016"/>
-            <a:ext cx="91440" cy="1078992"/>
+            <a:off x="685800" y="4352544"/>
+            <a:ext cx="91440" cy="987552"/>
           </a:xfrm>
           <a:prstGeom prst="rect">
             <a:avLst/>
@@ -20197,7 +22213,7 @@
         </p:nvSpPr>
         <p:spPr>
           <a:xfrm>
-            <a:off x="886968" y="4818888"/>
+            <a:off x="886968" y="4471416"/>
             <a:ext cx="5596128" cy="228600"/>
           </a:xfrm>
           <a:prstGeom prst="rect">
@@ -20223,7 +22239,7 @@
               </a:defRPr>
             </a:pPr>
             <a:r>
-              <a:t>WHAT IT MEANS TO CUSTOMERS</a:t>
+              <a:t>CUSTOMER IMPACT EXAMPLE</a:t>
             </a:r>
           </a:p>
         </p:txBody>
@@ -20236,8 +22252,8 @@
         </p:nvSpPr>
         <p:spPr>
           <a:xfrm>
-            <a:off x="886968" y="5084064"/>
-            <a:ext cx="5596128" cy="603503"/>
+            <a:off x="886968" y="4736592"/>
+            <a:ext cx="5596128" cy="512064"/>
           </a:xfrm>
           <a:prstGeom prst="rect">
             <a:avLst/>
@@ -20254,7 +22270,7 @@
               <a:lnSpc>
                 <a:spcPct val="95000"/>
               </a:lnSpc>
-              <a:defRPr sz="1110" b="0">
+              <a:defRPr sz="1030" b="0">
                 <a:solidFill>
                   <a:srgbClr val="121217"/>
                 </a:solidFill>
@@ -20270,6 +22286,174 @@
       <p:sp>
         <p:nvSpPr>
           <p:cNvPr id="29" name="Rounded Rectangle 28"/>
+          <p:cNvSpPr/>
+          <p:nvPr/>
+        </p:nvSpPr>
+        <p:spPr>
+          <a:xfrm>
+            <a:off x="685800" y="5504688"/>
+            <a:ext cx="5925312" cy="384048"/>
+          </a:xfrm>
+          <a:prstGeom prst="roundRect">
+            <a:avLst/>
+          </a:prstGeom>
+          <a:solidFill>
+            <a:srgbClr val="FFFFFF"/>
+          </a:solidFill>
+          <a:ln w="10160">
+            <a:solidFill>
+              <a:srgbClr val="E2DDD2"/>
+            </a:solidFill>
+          </a:ln>
+        </p:spPr>
+        <p:style>
+          <a:lnRef idx="1">
+            <a:schemeClr val="accent1"/>
+          </a:lnRef>
+          <a:fillRef idx="3">
+            <a:schemeClr val="accent1"/>
+          </a:fillRef>
+          <a:effectRef idx="2">
+            <a:schemeClr val="accent1"/>
+          </a:effectRef>
+          <a:fontRef idx="minor">
+            <a:schemeClr val="lt1"/>
+          </a:fontRef>
+        </p:style>
+        <p:txBody>
+          <a:bodyPr rtlCol="0" anchor="ctr"/>
+          <a:lstStyle/>
+          <a:p>
+            <a:pPr algn="ctr"/>
+          </a:p>
+        </p:txBody>
+      </p:sp>
+      <p:sp>
+        <p:nvSpPr>
+          <p:cNvPr id="30" name="Rectangle 29"/>
+          <p:cNvSpPr/>
+          <p:nvPr/>
+        </p:nvSpPr>
+        <p:spPr>
+          <a:xfrm>
+            <a:off x="685800" y="5504688"/>
+            <a:ext cx="91440" cy="384048"/>
+          </a:xfrm>
+          <a:prstGeom prst="rect">
+            <a:avLst/>
+          </a:prstGeom>
+          <a:solidFill>
+            <a:srgbClr val="7A47B4"/>
+          </a:solidFill>
+          <a:ln w="10160">
+            <a:solidFill>
+              <a:srgbClr val="7A47B4"/>
+            </a:solidFill>
+          </a:ln>
+        </p:spPr>
+        <p:style>
+          <a:lnRef idx="1">
+            <a:schemeClr val="accent1"/>
+          </a:lnRef>
+          <a:fillRef idx="3">
+            <a:schemeClr val="accent1"/>
+          </a:fillRef>
+          <a:effectRef idx="2">
+            <a:schemeClr val="accent1"/>
+          </a:effectRef>
+          <a:fontRef idx="minor">
+            <a:schemeClr val="lt1"/>
+          </a:fontRef>
+        </p:style>
+        <p:txBody>
+          <a:bodyPr rtlCol="0" anchor="ctr"/>
+          <a:lstStyle/>
+          <a:p>
+            <a:pPr algn="ctr"/>
+          </a:p>
+        </p:txBody>
+      </p:sp>
+      <p:sp>
+        <p:nvSpPr>
+          <p:cNvPr id="31" name="TextBox 30"/>
+          <p:cNvSpPr txBox="1"/>
+          <p:nvPr/>
+        </p:nvSpPr>
+        <p:spPr>
+          <a:xfrm>
+            <a:off x="886968" y="5623559"/>
+            <a:ext cx="5596128" cy="228600"/>
+          </a:xfrm>
+          <a:prstGeom prst="rect">
+            <a:avLst/>
+          </a:prstGeom>
+          <a:noFill/>
+        </p:spPr>
+        <p:txBody>
+          <a:bodyPr wrap="square" lIns="27432" rIns="27432" tIns="18288" bIns="18288">
+            <a:normAutofit/>
+          </a:bodyPr>
+          <a:lstStyle/>
+          <a:p>
+            <a:pPr>
+              <a:lnSpc>
+                <a:spcPct val="100000"/>
+              </a:lnSpc>
+              <a:defRPr sz="720" b="1">
+                <a:solidFill>
+                  <a:srgbClr val="5E5B54"/>
+                </a:solidFill>
+                <a:latin typeface="Aptos"/>
+              </a:defRPr>
+            </a:pPr>
+            <a:r>
+              <a:t>WHAT CHANGED</a:t>
+            </a:r>
+          </a:p>
+        </p:txBody>
+      </p:sp>
+      <p:sp>
+        <p:nvSpPr>
+          <p:cNvPr id="32" name="TextBox 31"/>
+          <p:cNvSpPr txBox="1"/>
+          <p:nvPr/>
+        </p:nvSpPr>
+        <p:spPr>
+          <a:xfrm>
+            <a:off x="886968" y="5888736"/>
+            <a:ext cx="5596128" cy="-91440"/>
+          </a:xfrm>
+          <a:prstGeom prst="rect">
+            <a:avLst/>
+          </a:prstGeom>
+          <a:noFill/>
+        </p:spPr>
+        <p:txBody>
+          <a:bodyPr wrap="square" lIns="27432" rIns="27432" tIns="18288" bIns="18288">
+            <a:normAutofit/>
+          </a:bodyPr>
+          <a:lstStyle/>
+          <a:p>
+            <a:pPr>
+              <a:lnSpc>
+                <a:spcPct val="95000"/>
+              </a:lnSpc>
+              <a:defRPr sz="780" b="0">
+                <a:solidFill>
+                  <a:srgbClr val="121217"/>
+                </a:solidFill>
+                <a:latin typeface="Aptos"/>
+              </a:defRPr>
+            </a:pPr>
+            <a:r>
+              <a:t>A business user agent, tool actions, enterprise context and workflow support through Genie Ontology.</a:t>
+            </a:r>
+          </a:p>
+        </p:txBody>
+      </p:sp>
+      <p:sp>
+        <p:nvSpPr>
+          <p:cNvPr id="33" name="Rounded Rectangle 32"/>
           <p:cNvSpPr/>
           <p:nvPr/>
         </p:nvSpPr>
@@ -20314,7 +22498,7 @@
       </p:sp>
       <p:sp>
         <p:nvSpPr>
-          <p:cNvPr id="30" name="TextBox 29"/>
+          <p:cNvPr id="34" name="TextBox 33"/>
           <p:cNvSpPr txBox="1"/>
           <p:nvPr/>
         </p:nvSpPr>
@@ -20353,14 +22537,14 @@
       </p:sp>
       <p:sp>
         <p:nvSpPr>
-          <p:cNvPr id="31" name="TextBox 30"/>
+          <p:cNvPr id="35" name="TextBox 34"/>
           <p:cNvSpPr txBox="1"/>
           <p:nvPr/>
         </p:nvSpPr>
         <p:spPr>
           <a:xfrm>
             <a:off x="7187184" y="4151376"/>
-            <a:ext cx="4041648" cy="1078992"/>
+            <a:ext cx="4041648" cy="1024128"/>
           </a:xfrm>
           <a:prstGeom prst="rect">
             <a:avLst/>
@@ -20377,7 +22561,7 @@
               <a:lnSpc>
                 <a:spcPct val="95000"/>
               </a:lnSpc>
-              <a:defRPr sz="1230" b="1">
+              <a:defRPr sz="1160" b="1">
                 <a:solidFill>
                   <a:srgbClr val="FFFFFF"/>
                 </a:solidFill>
@@ -20392,14 +22576,14 @@
       </p:sp>
       <p:sp>
         <p:nvSpPr>
-          <p:cNvPr id="32" name="TextBox 31"/>
-          <p:cNvSpPr txBox="1"/>
-          <p:nvPr/>
-        </p:nvSpPr>
-        <p:spPr>
-          <a:xfrm>
-            <a:off x="7187184" y="5303520"/>
-            <a:ext cx="4041648" cy="274320"/>
+          <p:cNvPr id="36" name="TextBox 35"/>
+          <p:cNvSpPr txBox="1"/>
+          <p:nvPr/>
+        </p:nvSpPr>
+        <p:spPr>
+          <a:xfrm>
+            <a:off x="7187184" y="5257800"/>
+            <a:ext cx="4041648" cy="320040"/>
           </a:xfrm>
           <a:prstGeom prst="rect">
             <a:avLst/>
@@ -20416,7 +22600,7 @@
               <a:lnSpc>
                 <a:spcPct val="100000"/>
               </a:lnSpc>
-              <a:defRPr sz="1050" b="1">
+              <a:defRPr sz="960" b="1">
                 <a:solidFill>
                   <a:srgbClr val="FFE2DB"/>
                 </a:solidFill>
@@ -20431,7 +22615,7 @@
       </p:sp>
       <p:sp>
         <p:nvSpPr>
-          <p:cNvPr id="33" name="TextBox 32"/>
+          <p:cNvPr id="37" name="TextBox 36"/>
           <p:cNvSpPr txBox="1"/>
           <p:nvPr/>
         </p:nvSpPr>
@@ -20941,7 +23125,7 @@
         <p:spPr>
           <a:xfrm>
             <a:off x="685800" y="1828800"/>
-            <a:ext cx="2880360" cy="932688"/>
+            <a:ext cx="2880360" cy="841248"/>
           </a:xfrm>
           <a:prstGeom prst="roundRect">
             <a:avLst/>
@@ -20986,7 +23170,7 @@
         <p:spPr>
           <a:xfrm>
             <a:off x="685800" y="1828800"/>
-            <a:ext cx="91440" cy="932688"/>
+            <a:ext cx="91440" cy="841248"/>
           </a:xfrm>
           <a:prstGeom prst="rect">
             <a:avLst/>
@@ -21070,7 +23254,7 @@
         <p:spPr>
           <a:xfrm>
             <a:off x="886968" y="2212848"/>
-            <a:ext cx="2551176" cy="457200"/>
+            <a:ext cx="2551176" cy="365760"/>
           </a:xfrm>
           <a:prstGeom prst="rect">
             <a:avLst/>
@@ -21087,7 +23271,7 @@
               <a:lnSpc>
                 <a:spcPct val="95000"/>
               </a:lnSpc>
-              <a:defRPr sz="1120" b="0">
+              <a:defRPr sz="1090" b="0">
                 <a:solidFill>
                   <a:srgbClr val="121217"/>
                 </a:solidFill>
@@ -21109,7 +23293,7 @@
         <p:spPr>
           <a:xfrm>
             <a:off x="3730752" y="1828800"/>
-            <a:ext cx="2880360" cy="932688"/>
+            <a:ext cx="2880360" cy="841248"/>
           </a:xfrm>
           <a:prstGeom prst="roundRect">
             <a:avLst/>
@@ -21154,7 +23338,7 @@
         <p:spPr>
           <a:xfrm>
             <a:off x="3730752" y="1828800"/>
-            <a:ext cx="91440" cy="932688"/>
+            <a:ext cx="91440" cy="841248"/>
           </a:xfrm>
           <a:prstGeom prst="rect">
             <a:avLst/>
@@ -21224,7 +23408,7 @@
               </a:defRPr>
             </a:pPr>
             <a:r>
-              <a:t>WHAT CHANGED</a:t>
+              <a:t>PROBLEM IT SOLVES</a:t>
             </a:r>
           </a:p>
         </p:txBody>
@@ -21238,7 +23422,7 @@
         <p:spPr>
           <a:xfrm>
             <a:off x="3931920" y="2212848"/>
-            <a:ext cx="2551176" cy="457200"/>
+            <a:ext cx="2551176" cy="365760"/>
           </a:xfrm>
           <a:prstGeom prst="rect">
             <a:avLst/>
@@ -21255,7 +23439,7 @@
               <a:lnSpc>
                 <a:spcPct val="95000"/>
               </a:lnSpc>
-              <a:defRPr sz="1070" b="0">
+              <a:defRPr sz="990" b="0">
                 <a:solidFill>
                   <a:srgbClr val="121217"/>
                 </a:solidFill>
@@ -21263,7 +23447,7 @@
               </a:defRPr>
             </a:pPr>
             <a:r>
-              <a:t>A semantic graph built from tables, dashboards, queries, apps, usage and ownership signals.</a:t>
+              <a:t>AI does not naturally understand company language, metric definitions or relationships. It solves the “how does the AI know what sales, margin, customer or product actually mean here?” problem.</a:t>
             </a:r>
           </a:p>
         </p:txBody>
@@ -21276,8 +23460,8 @@
         </p:nvSpPr>
         <p:spPr>
           <a:xfrm>
-            <a:off x="685800" y="2944368"/>
-            <a:ext cx="5925312" cy="1572768"/>
+            <a:off x="685800" y="2834640"/>
+            <a:ext cx="5925312" cy="1353312"/>
           </a:xfrm>
           <a:prstGeom prst="roundRect">
             <a:avLst/>
@@ -21321,8 +23505,8 @@
         </p:nvSpPr>
         <p:spPr>
           <a:xfrm>
-            <a:off x="685800" y="2944368"/>
-            <a:ext cx="91440" cy="1572768"/>
+            <a:off x="685800" y="2834640"/>
+            <a:ext cx="91440" cy="1353312"/>
           </a:xfrm>
           <a:prstGeom prst="rect">
             <a:avLst/>
@@ -21366,7 +23550,7 @@
         </p:nvSpPr>
         <p:spPr>
           <a:xfrm>
-            <a:off x="886968" y="3063240"/>
+            <a:off x="886968" y="2953512"/>
             <a:ext cx="5596128" cy="228600"/>
           </a:xfrm>
           <a:prstGeom prst="rect">
@@ -21405,8 +23589,8 @@
         </p:nvSpPr>
         <p:spPr>
           <a:xfrm>
-            <a:off x="886968" y="3328416"/>
-            <a:ext cx="5596128" cy="1097280"/>
+            <a:off x="886968" y="3218688"/>
+            <a:ext cx="5596128" cy="877824"/>
           </a:xfrm>
           <a:prstGeom prst="rect">
             <a:avLst/>
@@ -21423,7 +23607,7 @@
               <a:lnSpc>
                 <a:spcPct val="95000"/>
               </a:lnSpc>
-              <a:defRPr sz="1090" b="0">
+              <a:defRPr sz="990" b="0">
                 <a:solidFill>
                   <a:srgbClr val="121217"/>
                 </a:solidFill>
@@ -21444,8 +23628,8 @@
         </p:nvSpPr>
         <p:spPr>
           <a:xfrm>
-            <a:off x="685800" y="4700016"/>
-            <a:ext cx="5925312" cy="1078992"/>
+            <a:off x="685800" y="4352544"/>
+            <a:ext cx="5925312" cy="987552"/>
           </a:xfrm>
           <a:prstGeom prst="roundRect">
             <a:avLst/>
@@ -21489,8 +23673,8 @@
         </p:nvSpPr>
         <p:spPr>
           <a:xfrm>
-            <a:off x="685800" y="4700016"/>
-            <a:ext cx="91440" cy="1078992"/>
+            <a:off x="685800" y="4352544"/>
+            <a:ext cx="91440" cy="987552"/>
           </a:xfrm>
           <a:prstGeom prst="rect">
             <a:avLst/>
@@ -21534,7 +23718,7 @@
         </p:nvSpPr>
         <p:spPr>
           <a:xfrm>
-            <a:off x="886968" y="4818888"/>
+            <a:off x="886968" y="4471416"/>
             <a:ext cx="5596128" cy="228600"/>
           </a:xfrm>
           <a:prstGeom prst="rect">
@@ -21560,7 +23744,7 @@
               </a:defRPr>
             </a:pPr>
             <a:r>
-              <a:t>WHAT IT MEANS TO CUSTOMERS</a:t>
+              <a:t>CUSTOMER IMPACT EXAMPLE</a:t>
             </a:r>
           </a:p>
         </p:txBody>
@@ -21573,8 +23757,8 @@
         </p:nvSpPr>
         <p:spPr>
           <a:xfrm>
-            <a:off x="886968" y="5084064"/>
-            <a:ext cx="5596128" cy="603503"/>
+            <a:off x="886968" y="4736592"/>
+            <a:ext cx="5596128" cy="512064"/>
           </a:xfrm>
           <a:prstGeom prst="rect">
             <a:avLst/>
@@ -21591,7 +23775,7 @@
               <a:lnSpc>
                 <a:spcPct val="95000"/>
               </a:lnSpc>
-              <a:defRPr sz="1110" b="0">
+              <a:defRPr sz="1030" b="0">
                 <a:solidFill>
                   <a:srgbClr val="121217"/>
                 </a:solidFill>
@@ -21607,6 +23791,174 @@
       <p:sp>
         <p:nvSpPr>
           <p:cNvPr id="29" name="Rounded Rectangle 28"/>
+          <p:cNvSpPr/>
+          <p:nvPr/>
+        </p:nvSpPr>
+        <p:spPr>
+          <a:xfrm>
+            <a:off x="685800" y="5504688"/>
+            <a:ext cx="5925312" cy="384048"/>
+          </a:xfrm>
+          <a:prstGeom prst="roundRect">
+            <a:avLst/>
+          </a:prstGeom>
+          <a:solidFill>
+            <a:srgbClr val="FFFFFF"/>
+          </a:solidFill>
+          <a:ln w="10160">
+            <a:solidFill>
+              <a:srgbClr val="E2DDD2"/>
+            </a:solidFill>
+          </a:ln>
+        </p:spPr>
+        <p:style>
+          <a:lnRef idx="1">
+            <a:schemeClr val="accent1"/>
+          </a:lnRef>
+          <a:fillRef idx="3">
+            <a:schemeClr val="accent1"/>
+          </a:fillRef>
+          <a:effectRef idx="2">
+            <a:schemeClr val="accent1"/>
+          </a:effectRef>
+          <a:fontRef idx="minor">
+            <a:schemeClr val="lt1"/>
+          </a:fontRef>
+        </p:style>
+        <p:txBody>
+          <a:bodyPr rtlCol="0" anchor="ctr"/>
+          <a:lstStyle/>
+          <a:p>
+            <a:pPr algn="ctr"/>
+          </a:p>
+        </p:txBody>
+      </p:sp>
+      <p:sp>
+        <p:nvSpPr>
+          <p:cNvPr id="30" name="Rectangle 29"/>
+          <p:cNvSpPr/>
+          <p:nvPr/>
+        </p:nvSpPr>
+        <p:spPr>
+          <a:xfrm>
+            <a:off x="685800" y="5504688"/>
+            <a:ext cx="91440" cy="384048"/>
+          </a:xfrm>
+          <a:prstGeom prst="rect">
+            <a:avLst/>
+          </a:prstGeom>
+          <a:solidFill>
+            <a:srgbClr val="7A47B4"/>
+          </a:solidFill>
+          <a:ln w="10160">
+            <a:solidFill>
+              <a:srgbClr val="7A47B4"/>
+            </a:solidFill>
+          </a:ln>
+        </p:spPr>
+        <p:style>
+          <a:lnRef idx="1">
+            <a:schemeClr val="accent1"/>
+          </a:lnRef>
+          <a:fillRef idx="3">
+            <a:schemeClr val="accent1"/>
+          </a:fillRef>
+          <a:effectRef idx="2">
+            <a:schemeClr val="accent1"/>
+          </a:effectRef>
+          <a:fontRef idx="minor">
+            <a:schemeClr val="lt1"/>
+          </a:fontRef>
+        </p:style>
+        <p:txBody>
+          <a:bodyPr rtlCol="0" anchor="ctr"/>
+          <a:lstStyle/>
+          <a:p>
+            <a:pPr algn="ctr"/>
+          </a:p>
+        </p:txBody>
+      </p:sp>
+      <p:sp>
+        <p:nvSpPr>
+          <p:cNvPr id="31" name="TextBox 30"/>
+          <p:cNvSpPr txBox="1"/>
+          <p:nvPr/>
+        </p:nvSpPr>
+        <p:spPr>
+          <a:xfrm>
+            <a:off x="886968" y="5623559"/>
+            <a:ext cx="5596128" cy="228600"/>
+          </a:xfrm>
+          <a:prstGeom prst="rect">
+            <a:avLst/>
+          </a:prstGeom>
+          <a:noFill/>
+        </p:spPr>
+        <p:txBody>
+          <a:bodyPr wrap="square" lIns="27432" rIns="27432" tIns="18288" bIns="18288">
+            <a:normAutofit/>
+          </a:bodyPr>
+          <a:lstStyle/>
+          <a:p>
+            <a:pPr>
+              <a:lnSpc>
+                <a:spcPct val="100000"/>
+              </a:lnSpc>
+              <a:defRPr sz="720" b="1">
+                <a:solidFill>
+                  <a:srgbClr val="5E5B54"/>
+                </a:solidFill>
+                <a:latin typeface="Aptos"/>
+              </a:defRPr>
+            </a:pPr>
+            <a:r>
+              <a:t>WHAT CHANGED</a:t>
+            </a:r>
+          </a:p>
+        </p:txBody>
+      </p:sp>
+      <p:sp>
+        <p:nvSpPr>
+          <p:cNvPr id="32" name="TextBox 31"/>
+          <p:cNvSpPr txBox="1"/>
+          <p:nvPr/>
+        </p:nvSpPr>
+        <p:spPr>
+          <a:xfrm>
+            <a:off x="886968" y="5888736"/>
+            <a:ext cx="5596128" cy="-91440"/>
+          </a:xfrm>
+          <a:prstGeom prst="rect">
+            <a:avLst/>
+          </a:prstGeom>
+          <a:noFill/>
+        </p:spPr>
+        <p:txBody>
+          <a:bodyPr wrap="square" lIns="27432" rIns="27432" tIns="18288" bIns="18288">
+            <a:normAutofit/>
+          </a:bodyPr>
+          <a:lstStyle/>
+          <a:p>
+            <a:pPr>
+              <a:lnSpc>
+                <a:spcPct val="95000"/>
+              </a:lnSpc>
+              <a:defRPr sz="780" b="0">
+                <a:solidFill>
+                  <a:srgbClr val="121217"/>
+                </a:solidFill>
+                <a:latin typeface="Aptos"/>
+              </a:defRPr>
+            </a:pPr>
+            <a:r>
+              <a:t>A semantic graph built from tables, dashboards, queries, apps, usage and ownership signals.</a:t>
+            </a:r>
+          </a:p>
+        </p:txBody>
+      </p:sp>
+      <p:sp>
+        <p:nvSpPr>
+          <p:cNvPr id="33" name="Rounded Rectangle 32"/>
           <p:cNvSpPr/>
           <p:nvPr/>
         </p:nvSpPr>
@@ -21651,7 +24003,7 @@
       </p:sp>
       <p:sp>
         <p:nvSpPr>
-          <p:cNvPr id="30" name="TextBox 29"/>
+          <p:cNvPr id="34" name="TextBox 33"/>
           <p:cNvSpPr txBox="1"/>
           <p:nvPr/>
         </p:nvSpPr>
@@ -21690,14 +24042,14 @@
       </p:sp>
       <p:sp>
         <p:nvSpPr>
-          <p:cNvPr id="31" name="TextBox 30"/>
+          <p:cNvPr id="35" name="TextBox 34"/>
           <p:cNvSpPr txBox="1"/>
           <p:nvPr/>
         </p:nvSpPr>
         <p:spPr>
           <a:xfrm>
             <a:off x="7187184" y="4151376"/>
-            <a:ext cx="4041648" cy="1078992"/>
+            <a:ext cx="4041648" cy="1024128"/>
           </a:xfrm>
           <a:prstGeom prst="rect">
             <a:avLst/>
@@ -21714,7 +24066,7 @@
               <a:lnSpc>
                 <a:spcPct val="95000"/>
               </a:lnSpc>
-              <a:defRPr sz="1230" b="1">
+              <a:defRPr sz="1160" b="1">
                 <a:solidFill>
                   <a:srgbClr val="FFFFFF"/>
                 </a:solidFill>
@@ -21729,14 +24081,14 @@
       </p:sp>
       <p:sp>
         <p:nvSpPr>
-          <p:cNvPr id="32" name="TextBox 31"/>
-          <p:cNvSpPr txBox="1"/>
-          <p:nvPr/>
-        </p:nvSpPr>
-        <p:spPr>
-          <a:xfrm>
-            <a:off x="7187184" y="5303520"/>
-            <a:ext cx="4041648" cy="274320"/>
+          <p:cNvPr id="36" name="TextBox 35"/>
+          <p:cNvSpPr txBox="1"/>
+          <p:nvPr/>
+        </p:nvSpPr>
+        <p:spPr>
+          <a:xfrm>
+            <a:off x="7187184" y="5257800"/>
+            <a:ext cx="4041648" cy="320040"/>
           </a:xfrm>
           <a:prstGeom prst="rect">
             <a:avLst/>
@@ -21753,7 +24105,7 @@
               <a:lnSpc>
                 <a:spcPct val="100000"/>
               </a:lnSpc>
-              <a:defRPr sz="1050" b="1">
+              <a:defRPr sz="960" b="1">
                 <a:solidFill>
                   <a:srgbClr val="FFE2DB"/>
                 </a:solidFill>
@@ -21768,7 +24120,7 @@
       </p:sp>
       <p:sp>
         <p:nvSpPr>
-          <p:cNvPr id="33" name="TextBox 32"/>
+          <p:cNvPr id="37" name="TextBox 36"/>
           <p:cNvSpPr txBox="1"/>
           <p:nvPr/>
         </p:nvSpPr>
@@ -22278,7 +24630,7 @@
         <p:spPr>
           <a:xfrm>
             <a:off x="685800" y="1828800"/>
-            <a:ext cx="2880360" cy="932688"/>
+            <a:ext cx="2880360" cy="841248"/>
           </a:xfrm>
           <a:prstGeom prst="roundRect">
             <a:avLst/>
@@ -22323,7 +24675,7 @@
         <p:spPr>
           <a:xfrm>
             <a:off x="685800" y="1828800"/>
-            <a:ext cx="91440" cy="932688"/>
+            <a:ext cx="91440" cy="841248"/>
           </a:xfrm>
           <a:prstGeom prst="rect">
             <a:avLst/>
@@ -22407,7 +24759,7 @@
         <p:spPr>
           <a:xfrm>
             <a:off x="886968" y="2212848"/>
-            <a:ext cx="2551176" cy="457200"/>
+            <a:ext cx="2551176" cy="365760"/>
           </a:xfrm>
           <a:prstGeom prst="rect">
             <a:avLst/>
@@ -22424,7 +24776,7 @@
               <a:lnSpc>
                 <a:spcPct val="95000"/>
               </a:lnSpc>
-              <a:defRPr sz="1120" b="0">
+              <a:defRPr sz="1090" b="0">
                 <a:solidFill>
                   <a:srgbClr val="121217"/>
                 </a:solidFill>
@@ -22446,7 +24798,7 @@
         <p:spPr>
           <a:xfrm>
             <a:off x="3730752" y="1828800"/>
-            <a:ext cx="2880360" cy="932688"/>
+            <a:ext cx="2880360" cy="841248"/>
           </a:xfrm>
           <a:prstGeom prst="roundRect">
             <a:avLst/>
@@ -22491,7 +24843,7 @@
         <p:spPr>
           <a:xfrm>
             <a:off x="3730752" y="1828800"/>
-            <a:ext cx="91440" cy="932688"/>
+            <a:ext cx="91440" cy="841248"/>
           </a:xfrm>
           <a:prstGeom prst="rect">
             <a:avLst/>
@@ -22561,7 +24913,7 @@
               </a:defRPr>
             </a:pPr>
             <a:r>
-              <a:t>WHAT CHANGED</a:t>
+              <a:t>PROBLEM IT SOLVES</a:t>
             </a:r>
           </a:p>
         </p:txBody>
@@ -22575,7 +24927,7 @@
         <p:spPr>
           <a:xfrm>
             <a:off x="3931920" y="2212848"/>
-            <a:ext cx="2551176" cy="457200"/>
+            <a:ext cx="2551176" cy="365760"/>
           </a:xfrm>
           <a:prstGeom prst="rect">
             <a:avLst/>
@@ -22592,7 +24944,7 @@
               <a:lnSpc>
                 <a:spcPct val="95000"/>
               </a:lnSpc>
-              <a:defRPr sz="1070" b="0">
+              <a:defRPr sz="990" b="0">
                 <a:solidFill>
                   <a:srgbClr val="121217"/>
                 </a:solidFill>
@@ -22600,7 +24952,7 @@
               </a:defRPr>
             </a:pPr>
             <a:r>
-              <a:t>Ontology grounded answers, permission checks and sharable analytics agents.</a:t>
+              <a:t>Dashboards answer yesterday’s fixed questions, but teams need conversational, governed help. It solves the “how do we turn BI into reusable assistants?” problem.</a:t>
             </a:r>
           </a:p>
         </p:txBody>
@@ -22613,8 +24965,8 @@
         </p:nvSpPr>
         <p:spPr>
           <a:xfrm>
-            <a:off x="685800" y="2944368"/>
-            <a:ext cx="5925312" cy="1572768"/>
+            <a:off x="685800" y="2834640"/>
+            <a:ext cx="5925312" cy="1353312"/>
           </a:xfrm>
           <a:prstGeom prst="roundRect">
             <a:avLst/>
@@ -22658,8 +25010,8 @@
         </p:nvSpPr>
         <p:spPr>
           <a:xfrm>
-            <a:off x="685800" y="2944368"/>
-            <a:ext cx="91440" cy="1572768"/>
+            <a:off x="685800" y="2834640"/>
+            <a:ext cx="91440" cy="1353312"/>
           </a:xfrm>
           <a:prstGeom prst="rect">
             <a:avLst/>
@@ -22703,7 +25055,7 @@
         </p:nvSpPr>
         <p:spPr>
           <a:xfrm>
-            <a:off x="886968" y="3063240"/>
+            <a:off x="886968" y="2953512"/>
             <a:ext cx="5596128" cy="228600"/>
           </a:xfrm>
           <a:prstGeom prst="rect">
@@ -22742,8 +25094,8 @@
         </p:nvSpPr>
         <p:spPr>
           <a:xfrm>
-            <a:off x="886968" y="3328416"/>
-            <a:ext cx="5596128" cy="1097280"/>
+            <a:off x="886968" y="3218688"/>
+            <a:ext cx="5596128" cy="877824"/>
           </a:xfrm>
           <a:prstGeom prst="rect">
             <a:avLst/>
@@ -22760,7 +25112,7 @@
               <a:lnSpc>
                 <a:spcPct val="95000"/>
               </a:lnSpc>
-              <a:defRPr sz="1090" b="0">
+              <a:defRPr sz="990" b="0">
                 <a:solidFill>
                   <a:srgbClr val="121217"/>
                 </a:solidFill>
@@ -22781,8 +25133,8 @@
         </p:nvSpPr>
         <p:spPr>
           <a:xfrm>
-            <a:off x="685800" y="4700016"/>
-            <a:ext cx="5925312" cy="1078992"/>
+            <a:off x="685800" y="4352544"/>
+            <a:ext cx="5925312" cy="987552"/>
           </a:xfrm>
           <a:prstGeom prst="roundRect">
             <a:avLst/>
@@ -22826,8 +25178,8 @@
         </p:nvSpPr>
         <p:spPr>
           <a:xfrm>
-            <a:off x="685800" y="4700016"/>
-            <a:ext cx="91440" cy="1078992"/>
+            <a:off x="685800" y="4352544"/>
+            <a:ext cx="91440" cy="987552"/>
           </a:xfrm>
           <a:prstGeom prst="rect">
             <a:avLst/>
@@ -22871,7 +25223,7 @@
         </p:nvSpPr>
         <p:spPr>
           <a:xfrm>
-            <a:off x="886968" y="4818888"/>
+            <a:off x="886968" y="4471416"/>
             <a:ext cx="5596128" cy="228600"/>
           </a:xfrm>
           <a:prstGeom prst="rect">
@@ -22897,7 +25249,7 @@
               </a:defRPr>
             </a:pPr>
             <a:r>
-              <a:t>WHAT IT MEANS TO CUSTOMERS</a:t>
+              <a:t>CUSTOMER IMPACT EXAMPLE</a:t>
             </a:r>
           </a:p>
         </p:txBody>
@@ -22910,8 +25262,8 @@
         </p:nvSpPr>
         <p:spPr>
           <a:xfrm>
-            <a:off x="886968" y="5084064"/>
-            <a:ext cx="5596128" cy="603503"/>
+            <a:off x="886968" y="4736592"/>
+            <a:ext cx="5596128" cy="512064"/>
           </a:xfrm>
           <a:prstGeom prst="rect">
             <a:avLst/>
@@ -22928,7 +25280,7 @@
               <a:lnSpc>
                 <a:spcPct val="95000"/>
               </a:lnSpc>
-              <a:defRPr sz="1110" b="0">
+              <a:defRPr sz="1030" b="0">
                 <a:solidFill>
                   <a:srgbClr val="121217"/>
                 </a:solidFill>
@@ -22944,6 +25296,174 @@
       <p:sp>
         <p:nvSpPr>
           <p:cNvPr id="29" name="Rounded Rectangle 28"/>
+          <p:cNvSpPr/>
+          <p:nvPr/>
+        </p:nvSpPr>
+        <p:spPr>
+          <a:xfrm>
+            <a:off x="685800" y="5504688"/>
+            <a:ext cx="5925312" cy="384048"/>
+          </a:xfrm>
+          <a:prstGeom prst="roundRect">
+            <a:avLst/>
+          </a:prstGeom>
+          <a:solidFill>
+            <a:srgbClr val="FFFFFF"/>
+          </a:solidFill>
+          <a:ln w="10160">
+            <a:solidFill>
+              <a:srgbClr val="E2DDD2"/>
+            </a:solidFill>
+          </a:ln>
+        </p:spPr>
+        <p:style>
+          <a:lnRef idx="1">
+            <a:schemeClr val="accent1"/>
+          </a:lnRef>
+          <a:fillRef idx="3">
+            <a:schemeClr val="accent1"/>
+          </a:fillRef>
+          <a:effectRef idx="2">
+            <a:schemeClr val="accent1"/>
+          </a:effectRef>
+          <a:fontRef idx="minor">
+            <a:schemeClr val="lt1"/>
+          </a:fontRef>
+        </p:style>
+        <p:txBody>
+          <a:bodyPr rtlCol="0" anchor="ctr"/>
+          <a:lstStyle/>
+          <a:p>
+            <a:pPr algn="ctr"/>
+          </a:p>
+        </p:txBody>
+      </p:sp>
+      <p:sp>
+        <p:nvSpPr>
+          <p:cNvPr id="30" name="Rectangle 29"/>
+          <p:cNvSpPr/>
+          <p:nvPr/>
+        </p:nvSpPr>
+        <p:spPr>
+          <a:xfrm>
+            <a:off x="685800" y="5504688"/>
+            <a:ext cx="91440" cy="384048"/>
+          </a:xfrm>
+          <a:prstGeom prst="rect">
+            <a:avLst/>
+          </a:prstGeom>
+          <a:solidFill>
+            <a:srgbClr val="7A47B4"/>
+          </a:solidFill>
+          <a:ln w="10160">
+            <a:solidFill>
+              <a:srgbClr val="7A47B4"/>
+            </a:solidFill>
+          </a:ln>
+        </p:spPr>
+        <p:style>
+          <a:lnRef idx="1">
+            <a:schemeClr val="accent1"/>
+          </a:lnRef>
+          <a:fillRef idx="3">
+            <a:schemeClr val="accent1"/>
+          </a:fillRef>
+          <a:effectRef idx="2">
+            <a:schemeClr val="accent1"/>
+          </a:effectRef>
+          <a:fontRef idx="minor">
+            <a:schemeClr val="lt1"/>
+          </a:fontRef>
+        </p:style>
+        <p:txBody>
+          <a:bodyPr rtlCol="0" anchor="ctr"/>
+          <a:lstStyle/>
+          <a:p>
+            <a:pPr algn="ctr"/>
+          </a:p>
+        </p:txBody>
+      </p:sp>
+      <p:sp>
+        <p:nvSpPr>
+          <p:cNvPr id="31" name="TextBox 30"/>
+          <p:cNvSpPr txBox="1"/>
+          <p:nvPr/>
+        </p:nvSpPr>
+        <p:spPr>
+          <a:xfrm>
+            <a:off x="886968" y="5623559"/>
+            <a:ext cx="5596128" cy="228600"/>
+          </a:xfrm>
+          <a:prstGeom prst="rect">
+            <a:avLst/>
+          </a:prstGeom>
+          <a:noFill/>
+        </p:spPr>
+        <p:txBody>
+          <a:bodyPr wrap="square" lIns="27432" rIns="27432" tIns="18288" bIns="18288">
+            <a:normAutofit/>
+          </a:bodyPr>
+          <a:lstStyle/>
+          <a:p>
+            <a:pPr>
+              <a:lnSpc>
+                <a:spcPct val="100000"/>
+              </a:lnSpc>
+              <a:defRPr sz="720" b="1">
+                <a:solidFill>
+                  <a:srgbClr val="5E5B54"/>
+                </a:solidFill>
+                <a:latin typeface="Aptos"/>
+              </a:defRPr>
+            </a:pPr>
+            <a:r>
+              <a:t>WHAT CHANGED</a:t>
+            </a:r>
+          </a:p>
+        </p:txBody>
+      </p:sp>
+      <p:sp>
+        <p:nvSpPr>
+          <p:cNvPr id="32" name="TextBox 31"/>
+          <p:cNvSpPr txBox="1"/>
+          <p:nvPr/>
+        </p:nvSpPr>
+        <p:spPr>
+          <a:xfrm>
+            <a:off x="886968" y="5888736"/>
+            <a:ext cx="5596128" cy="-91440"/>
+          </a:xfrm>
+          <a:prstGeom prst="rect">
+            <a:avLst/>
+          </a:prstGeom>
+          <a:noFill/>
+        </p:spPr>
+        <p:txBody>
+          <a:bodyPr wrap="square" lIns="27432" rIns="27432" tIns="18288" bIns="18288">
+            <a:normAutofit/>
+          </a:bodyPr>
+          <a:lstStyle/>
+          <a:p>
+            <a:pPr>
+              <a:lnSpc>
+                <a:spcPct val="95000"/>
+              </a:lnSpc>
+              <a:defRPr sz="780" b="0">
+                <a:solidFill>
+                  <a:srgbClr val="121217"/>
+                </a:solidFill>
+                <a:latin typeface="Aptos"/>
+              </a:defRPr>
+            </a:pPr>
+            <a:r>
+              <a:t>Ontology grounded answers, permission checks and sharable analytics agents.</a:t>
+            </a:r>
+          </a:p>
+        </p:txBody>
+      </p:sp>
+      <p:sp>
+        <p:nvSpPr>
+          <p:cNvPr id="33" name="Rounded Rectangle 32"/>
           <p:cNvSpPr/>
           <p:nvPr/>
         </p:nvSpPr>
@@ -22988,7 +25508,7 @@
       </p:sp>
       <p:sp>
         <p:nvSpPr>
-          <p:cNvPr id="30" name="TextBox 29"/>
+          <p:cNvPr id="34" name="TextBox 33"/>
           <p:cNvSpPr txBox="1"/>
           <p:nvPr/>
         </p:nvSpPr>
@@ -23027,14 +25547,14 @@
       </p:sp>
       <p:sp>
         <p:nvSpPr>
-          <p:cNvPr id="31" name="TextBox 30"/>
+          <p:cNvPr id="35" name="TextBox 34"/>
           <p:cNvSpPr txBox="1"/>
           <p:nvPr/>
         </p:nvSpPr>
         <p:spPr>
           <a:xfrm>
             <a:off x="7187184" y="4151376"/>
-            <a:ext cx="4041648" cy="1078992"/>
+            <a:ext cx="4041648" cy="1024128"/>
           </a:xfrm>
           <a:prstGeom prst="rect">
             <a:avLst/>
@@ -23051,7 +25571,7 @@
               <a:lnSpc>
                 <a:spcPct val="95000"/>
               </a:lnSpc>
-              <a:defRPr sz="1230" b="1">
+              <a:defRPr sz="1160" b="1">
                 <a:solidFill>
                   <a:srgbClr val="FFFFFF"/>
                 </a:solidFill>
@@ -23066,14 +25586,14 @@
       </p:sp>
       <p:sp>
         <p:nvSpPr>
-          <p:cNvPr id="32" name="TextBox 31"/>
-          <p:cNvSpPr txBox="1"/>
-          <p:nvPr/>
-        </p:nvSpPr>
-        <p:spPr>
-          <a:xfrm>
-            <a:off x="7187184" y="5303520"/>
-            <a:ext cx="4041648" cy="274320"/>
+          <p:cNvPr id="36" name="TextBox 35"/>
+          <p:cNvSpPr txBox="1"/>
+          <p:nvPr/>
+        </p:nvSpPr>
+        <p:spPr>
+          <a:xfrm>
+            <a:off x="7187184" y="5257800"/>
+            <a:ext cx="4041648" cy="320040"/>
           </a:xfrm>
           <a:prstGeom prst="rect">
             <a:avLst/>
@@ -23090,7 +25610,7 @@
               <a:lnSpc>
                 <a:spcPct val="100000"/>
               </a:lnSpc>
-              <a:defRPr sz="1050" b="1">
+              <a:defRPr sz="960" b="1">
                 <a:solidFill>
                   <a:srgbClr val="FFE2DB"/>
                 </a:solidFill>
@@ -23105,7 +25625,7 @@
       </p:sp>
       <p:sp>
         <p:nvSpPr>
-          <p:cNvPr id="33" name="TextBox 32"/>
+          <p:cNvPr id="37" name="TextBox 36"/>
           <p:cNvSpPr txBox="1"/>
           <p:nvPr/>
         </p:nvSpPr>
@@ -23615,7 +26135,7 @@
         <p:spPr>
           <a:xfrm>
             <a:off x="685800" y="1828800"/>
-            <a:ext cx="2880360" cy="932688"/>
+            <a:ext cx="2880360" cy="841248"/>
           </a:xfrm>
           <a:prstGeom prst="roundRect">
             <a:avLst/>
@@ -23660,7 +26180,7 @@
         <p:spPr>
           <a:xfrm>
             <a:off x="685800" y="1828800"/>
-            <a:ext cx="91440" cy="932688"/>
+            <a:ext cx="91440" cy="841248"/>
           </a:xfrm>
           <a:prstGeom prst="rect">
             <a:avLst/>
@@ -23744,7 +26264,7 @@
         <p:spPr>
           <a:xfrm>
             <a:off x="886968" y="2212848"/>
-            <a:ext cx="2551176" cy="457200"/>
+            <a:ext cx="2551176" cy="365760"/>
           </a:xfrm>
           <a:prstGeom prst="rect">
             <a:avLst/>
@@ -23761,7 +26281,7 @@
               <a:lnSpc>
                 <a:spcPct val="95000"/>
               </a:lnSpc>
-              <a:defRPr sz="1120" b="0">
+              <a:defRPr sz="1090" b="0">
                 <a:solidFill>
                   <a:srgbClr val="121217"/>
                 </a:solidFill>
@@ -23783,7 +26303,7 @@
         <p:spPr>
           <a:xfrm>
             <a:off x="3730752" y="1828800"/>
-            <a:ext cx="2880360" cy="932688"/>
+            <a:ext cx="2880360" cy="841248"/>
           </a:xfrm>
           <a:prstGeom prst="roundRect">
             <a:avLst/>
@@ -23828,7 +26348,7 @@
         <p:spPr>
           <a:xfrm>
             <a:off x="3730752" y="1828800"/>
-            <a:ext cx="91440" cy="932688"/>
+            <a:ext cx="91440" cy="841248"/>
           </a:xfrm>
           <a:prstGeom prst="rect">
             <a:avLst/>
@@ -23898,7 +26418,7 @@
               </a:defRPr>
             </a:pPr>
             <a:r>
-              <a:t>WHAT CHANGED</a:t>
+              <a:t>PROBLEM IT SOLVES</a:t>
             </a:r>
           </a:p>
         </p:txBody>
@@ -23912,7 +26432,7 @@
         <p:spPr>
           <a:xfrm>
             <a:off x="3931920" y="2212848"/>
-            <a:ext cx="2551176" cy="457200"/>
+            <a:ext cx="2551176" cy="365760"/>
           </a:xfrm>
           <a:prstGeom prst="rect">
             <a:avLst/>
@@ -23929,7 +26449,7 @@
               <a:lnSpc>
                 <a:spcPct val="95000"/>
               </a:lnSpc>
-              <a:defRPr sz="1070" b="0">
+              <a:defRPr sz="990" b="0">
                 <a:solidFill>
                   <a:srgbClr val="121217"/>
                 </a:solidFill>
@@ -23937,7 +26457,7 @@
               </a:defRPr>
             </a:pPr>
             <a:r>
-              <a:t>The Reyden engine, direct Delta and Iceberg reads, millisecond query claims and less need for a separate real time serving layer.</a:t>
+              <a:t>Traditional analytics can be too slow for operational decisions. It solves the “how do apps and agents act on fresh data without a separate real-time stack?” problem.</a:t>
             </a:r>
           </a:p>
         </p:txBody>
@@ -23950,8 +26470,8 @@
         </p:nvSpPr>
         <p:spPr>
           <a:xfrm>
-            <a:off x="685800" y="2944368"/>
-            <a:ext cx="5925312" cy="1572768"/>
+            <a:off x="685800" y="2834640"/>
+            <a:ext cx="5925312" cy="1353312"/>
           </a:xfrm>
           <a:prstGeom prst="roundRect">
             <a:avLst/>
@@ -23995,8 +26515,8 @@
         </p:nvSpPr>
         <p:spPr>
           <a:xfrm>
-            <a:off x="685800" y="2944368"/>
-            <a:ext cx="91440" cy="1572768"/>
+            <a:off x="685800" y="2834640"/>
+            <a:ext cx="91440" cy="1353312"/>
           </a:xfrm>
           <a:prstGeom prst="rect">
             <a:avLst/>
@@ -24040,7 +26560,7 @@
         </p:nvSpPr>
         <p:spPr>
           <a:xfrm>
-            <a:off x="886968" y="3063240"/>
+            <a:off x="886968" y="2953512"/>
             <a:ext cx="5596128" cy="228600"/>
           </a:xfrm>
           <a:prstGeom prst="rect">
@@ -24079,8 +26599,8 @@
         </p:nvSpPr>
         <p:spPr>
           <a:xfrm>
-            <a:off x="886968" y="3328416"/>
-            <a:ext cx="5596128" cy="1097280"/>
+            <a:off x="886968" y="3218688"/>
+            <a:ext cx="5596128" cy="877824"/>
           </a:xfrm>
           <a:prstGeom prst="rect">
             <a:avLst/>
@@ -24097,7 +26617,7 @@
               <a:lnSpc>
                 <a:spcPct val="95000"/>
               </a:lnSpc>
-              <a:defRPr sz="1090" b="0">
+              <a:defRPr sz="990" b="0">
                 <a:solidFill>
                   <a:srgbClr val="121217"/>
                 </a:solidFill>
@@ -24118,8 +26638,8 @@
         </p:nvSpPr>
         <p:spPr>
           <a:xfrm>
-            <a:off x="685800" y="4700016"/>
-            <a:ext cx="5925312" cy="1078992"/>
+            <a:off x="685800" y="4352544"/>
+            <a:ext cx="5925312" cy="987552"/>
           </a:xfrm>
           <a:prstGeom prst="roundRect">
             <a:avLst/>
@@ -24163,8 +26683,8 @@
         </p:nvSpPr>
         <p:spPr>
           <a:xfrm>
-            <a:off x="685800" y="4700016"/>
-            <a:ext cx="91440" cy="1078992"/>
+            <a:off x="685800" y="4352544"/>
+            <a:ext cx="91440" cy="987552"/>
           </a:xfrm>
           <a:prstGeom prst="rect">
             <a:avLst/>
@@ -24208,7 +26728,7 @@
         </p:nvSpPr>
         <p:spPr>
           <a:xfrm>
-            <a:off x="886968" y="4818888"/>
+            <a:off x="886968" y="4471416"/>
             <a:ext cx="5596128" cy="228600"/>
           </a:xfrm>
           <a:prstGeom prst="rect">
@@ -24234,7 +26754,7 @@
               </a:defRPr>
             </a:pPr>
             <a:r>
-              <a:t>WHAT IT MEANS TO CUSTOMERS</a:t>
+              <a:t>CUSTOMER IMPACT EXAMPLE</a:t>
             </a:r>
           </a:p>
         </p:txBody>
@@ -24247,8 +26767,8 @@
         </p:nvSpPr>
         <p:spPr>
           <a:xfrm>
-            <a:off x="886968" y="5084064"/>
-            <a:ext cx="5596128" cy="603503"/>
+            <a:off x="886968" y="4736592"/>
+            <a:ext cx="5596128" cy="512064"/>
           </a:xfrm>
           <a:prstGeom prst="rect">
             <a:avLst/>
@@ -24265,7 +26785,7 @@
               <a:lnSpc>
                 <a:spcPct val="95000"/>
               </a:lnSpc>
-              <a:defRPr sz="1110" b="0">
+              <a:defRPr sz="1030" b="0">
                 <a:solidFill>
                   <a:srgbClr val="121217"/>
                 </a:solidFill>
@@ -24281,6 +26801,174 @@
       <p:sp>
         <p:nvSpPr>
           <p:cNvPr id="29" name="Rounded Rectangle 28"/>
+          <p:cNvSpPr/>
+          <p:nvPr/>
+        </p:nvSpPr>
+        <p:spPr>
+          <a:xfrm>
+            <a:off x="685800" y="5504688"/>
+            <a:ext cx="5925312" cy="384048"/>
+          </a:xfrm>
+          <a:prstGeom prst="roundRect">
+            <a:avLst/>
+          </a:prstGeom>
+          <a:solidFill>
+            <a:srgbClr val="FFFFFF"/>
+          </a:solidFill>
+          <a:ln w="10160">
+            <a:solidFill>
+              <a:srgbClr val="E2DDD2"/>
+            </a:solidFill>
+          </a:ln>
+        </p:spPr>
+        <p:style>
+          <a:lnRef idx="1">
+            <a:schemeClr val="accent1"/>
+          </a:lnRef>
+          <a:fillRef idx="3">
+            <a:schemeClr val="accent1"/>
+          </a:fillRef>
+          <a:effectRef idx="2">
+            <a:schemeClr val="accent1"/>
+          </a:effectRef>
+          <a:fontRef idx="minor">
+            <a:schemeClr val="lt1"/>
+          </a:fontRef>
+        </p:style>
+        <p:txBody>
+          <a:bodyPr rtlCol="0" anchor="ctr"/>
+          <a:lstStyle/>
+          <a:p>
+            <a:pPr algn="ctr"/>
+          </a:p>
+        </p:txBody>
+      </p:sp>
+      <p:sp>
+        <p:nvSpPr>
+          <p:cNvPr id="30" name="Rectangle 29"/>
+          <p:cNvSpPr/>
+          <p:nvPr/>
+        </p:nvSpPr>
+        <p:spPr>
+          <a:xfrm>
+            <a:off x="685800" y="5504688"/>
+            <a:ext cx="91440" cy="384048"/>
+          </a:xfrm>
+          <a:prstGeom prst="rect">
+            <a:avLst/>
+          </a:prstGeom>
+          <a:solidFill>
+            <a:srgbClr val="007C80"/>
+          </a:solidFill>
+          <a:ln w="10160">
+            <a:solidFill>
+              <a:srgbClr val="007C80"/>
+            </a:solidFill>
+          </a:ln>
+        </p:spPr>
+        <p:style>
+          <a:lnRef idx="1">
+            <a:schemeClr val="accent1"/>
+          </a:lnRef>
+          <a:fillRef idx="3">
+            <a:schemeClr val="accent1"/>
+          </a:fillRef>
+          <a:effectRef idx="2">
+            <a:schemeClr val="accent1"/>
+          </a:effectRef>
+          <a:fontRef idx="minor">
+            <a:schemeClr val="lt1"/>
+          </a:fontRef>
+        </p:style>
+        <p:txBody>
+          <a:bodyPr rtlCol="0" anchor="ctr"/>
+          <a:lstStyle/>
+          <a:p>
+            <a:pPr algn="ctr"/>
+          </a:p>
+        </p:txBody>
+      </p:sp>
+      <p:sp>
+        <p:nvSpPr>
+          <p:cNvPr id="31" name="TextBox 30"/>
+          <p:cNvSpPr txBox="1"/>
+          <p:nvPr/>
+        </p:nvSpPr>
+        <p:spPr>
+          <a:xfrm>
+            <a:off x="886968" y="5623559"/>
+            <a:ext cx="5596128" cy="228600"/>
+          </a:xfrm>
+          <a:prstGeom prst="rect">
+            <a:avLst/>
+          </a:prstGeom>
+          <a:noFill/>
+        </p:spPr>
+        <p:txBody>
+          <a:bodyPr wrap="square" lIns="27432" rIns="27432" tIns="18288" bIns="18288">
+            <a:normAutofit/>
+          </a:bodyPr>
+          <a:lstStyle/>
+          <a:p>
+            <a:pPr>
+              <a:lnSpc>
+                <a:spcPct val="100000"/>
+              </a:lnSpc>
+              <a:defRPr sz="720" b="1">
+                <a:solidFill>
+                  <a:srgbClr val="5E5B54"/>
+                </a:solidFill>
+                <a:latin typeface="Aptos"/>
+              </a:defRPr>
+            </a:pPr>
+            <a:r>
+              <a:t>WHAT CHANGED</a:t>
+            </a:r>
+          </a:p>
+        </p:txBody>
+      </p:sp>
+      <p:sp>
+        <p:nvSpPr>
+          <p:cNvPr id="32" name="TextBox 31"/>
+          <p:cNvSpPr txBox="1"/>
+          <p:nvPr/>
+        </p:nvSpPr>
+        <p:spPr>
+          <a:xfrm>
+            <a:off x="886968" y="5888736"/>
+            <a:ext cx="5596128" cy="-91440"/>
+          </a:xfrm>
+          <a:prstGeom prst="rect">
+            <a:avLst/>
+          </a:prstGeom>
+          <a:noFill/>
+        </p:spPr>
+        <p:txBody>
+          <a:bodyPr wrap="square" lIns="27432" rIns="27432" tIns="18288" bIns="18288">
+            <a:normAutofit/>
+          </a:bodyPr>
+          <a:lstStyle/>
+          <a:p>
+            <a:pPr>
+              <a:lnSpc>
+                <a:spcPct val="95000"/>
+              </a:lnSpc>
+              <a:defRPr sz="780" b="0">
+                <a:solidFill>
+                  <a:srgbClr val="121217"/>
+                </a:solidFill>
+                <a:latin typeface="Aptos"/>
+              </a:defRPr>
+            </a:pPr>
+            <a:r>
+              <a:t>The Reyden engine, direct Delta and Iceberg reads, millisecond query claims and less need for a separate real time serving layer.</a:t>
+            </a:r>
+          </a:p>
+        </p:txBody>
+      </p:sp>
+      <p:sp>
+        <p:nvSpPr>
+          <p:cNvPr id="33" name="Rounded Rectangle 32"/>
           <p:cNvSpPr/>
           <p:nvPr/>
         </p:nvSpPr>
@@ -24325,7 +27013,7 @@
       </p:sp>
       <p:sp>
         <p:nvSpPr>
-          <p:cNvPr id="30" name="TextBox 29"/>
+          <p:cNvPr id="34" name="TextBox 33"/>
           <p:cNvSpPr txBox="1"/>
           <p:nvPr/>
         </p:nvSpPr>
@@ -24364,14 +27052,14 @@
       </p:sp>
       <p:sp>
         <p:nvSpPr>
-          <p:cNvPr id="31" name="TextBox 30"/>
+          <p:cNvPr id="35" name="TextBox 34"/>
           <p:cNvSpPr txBox="1"/>
           <p:nvPr/>
         </p:nvSpPr>
         <p:spPr>
           <a:xfrm>
             <a:off x="7187184" y="4151376"/>
-            <a:ext cx="4041648" cy="1078992"/>
+            <a:ext cx="4041648" cy="1024128"/>
           </a:xfrm>
           <a:prstGeom prst="rect">
             <a:avLst/>
@@ -24388,7 +27076,7 @@
               <a:lnSpc>
                 <a:spcPct val="95000"/>
               </a:lnSpc>
-              <a:defRPr sz="1230" b="1">
+              <a:defRPr sz="1160" b="1">
                 <a:solidFill>
                   <a:srgbClr val="FFFFFF"/>
                 </a:solidFill>
@@ -24403,14 +27091,14 @@
       </p:sp>
       <p:sp>
         <p:nvSpPr>
-          <p:cNvPr id="32" name="TextBox 31"/>
-          <p:cNvSpPr txBox="1"/>
-          <p:nvPr/>
-        </p:nvSpPr>
-        <p:spPr>
-          <a:xfrm>
-            <a:off x="7187184" y="5303520"/>
-            <a:ext cx="4041648" cy="274320"/>
+          <p:cNvPr id="36" name="TextBox 35"/>
+          <p:cNvSpPr txBox="1"/>
+          <p:nvPr/>
+        </p:nvSpPr>
+        <p:spPr>
+          <a:xfrm>
+            <a:off x="7187184" y="5257800"/>
+            <a:ext cx="4041648" cy="320040"/>
           </a:xfrm>
           <a:prstGeom prst="rect">
             <a:avLst/>
@@ -24427,7 +27115,7 @@
               <a:lnSpc>
                 <a:spcPct val="100000"/>
               </a:lnSpc>
-              <a:defRPr sz="1050" b="1">
+              <a:defRPr sz="960" b="1">
                 <a:solidFill>
                   <a:srgbClr val="FFE2DB"/>
                 </a:solidFill>
@@ -24442,7 +27130,7 @@
       </p:sp>
       <p:sp>
         <p:nvSpPr>
-          <p:cNvPr id="33" name="TextBox 32"/>
+          <p:cNvPr id="37" name="TextBox 36"/>
           <p:cNvSpPr txBox="1"/>
           <p:nvPr/>
         </p:nvSpPr>
@@ -24952,7 +27640,7 @@
         <p:spPr>
           <a:xfrm>
             <a:off x="685800" y="1828800"/>
-            <a:ext cx="2880360" cy="932688"/>
+            <a:ext cx="2880360" cy="841248"/>
           </a:xfrm>
           <a:prstGeom prst="roundRect">
             <a:avLst/>
@@ -24997,7 +27685,7 @@
         <p:spPr>
           <a:xfrm>
             <a:off x="685800" y="1828800"/>
-            <a:ext cx="91440" cy="932688"/>
+            <a:ext cx="91440" cy="841248"/>
           </a:xfrm>
           <a:prstGeom prst="rect">
             <a:avLst/>
@@ -25081,7 +27769,7 @@
         <p:spPr>
           <a:xfrm>
             <a:off x="886968" y="2212848"/>
-            <a:ext cx="2551176" cy="457200"/>
+            <a:ext cx="2551176" cy="365760"/>
           </a:xfrm>
           <a:prstGeom prst="rect">
             <a:avLst/>
@@ -25098,7 +27786,7 @@
               <a:lnSpc>
                 <a:spcPct val="95000"/>
               </a:lnSpc>
-              <a:defRPr sz="1120" b="0">
+              <a:defRPr sz="1090" b="0">
                 <a:solidFill>
                   <a:srgbClr val="121217"/>
                 </a:solidFill>
@@ -25120,7 +27808,7 @@
         <p:spPr>
           <a:xfrm>
             <a:off x="3730752" y="1828800"/>
-            <a:ext cx="2880360" cy="932688"/>
+            <a:ext cx="2880360" cy="841248"/>
           </a:xfrm>
           <a:prstGeom prst="roundRect">
             <a:avLst/>
@@ -25165,7 +27853,7 @@
         <p:spPr>
           <a:xfrm>
             <a:off x="3730752" y="1828800"/>
-            <a:ext cx="91440" cy="932688"/>
+            <a:ext cx="91440" cy="841248"/>
           </a:xfrm>
           <a:prstGeom prst="rect">
             <a:avLst/>
@@ -25235,7 +27923,7 @@
               </a:defRPr>
             </a:pPr>
             <a:r>
-              <a:t>WHAT CHANGED</a:t>
+              <a:t>PROBLEM IT SOLVES</a:t>
             </a:r>
           </a:p>
         </p:txBody>
@@ -25249,7 +27937,7 @@
         <p:spPr>
           <a:xfrm>
             <a:off x="3931920" y="2212848"/>
-            <a:ext cx="2551176" cy="457200"/>
+            <a:ext cx="2551176" cy="365760"/>
           </a:xfrm>
           <a:prstGeom prst="rect">
             <a:avLst/>
@@ -25266,7 +27954,7 @@
               <a:lnSpc>
                 <a:spcPct val="95000"/>
               </a:lnSpc>
-              <a:defRPr sz="1070" b="0">
+              <a:defRPr sz="990" b="0">
                 <a:solidFill>
                   <a:srgbClr val="121217"/>
                 </a:solidFill>
@@ -25274,7 +27962,7 @@
               </a:defRPr>
             </a:pPr>
             <a:r>
-              <a:t>LTAP, Lakebase as the transactional layer, disaster recovery, branching and snapshots.</a:t>
+              <a:t>Apps and agents need transactional state as well as analytics. It solves the “where does an AI app store orders, cases, approvals, memory and recovery state?” problem.</a:t>
             </a:r>
           </a:p>
         </p:txBody>
@@ -25287,8 +27975,8 @@
         </p:nvSpPr>
         <p:spPr>
           <a:xfrm>
-            <a:off x="685800" y="2944368"/>
-            <a:ext cx="5925312" cy="1572768"/>
+            <a:off x="685800" y="2834640"/>
+            <a:ext cx="5925312" cy="1353312"/>
           </a:xfrm>
           <a:prstGeom prst="roundRect">
             <a:avLst/>
@@ -25332,8 +28020,8 @@
         </p:nvSpPr>
         <p:spPr>
           <a:xfrm>
-            <a:off x="685800" y="2944368"/>
-            <a:ext cx="91440" cy="1572768"/>
+            <a:off x="685800" y="2834640"/>
+            <a:ext cx="91440" cy="1353312"/>
           </a:xfrm>
           <a:prstGeom prst="rect">
             <a:avLst/>
@@ -25377,7 +28065,7 @@
         </p:nvSpPr>
         <p:spPr>
           <a:xfrm>
-            <a:off x="886968" y="3063240"/>
+            <a:off x="886968" y="2953512"/>
             <a:ext cx="5596128" cy="228600"/>
           </a:xfrm>
           <a:prstGeom prst="rect">
@@ -25416,8 +28104,8 @@
         </p:nvSpPr>
         <p:spPr>
           <a:xfrm>
-            <a:off x="886968" y="3328416"/>
-            <a:ext cx="5596128" cy="1097280"/>
+            <a:off x="886968" y="3218688"/>
+            <a:ext cx="5596128" cy="877824"/>
           </a:xfrm>
           <a:prstGeom prst="rect">
             <a:avLst/>
@@ -25434,7 +28122,7 @@
               <a:lnSpc>
                 <a:spcPct val="95000"/>
               </a:lnSpc>
-              <a:defRPr sz="1090" b="0">
+              <a:defRPr sz="990" b="0">
                 <a:solidFill>
                   <a:srgbClr val="121217"/>
                 </a:solidFill>
@@ -25455,8 +28143,8 @@
         </p:nvSpPr>
         <p:spPr>
           <a:xfrm>
-            <a:off x="685800" y="4700016"/>
-            <a:ext cx="5925312" cy="1078992"/>
+            <a:off x="685800" y="4352544"/>
+            <a:ext cx="5925312" cy="987552"/>
           </a:xfrm>
           <a:prstGeom prst="roundRect">
             <a:avLst/>
@@ -25500,8 +28188,8 @@
         </p:nvSpPr>
         <p:spPr>
           <a:xfrm>
-            <a:off x="685800" y="4700016"/>
-            <a:ext cx="91440" cy="1078992"/>
+            <a:off x="685800" y="4352544"/>
+            <a:ext cx="91440" cy="987552"/>
           </a:xfrm>
           <a:prstGeom prst="rect">
             <a:avLst/>
@@ -25545,7 +28233,7 @@
         </p:nvSpPr>
         <p:spPr>
           <a:xfrm>
-            <a:off x="886968" y="4818888"/>
+            <a:off x="886968" y="4471416"/>
             <a:ext cx="5596128" cy="228600"/>
           </a:xfrm>
           <a:prstGeom prst="rect">
@@ -25571,7 +28259,7 @@
               </a:defRPr>
             </a:pPr>
             <a:r>
-              <a:t>WHAT IT MEANS TO CUSTOMERS</a:t>
+              <a:t>CUSTOMER IMPACT EXAMPLE</a:t>
             </a:r>
           </a:p>
         </p:txBody>
@@ -25584,8 +28272,8 @@
         </p:nvSpPr>
         <p:spPr>
           <a:xfrm>
-            <a:off x="886968" y="5084064"/>
-            <a:ext cx="5596128" cy="603503"/>
+            <a:off x="886968" y="4736592"/>
+            <a:ext cx="5596128" cy="512064"/>
           </a:xfrm>
           <a:prstGeom prst="rect">
             <a:avLst/>
@@ -25602,7 +28290,7 @@
               <a:lnSpc>
                 <a:spcPct val="95000"/>
               </a:lnSpc>
-              <a:defRPr sz="1110" b="0">
+              <a:defRPr sz="1030" b="0">
                 <a:solidFill>
                   <a:srgbClr val="121217"/>
                 </a:solidFill>
@@ -25618,6 +28306,174 @@
       <p:sp>
         <p:nvSpPr>
           <p:cNvPr id="29" name="Rounded Rectangle 28"/>
+          <p:cNvSpPr/>
+          <p:nvPr/>
+        </p:nvSpPr>
+        <p:spPr>
+          <a:xfrm>
+            <a:off x="685800" y="5504688"/>
+            <a:ext cx="5925312" cy="384048"/>
+          </a:xfrm>
+          <a:prstGeom prst="roundRect">
+            <a:avLst/>
+          </a:prstGeom>
+          <a:solidFill>
+            <a:srgbClr val="FFFFFF"/>
+          </a:solidFill>
+          <a:ln w="10160">
+            <a:solidFill>
+              <a:srgbClr val="E2DDD2"/>
+            </a:solidFill>
+          </a:ln>
+        </p:spPr>
+        <p:style>
+          <a:lnRef idx="1">
+            <a:schemeClr val="accent1"/>
+          </a:lnRef>
+          <a:fillRef idx="3">
+            <a:schemeClr val="accent1"/>
+          </a:fillRef>
+          <a:effectRef idx="2">
+            <a:schemeClr val="accent1"/>
+          </a:effectRef>
+          <a:fontRef idx="minor">
+            <a:schemeClr val="lt1"/>
+          </a:fontRef>
+        </p:style>
+        <p:txBody>
+          <a:bodyPr rtlCol="0" anchor="ctr"/>
+          <a:lstStyle/>
+          <a:p>
+            <a:pPr algn="ctr"/>
+          </a:p>
+        </p:txBody>
+      </p:sp>
+      <p:sp>
+        <p:nvSpPr>
+          <p:cNvPr id="30" name="Rectangle 29"/>
+          <p:cNvSpPr/>
+          <p:nvPr/>
+        </p:nvSpPr>
+        <p:spPr>
+          <a:xfrm>
+            <a:off x="685800" y="5504688"/>
+            <a:ext cx="91440" cy="384048"/>
+          </a:xfrm>
+          <a:prstGeom prst="rect">
+            <a:avLst/>
+          </a:prstGeom>
+          <a:solidFill>
+            <a:srgbClr val="007368"/>
+          </a:solidFill>
+          <a:ln w="10160">
+            <a:solidFill>
+              <a:srgbClr val="007368"/>
+            </a:solidFill>
+          </a:ln>
+        </p:spPr>
+        <p:style>
+          <a:lnRef idx="1">
+            <a:schemeClr val="accent1"/>
+          </a:lnRef>
+          <a:fillRef idx="3">
+            <a:schemeClr val="accent1"/>
+          </a:fillRef>
+          <a:effectRef idx="2">
+            <a:schemeClr val="accent1"/>
+          </a:effectRef>
+          <a:fontRef idx="minor">
+            <a:schemeClr val="lt1"/>
+          </a:fontRef>
+        </p:style>
+        <p:txBody>
+          <a:bodyPr rtlCol="0" anchor="ctr"/>
+          <a:lstStyle/>
+          <a:p>
+            <a:pPr algn="ctr"/>
+          </a:p>
+        </p:txBody>
+      </p:sp>
+      <p:sp>
+        <p:nvSpPr>
+          <p:cNvPr id="31" name="TextBox 30"/>
+          <p:cNvSpPr txBox="1"/>
+          <p:nvPr/>
+        </p:nvSpPr>
+        <p:spPr>
+          <a:xfrm>
+            <a:off x="886968" y="5623559"/>
+            <a:ext cx="5596128" cy="228600"/>
+          </a:xfrm>
+          <a:prstGeom prst="rect">
+            <a:avLst/>
+          </a:prstGeom>
+          <a:noFill/>
+        </p:spPr>
+        <p:txBody>
+          <a:bodyPr wrap="square" lIns="27432" rIns="27432" tIns="18288" bIns="18288">
+            <a:normAutofit/>
+          </a:bodyPr>
+          <a:lstStyle/>
+          <a:p>
+            <a:pPr>
+              <a:lnSpc>
+                <a:spcPct val="100000"/>
+              </a:lnSpc>
+              <a:defRPr sz="720" b="1">
+                <a:solidFill>
+                  <a:srgbClr val="5E5B54"/>
+                </a:solidFill>
+                <a:latin typeface="Aptos"/>
+              </a:defRPr>
+            </a:pPr>
+            <a:r>
+              <a:t>WHAT CHANGED</a:t>
+            </a:r>
+          </a:p>
+        </p:txBody>
+      </p:sp>
+      <p:sp>
+        <p:nvSpPr>
+          <p:cNvPr id="32" name="TextBox 31"/>
+          <p:cNvSpPr txBox="1"/>
+          <p:nvPr/>
+        </p:nvSpPr>
+        <p:spPr>
+          <a:xfrm>
+            <a:off x="886968" y="5888736"/>
+            <a:ext cx="5596128" cy="-91440"/>
+          </a:xfrm>
+          <a:prstGeom prst="rect">
+            <a:avLst/>
+          </a:prstGeom>
+          <a:noFill/>
+        </p:spPr>
+        <p:txBody>
+          <a:bodyPr wrap="square" lIns="27432" rIns="27432" tIns="18288" bIns="18288">
+            <a:normAutofit/>
+          </a:bodyPr>
+          <a:lstStyle/>
+          <a:p>
+            <a:pPr>
+              <a:lnSpc>
+                <a:spcPct val="95000"/>
+              </a:lnSpc>
+              <a:defRPr sz="780" b="0">
+                <a:solidFill>
+                  <a:srgbClr val="121217"/>
+                </a:solidFill>
+                <a:latin typeface="Aptos"/>
+              </a:defRPr>
+            </a:pPr>
+            <a:r>
+              <a:t>LTAP, Lakebase as the transactional layer, disaster recovery, branching and snapshots.</a:t>
+            </a:r>
+          </a:p>
+        </p:txBody>
+      </p:sp>
+      <p:sp>
+        <p:nvSpPr>
+          <p:cNvPr id="33" name="Rounded Rectangle 32"/>
           <p:cNvSpPr/>
           <p:nvPr/>
         </p:nvSpPr>
@@ -25662,7 +28518,7 @@
       </p:sp>
       <p:sp>
         <p:nvSpPr>
-          <p:cNvPr id="30" name="TextBox 29"/>
+          <p:cNvPr id="34" name="TextBox 33"/>
           <p:cNvSpPr txBox="1"/>
           <p:nvPr/>
         </p:nvSpPr>
@@ -25701,14 +28557,14 @@
       </p:sp>
       <p:sp>
         <p:nvSpPr>
-          <p:cNvPr id="31" name="TextBox 30"/>
+          <p:cNvPr id="35" name="TextBox 34"/>
           <p:cNvSpPr txBox="1"/>
           <p:nvPr/>
         </p:nvSpPr>
         <p:spPr>
           <a:xfrm>
             <a:off x="7187184" y="4151376"/>
-            <a:ext cx="4041648" cy="1078992"/>
+            <a:ext cx="4041648" cy="1024128"/>
           </a:xfrm>
           <a:prstGeom prst="rect">
             <a:avLst/>
@@ -25725,7 +28581,7 @@
               <a:lnSpc>
                 <a:spcPct val="95000"/>
               </a:lnSpc>
-              <a:defRPr sz="1230" b="1">
+              <a:defRPr sz="1160" b="1">
                 <a:solidFill>
                   <a:srgbClr val="FFFFFF"/>
                 </a:solidFill>
@@ -25740,14 +28596,14 @@
       </p:sp>
       <p:sp>
         <p:nvSpPr>
-          <p:cNvPr id="32" name="TextBox 31"/>
-          <p:cNvSpPr txBox="1"/>
-          <p:nvPr/>
-        </p:nvSpPr>
-        <p:spPr>
-          <a:xfrm>
-            <a:off x="7187184" y="5303520"/>
-            <a:ext cx="4041648" cy="274320"/>
+          <p:cNvPr id="36" name="TextBox 35"/>
+          <p:cNvSpPr txBox="1"/>
+          <p:nvPr/>
+        </p:nvSpPr>
+        <p:spPr>
+          <a:xfrm>
+            <a:off x="7187184" y="5257800"/>
+            <a:ext cx="4041648" cy="320040"/>
           </a:xfrm>
           <a:prstGeom prst="rect">
             <a:avLst/>
@@ -25764,7 +28620,7 @@
               <a:lnSpc>
                 <a:spcPct val="100000"/>
               </a:lnSpc>
-              <a:defRPr sz="1050" b="1">
+              <a:defRPr sz="960" b="1">
                 <a:solidFill>
                   <a:srgbClr val="FFE2DB"/>
                 </a:solidFill>
@@ -25779,7 +28635,7 @@
       </p:sp>
       <p:sp>
         <p:nvSpPr>
-          <p:cNvPr id="33" name="TextBox 32"/>
+          <p:cNvPr id="37" name="TextBox 36"/>
           <p:cNvSpPr txBox="1"/>
           <p:nvPr/>
         </p:nvSpPr>
@@ -26289,7 +29145,7 @@
         <p:spPr>
           <a:xfrm>
             <a:off x="685800" y="1828800"/>
-            <a:ext cx="2880360" cy="932688"/>
+            <a:ext cx="2880360" cy="841248"/>
           </a:xfrm>
           <a:prstGeom prst="roundRect">
             <a:avLst/>
@@ -26334,7 +29190,7 @@
         <p:spPr>
           <a:xfrm>
             <a:off x="685800" y="1828800"/>
-            <a:ext cx="91440" cy="932688"/>
+            <a:ext cx="91440" cy="841248"/>
           </a:xfrm>
           <a:prstGeom prst="rect">
             <a:avLst/>
@@ -26418,7 +29274,7 @@
         <p:spPr>
           <a:xfrm>
             <a:off x="886968" y="2212848"/>
-            <a:ext cx="2551176" cy="457200"/>
+            <a:ext cx="2551176" cy="365760"/>
           </a:xfrm>
           <a:prstGeom prst="rect">
             <a:avLst/>
@@ -26435,7 +29291,7 @@
               <a:lnSpc>
                 <a:spcPct val="95000"/>
               </a:lnSpc>
-              <a:defRPr sz="1120" b="0">
+              <a:defRPr sz="1090" b="0">
                 <a:solidFill>
                   <a:srgbClr val="121217"/>
                 </a:solidFill>
@@ -26457,7 +29313,7 @@
         <p:spPr>
           <a:xfrm>
             <a:off x="3730752" y="1828800"/>
-            <a:ext cx="2880360" cy="932688"/>
+            <a:ext cx="2880360" cy="841248"/>
           </a:xfrm>
           <a:prstGeom prst="roundRect">
             <a:avLst/>
@@ -26502,7 +29358,7 @@
         <p:spPr>
           <a:xfrm>
             <a:off x="3730752" y="1828800"/>
-            <a:ext cx="91440" cy="932688"/>
+            <a:ext cx="91440" cy="841248"/>
           </a:xfrm>
           <a:prstGeom prst="rect">
             <a:avLst/>
@@ -26572,7 +29428,7 @@
               </a:defRPr>
             </a:pPr>
             <a:r>
-              <a:t>WHAT CHANGED</a:t>
+              <a:t>PROBLEM IT SOLVES</a:t>
             </a:r>
           </a:p>
         </p:txBody>
@@ -26586,7 +29442,7 @@
         <p:spPr>
           <a:xfrm>
             <a:off x="3931920" y="2212848"/>
-            <a:ext cx="2551176" cy="457200"/>
+            <a:ext cx="2551176" cy="365760"/>
           </a:xfrm>
           <a:prstGeom prst="rect">
             <a:avLst/>
@@ -26603,7 +29459,7 @@
               <a:lnSpc>
                 <a:spcPct val="95000"/>
               </a:lnSpc>
-              <a:defRPr sz="1070" b="0">
+              <a:defRPr sz="990" b="0">
                 <a:solidFill>
                   <a:srgbClr val="121217"/>
                 </a:solidFill>
@@ -26611,7 +29467,7 @@
               </a:defRPr>
             </a:pPr>
             <a:r>
-              <a:t>More connectors, Designer, Genie Code help, Zerobus ingest and Lakeflow Jobs.</a:t>
+              <a:t>Data pipelines are fragmented, brittle and slow to change. It solves the “how do we keep trusted data flowing into analytics and AI without endless plumbing?” problem.</a:t>
             </a:r>
           </a:p>
         </p:txBody>
@@ -26624,8 +29480,8 @@
         </p:nvSpPr>
         <p:spPr>
           <a:xfrm>
-            <a:off x="685800" y="2944368"/>
-            <a:ext cx="5925312" cy="1572768"/>
+            <a:off x="685800" y="2834640"/>
+            <a:ext cx="5925312" cy="1353312"/>
           </a:xfrm>
           <a:prstGeom prst="roundRect">
             <a:avLst/>
@@ -26669,8 +29525,8 @@
         </p:nvSpPr>
         <p:spPr>
           <a:xfrm>
-            <a:off x="685800" y="2944368"/>
-            <a:ext cx="91440" cy="1572768"/>
+            <a:off x="685800" y="2834640"/>
+            <a:ext cx="91440" cy="1353312"/>
           </a:xfrm>
           <a:prstGeom prst="rect">
             <a:avLst/>
@@ -26714,7 +29570,7 @@
         </p:nvSpPr>
         <p:spPr>
           <a:xfrm>
-            <a:off x="886968" y="3063240"/>
+            <a:off x="886968" y="2953512"/>
             <a:ext cx="5596128" cy="228600"/>
           </a:xfrm>
           <a:prstGeom prst="rect">
@@ -26753,8 +29609,8 @@
         </p:nvSpPr>
         <p:spPr>
           <a:xfrm>
-            <a:off x="886968" y="3328416"/>
-            <a:ext cx="5596128" cy="1097280"/>
+            <a:off x="886968" y="3218688"/>
+            <a:ext cx="5596128" cy="877824"/>
           </a:xfrm>
           <a:prstGeom prst="rect">
             <a:avLst/>
@@ -26771,7 +29627,7 @@
               <a:lnSpc>
                 <a:spcPct val="95000"/>
               </a:lnSpc>
-              <a:defRPr sz="1090" b="0">
+              <a:defRPr sz="990" b="0">
                 <a:solidFill>
                   <a:srgbClr val="121217"/>
                 </a:solidFill>
@@ -26792,8 +29648,8 @@
         </p:nvSpPr>
         <p:spPr>
           <a:xfrm>
-            <a:off x="685800" y="4700016"/>
-            <a:ext cx="5925312" cy="1078992"/>
+            <a:off x="685800" y="4352544"/>
+            <a:ext cx="5925312" cy="987552"/>
           </a:xfrm>
           <a:prstGeom prst="roundRect">
             <a:avLst/>
@@ -26837,8 +29693,8 @@
         </p:nvSpPr>
         <p:spPr>
           <a:xfrm>
-            <a:off x="685800" y="4700016"/>
-            <a:ext cx="91440" cy="1078992"/>
+            <a:off x="685800" y="4352544"/>
+            <a:ext cx="91440" cy="987552"/>
           </a:xfrm>
           <a:prstGeom prst="rect">
             <a:avLst/>
@@ -26882,7 +29738,7 @@
         </p:nvSpPr>
         <p:spPr>
           <a:xfrm>
-            <a:off x="886968" y="4818888"/>
+            <a:off x="886968" y="4471416"/>
             <a:ext cx="5596128" cy="228600"/>
           </a:xfrm>
           <a:prstGeom prst="rect">
@@ -26908,7 +29764,7 @@
               </a:defRPr>
             </a:pPr>
             <a:r>
-              <a:t>WHAT IT MEANS TO CUSTOMERS</a:t>
+              <a:t>CUSTOMER IMPACT EXAMPLE</a:t>
             </a:r>
           </a:p>
         </p:txBody>
@@ -26921,8 +29777,8 @@
         </p:nvSpPr>
         <p:spPr>
           <a:xfrm>
-            <a:off x="886968" y="5084064"/>
-            <a:ext cx="5596128" cy="603503"/>
+            <a:off x="886968" y="4736592"/>
+            <a:ext cx="5596128" cy="512064"/>
           </a:xfrm>
           <a:prstGeom prst="rect">
             <a:avLst/>
@@ -26939,7 +29795,7 @@
               <a:lnSpc>
                 <a:spcPct val="95000"/>
               </a:lnSpc>
-              <a:defRPr sz="1110" b="0">
+              <a:defRPr sz="1030" b="0">
                 <a:solidFill>
                   <a:srgbClr val="121217"/>
                 </a:solidFill>
@@ -26955,6 +29811,174 @@
       <p:sp>
         <p:nvSpPr>
           <p:cNvPr id="29" name="Rounded Rectangle 28"/>
+          <p:cNvSpPr/>
+          <p:nvPr/>
+        </p:nvSpPr>
+        <p:spPr>
+          <a:xfrm>
+            <a:off x="685800" y="5504688"/>
+            <a:ext cx="5925312" cy="384048"/>
+          </a:xfrm>
+          <a:prstGeom prst="roundRect">
+            <a:avLst/>
+          </a:prstGeom>
+          <a:solidFill>
+            <a:srgbClr val="FFFFFF"/>
+          </a:solidFill>
+          <a:ln w="10160">
+            <a:solidFill>
+              <a:srgbClr val="E2DDD2"/>
+            </a:solidFill>
+          </a:ln>
+        </p:spPr>
+        <p:style>
+          <a:lnRef idx="1">
+            <a:schemeClr val="accent1"/>
+          </a:lnRef>
+          <a:fillRef idx="3">
+            <a:schemeClr val="accent1"/>
+          </a:fillRef>
+          <a:effectRef idx="2">
+            <a:schemeClr val="accent1"/>
+          </a:effectRef>
+          <a:fontRef idx="minor">
+            <a:schemeClr val="lt1"/>
+          </a:fontRef>
+        </p:style>
+        <p:txBody>
+          <a:bodyPr rtlCol="0" anchor="ctr"/>
+          <a:lstStyle/>
+          <a:p>
+            <a:pPr algn="ctr"/>
+          </a:p>
+        </p:txBody>
+      </p:sp>
+      <p:sp>
+        <p:nvSpPr>
+          <p:cNvPr id="30" name="Rectangle 29"/>
+          <p:cNvSpPr/>
+          <p:nvPr/>
+        </p:nvSpPr>
+        <p:spPr>
+          <a:xfrm>
+            <a:off x="685800" y="5504688"/>
+            <a:ext cx="91440" cy="384048"/>
+          </a:xfrm>
+          <a:prstGeom prst="rect">
+            <a:avLst/>
+          </a:prstGeom>
+          <a:solidFill>
+            <a:srgbClr val="306998"/>
+          </a:solidFill>
+          <a:ln w="10160">
+            <a:solidFill>
+              <a:srgbClr val="306998"/>
+            </a:solidFill>
+          </a:ln>
+        </p:spPr>
+        <p:style>
+          <a:lnRef idx="1">
+            <a:schemeClr val="accent1"/>
+          </a:lnRef>
+          <a:fillRef idx="3">
+            <a:schemeClr val="accent1"/>
+          </a:fillRef>
+          <a:effectRef idx="2">
+            <a:schemeClr val="accent1"/>
+          </a:effectRef>
+          <a:fontRef idx="minor">
+            <a:schemeClr val="lt1"/>
+          </a:fontRef>
+        </p:style>
+        <p:txBody>
+          <a:bodyPr rtlCol="0" anchor="ctr"/>
+          <a:lstStyle/>
+          <a:p>
+            <a:pPr algn="ctr"/>
+          </a:p>
+        </p:txBody>
+      </p:sp>
+      <p:sp>
+        <p:nvSpPr>
+          <p:cNvPr id="31" name="TextBox 30"/>
+          <p:cNvSpPr txBox="1"/>
+          <p:nvPr/>
+        </p:nvSpPr>
+        <p:spPr>
+          <a:xfrm>
+            <a:off x="886968" y="5623559"/>
+            <a:ext cx="5596128" cy="228600"/>
+          </a:xfrm>
+          <a:prstGeom prst="rect">
+            <a:avLst/>
+          </a:prstGeom>
+          <a:noFill/>
+        </p:spPr>
+        <p:txBody>
+          <a:bodyPr wrap="square" lIns="27432" rIns="27432" tIns="18288" bIns="18288">
+            <a:normAutofit/>
+          </a:bodyPr>
+          <a:lstStyle/>
+          <a:p>
+            <a:pPr>
+              <a:lnSpc>
+                <a:spcPct val="100000"/>
+              </a:lnSpc>
+              <a:defRPr sz="720" b="1">
+                <a:solidFill>
+                  <a:srgbClr val="5E5B54"/>
+                </a:solidFill>
+                <a:latin typeface="Aptos"/>
+              </a:defRPr>
+            </a:pPr>
+            <a:r>
+              <a:t>WHAT CHANGED</a:t>
+            </a:r>
+          </a:p>
+        </p:txBody>
+      </p:sp>
+      <p:sp>
+        <p:nvSpPr>
+          <p:cNvPr id="32" name="TextBox 31"/>
+          <p:cNvSpPr txBox="1"/>
+          <p:nvPr/>
+        </p:nvSpPr>
+        <p:spPr>
+          <a:xfrm>
+            <a:off x="886968" y="5888736"/>
+            <a:ext cx="5596128" cy="-91440"/>
+          </a:xfrm>
+          <a:prstGeom prst="rect">
+            <a:avLst/>
+          </a:prstGeom>
+          <a:noFill/>
+        </p:spPr>
+        <p:txBody>
+          <a:bodyPr wrap="square" lIns="27432" rIns="27432" tIns="18288" bIns="18288">
+            <a:normAutofit/>
+          </a:bodyPr>
+          <a:lstStyle/>
+          <a:p>
+            <a:pPr>
+              <a:lnSpc>
+                <a:spcPct val="95000"/>
+              </a:lnSpc>
+              <a:defRPr sz="780" b="0">
+                <a:solidFill>
+                  <a:srgbClr val="121217"/>
+                </a:solidFill>
+                <a:latin typeface="Aptos"/>
+              </a:defRPr>
+            </a:pPr>
+            <a:r>
+              <a:t>More connectors, Designer, Genie Code help, Zerobus ingest and Lakeflow Jobs.</a:t>
+            </a:r>
+          </a:p>
+        </p:txBody>
+      </p:sp>
+      <p:sp>
+        <p:nvSpPr>
+          <p:cNvPr id="33" name="Rounded Rectangle 32"/>
           <p:cNvSpPr/>
           <p:nvPr/>
         </p:nvSpPr>
@@ -26999,7 +30023,7 @@
       </p:sp>
       <p:sp>
         <p:nvSpPr>
-          <p:cNvPr id="30" name="TextBox 29"/>
+          <p:cNvPr id="34" name="TextBox 33"/>
           <p:cNvSpPr txBox="1"/>
           <p:nvPr/>
         </p:nvSpPr>
@@ -27038,14 +30062,14 @@
       </p:sp>
       <p:sp>
         <p:nvSpPr>
-          <p:cNvPr id="31" name="TextBox 30"/>
+          <p:cNvPr id="35" name="TextBox 34"/>
           <p:cNvSpPr txBox="1"/>
           <p:nvPr/>
         </p:nvSpPr>
         <p:spPr>
           <a:xfrm>
             <a:off x="7187184" y="4151376"/>
-            <a:ext cx="4041648" cy="1078992"/>
+            <a:ext cx="4041648" cy="1024128"/>
           </a:xfrm>
           <a:prstGeom prst="rect">
             <a:avLst/>
@@ -27062,7 +30086,7 @@
               <a:lnSpc>
                 <a:spcPct val="95000"/>
               </a:lnSpc>
-              <a:defRPr sz="1230" b="1">
+              <a:defRPr sz="1160" b="1">
                 <a:solidFill>
                   <a:srgbClr val="FFFFFF"/>
                 </a:solidFill>
@@ -27077,14 +30101,14 @@
       </p:sp>
       <p:sp>
         <p:nvSpPr>
-          <p:cNvPr id="32" name="TextBox 31"/>
-          <p:cNvSpPr txBox="1"/>
-          <p:nvPr/>
-        </p:nvSpPr>
-        <p:spPr>
-          <a:xfrm>
-            <a:off x="7187184" y="5303520"/>
-            <a:ext cx="4041648" cy="274320"/>
+          <p:cNvPr id="36" name="TextBox 35"/>
+          <p:cNvSpPr txBox="1"/>
+          <p:nvPr/>
+        </p:nvSpPr>
+        <p:spPr>
+          <a:xfrm>
+            <a:off x="7187184" y="5257800"/>
+            <a:ext cx="4041648" cy="320040"/>
           </a:xfrm>
           <a:prstGeom prst="rect">
             <a:avLst/>
@@ -27101,7 +30125,7 @@
               <a:lnSpc>
                 <a:spcPct val="100000"/>
               </a:lnSpc>
-              <a:defRPr sz="1050" b="1">
+              <a:defRPr sz="960" b="1">
                 <a:solidFill>
                   <a:srgbClr val="FFE2DB"/>
                 </a:solidFill>
@@ -27116,7 +30140,7 @@
       </p:sp>
       <p:sp>
         <p:nvSpPr>
-          <p:cNvPr id="33" name="TextBox 32"/>
+          <p:cNvPr id="37" name="TextBox 36"/>
           <p:cNvSpPr txBox="1"/>
           <p:nvPr/>
         </p:nvSpPr>
